--- a/Milestones/M1/SalesForecastingandDemandPredication-Presentation.pptx
+++ b/Milestones/M1/SalesForecastingandDemandPredication-Presentation.pptx
@@ -5,28 +5,36 @@
     <p:sldMasterId id="2147483648" r:id="rId1"/>
   </p:sldMasterIdLst>
   <p:notesMasterIdLst>
-    <p:notesMasterId r:id="rId21"/>
+    <p:notesMasterId r:id="rId29"/>
   </p:notesMasterIdLst>
   <p:sldIdLst>
     <p:sldId id="259" r:id="rId2"/>
     <p:sldId id="260" r:id="rId3"/>
     <p:sldId id="263" r:id="rId4"/>
-    <p:sldId id="266" r:id="rId5"/>
-    <p:sldId id="268" r:id="rId6"/>
-    <p:sldId id="267" r:id="rId7"/>
-    <p:sldId id="286" r:id="rId8"/>
-    <p:sldId id="269" r:id="rId9"/>
-    <p:sldId id="275" r:id="rId10"/>
-    <p:sldId id="271" r:id="rId11"/>
-    <p:sldId id="288" r:id="rId12"/>
-    <p:sldId id="287" r:id="rId13"/>
-    <p:sldId id="289" r:id="rId14"/>
-    <p:sldId id="290" r:id="rId15"/>
-    <p:sldId id="291" r:id="rId16"/>
-    <p:sldId id="292" r:id="rId17"/>
-    <p:sldId id="293" r:id="rId18"/>
-    <p:sldId id="284" r:id="rId19"/>
-    <p:sldId id="265" r:id="rId20"/>
+    <p:sldId id="302" r:id="rId5"/>
+    <p:sldId id="303" r:id="rId6"/>
+    <p:sldId id="304" r:id="rId7"/>
+    <p:sldId id="266" r:id="rId8"/>
+    <p:sldId id="268" r:id="rId9"/>
+    <p:sldId id="267" r:id="rId10"/>
+    <p:sldId id="286" r:id="rId11"/>
+    <p:sldId id="269" r:id="rId12"/>
+    <p:sldId id="275" r:id="rId13"/>
+    <p:sldId id="271" r:id="rId14"/>
+    <p:sldId id="288" r:id="rId15"/>
+    <p:sldId id="287" r:id="rId16"/>
+    <p:sldId id="289" r:id="rId17"/>
+    <p:sldId id="290" r:id="rId18"/>
+    <p:sldId id="291" r:id="rId19"/>
+    <p:sldId id="292" r:id="rId20"/>
+    <p:sldId id="293" r:id="rId21"/>
+    <p:sldId id="294" r:id="rId22"/>
+    <p:sldId id="295" r:id="rId23"/>
+    <p:sldId id="299" r:id="rId24"/>
+    <p:sldId id="300" r:id="rId25"/>
+    <p:sldId id="301" r:id="rId26"/>
+    <p:sldId id="284" r:id="rId27"/>
+    <p:sldId id="265" r:id="rId28"/>
   </p:sldIdLst>
   <p:sldSz cx="12192000" cy="6858000"/>
   <p:notesSz cx="6858000" cy="9144000"/>
@@ -215,7 +223,7 @@
           <a:p>
             <a:fld id="{9193DB14-E671-4D6C-AB1A-F47C69626F12}" type="datetimeFigureOut">
               <a:rPr lang="en-US" smtClean="0"/>
-              <a:t>3/16/2025</a:t>
+              <a:t>5/3/2025</a:t>
             </a:fld>
             <a:endParaRPr lang="en-US"/>
           </a:p>
@@ -547,7 +555,199 @@
           <a:p>
             <a:fld id="{23EBDB5D-BDAC-4914-AAE6-E8D70871AB7D}" type="slidenum">
               <a:rPr lang="en-US" smtClean="0"/>
-              <a:t>7</a:t>
+              <a:t>5</a:t>
+            </a:fld>
+            <a:endParaRPr lang="en-US"/>
+          </a:p>
+        </p:txBody>
+      </p:sp>
+    </p:spTree>
+    <p:extLst>
+      <p:ext uri="{BB962C8B-B14F-4D97-AF65-F5344CB8AC3E}">
+        <p14:creationId xmlns:p14="http://schemas.microsoft.com/office/powerpoint/2010/main" val="2395657364"/>
+      </p:ext>
+    </p:extLst>
+  </p:cSld>
+  <p:clrMapOvr>
+    <a:masterClrMapping/>
+  </p:clrMapOvr>
+</p:notes>
+</file>
+
+<file path=ppt/notesSlides/notesSlide2.xml><?xml version="1.0" encoding="utf-8"?>
+<p:notes xmlns:a="http://schemas.openxmlformats.org/drawingml/2006/main" xmlns:r="http://schemas.openxmlformats.org/officeDocument/2006/relationships" xmlns:p="http://schemas.openxmlformats.org/presentationml/2006/main">
+  <p:cSld>
+    <p:spTree>
+      <p:nvGrpSpPr>
+        <p:cNvPr id="1" name="">
+          <a:extLst>
+            <a:ext uri="{FF2B5EF4-FFF2-40B4-BE49-F238E27FC236}">
+              <a16:creationId xmlns:a16="http://schemas.microsoft.com/office/drawing/2014/main" id="{F580AC7F-E8A8-BDEE-7CEF-7AD654CAA4D9}"/>
+            </a:ext>
+          </a:extLst>
+        </p:cNvPr>
+        <p:cNvGrpSpPr/>
+        <p:nvPr/>
+      </p:nvGrpSpPr>
+      <p:grpSpPr>
+        <a:xfrm>
+          <a:off x="0" y="0"/>
+          <a:ext cx="0" cy="0"/>
+          <a:chOff x="0" y="0"/>
+          <a:chExt cx="0" cy="0"/>
+        </a:xfrm>
+      </p:grpSpPr>
+      <p:sp>
+        <p:nvSpPr>
+          <p:cNvPr id="2" name="Slide Image Placeholder 1">
+            <a:extLst>
+              <a:ext uri="{FF2B5EF4-FFF2-40B4-BE49-F238E27FC236}">
+                <a16:creationId xmlns:a16="http://schemas.microsoft.com/office/drawing/2014/main" id="{4D1D20F8-7383-461A-7B30-992F34DA6206}"/>
+              </a:ext>
+            </a:extLst>
+          </p:cNvPr>
+          <p:cNvSpPr>
+            <a:spLocks noGrp="1" noRot="1" noChangeAspect="1"/>
+          </p:cNvSpPr>
+          <p:nvPr>
+            <p:ph type="sldImg"/>
+          </p:nvPr>
+        </p:nvSpPr>
+        <p:spPr/>
+      </p:sp>
+      <p:sp>
+        <p:nvSpPr>
+          <p:cNvPr id="3" name="Notes Placeholder 2">
+            <a:extLst>
+              <a:ext uri="{FF2B5EF4-FFF2-40B4-BE49-F238E27FC236}">
+                <a16:creationId xmlns:a16="http://schemas.microsoft.com/office/drawing/2014/main" id="{3AC96E4C-8F34-7729-EEDB-A6ABD3936028}"/>
+              </a:ext>
+            </a:extLst>
+          </p:cNvPr>
+          <p:cNvSpPr>
+            <a:spLocks noGrp="1"/>
+          </p:cNvSpPr>
+          <p:nvPr>
+            <p:ph type="body" idx="1"/>
+          </p:nvPr>
+        </p:nvSpPr>
+        <p:spPr/>
+        <p:txBody>
+          <a:bodyPr/>
+          <a:lstStyle/>
+          <a:p>
+            <a:endParaRPr lang="en-US" dirty="0"/>
+          </a:p>
+        </p:txBody>
+      </p:sp>
+      <p:sp>
+        <p:nvSpPr>
+          <p:cNvPr id="4" name="Slide Number Placeholder 3">
+            <a:extLst>
+              <a:ext uri="{FF2B5EF4-FFF2-40B4-BE49-F238E27FC236}">
+                <a16:creationId xmlns:a16="http://schemas.microsoft.com/office/drawing/2014/main" id="{E2AE3572-7CEA-7316-76EC-481F92079162}"/>
+              </a:ext>
+            </a:extLst>
+          </p:cNvPr>
+          <p:cNvSpPr>
+            <a:spLocks noGrp="1"/>
+          </p:cNvSpPr>
+          <p:nvPr>
+            <p:ph type="sldNum" sz="quarter" idx="5"/>
+          </p:nvPr>
+        </p:nvSpPr>
+        <p:spPr/>
+        <p:txBody>
+          <a:bodyPr/>
+          <a:lstStyle/>
+          <a:p>
+            <a:fld id="{23EBDB5D-BDAC-4914-AAE6-E8D70871AB7D}" type="slidenum">
+              <a:rPr lang="en-US" smtClean="0"/>
+              <a:t>6</a:t>
+            </a:fld>
+            <a:endParaRPr lang="en-US"/>
+          </a:p>
+        </p:txBody>
+      </p:sp>
+    </p:spTree>
+    <p:extLst>
+      <p:ext uri="{BB962C8B-B14F-4D97-AF65-F5344CB8AC3E}">
+        <p14:creationId xmlns:p14="http://schemas.microsoft.com/office/powerpoint/2010/main" val="2040556930"/>
+      </p:ext>
+    </p:extLst>
+  </p:cSld>
+  <p:clrMapOvr>
+    <a:masterClrMapping/>
+  </p:clrMapOvr>
+</p:notes>
+</file>
+
+<file path=ppt/notesSlides/notesSlide3.xml><?xml version="1.0" encoding="utf-8"?>
+<p:notes xmlns:a="http://schemas.openxmlformats.org/drawingml/2006/main" xmlns:r="http://schemas.openxmlformats.org/officeDocument/2006/relationships" xmlns:p="http://schemas.openxmlformats.org/presentationml/2006/main">
+  <p:cSld>
+    <p:spTree>
+      <p:nvGrpSpPr>
+        <p:cNvPr id="1" name=""/>
+        <p:cNvGrpSpPr/>
+        <p:nvPr/>
+      </p:nvGrpSpPr>
+      <p:grpSpPr>
+        <a:xfrm>
+          <a:off x="0" y="0"/>
+          <a:ext cx="0" cy="0"/>
+          <a:chOff x="0" y="0"/>
+          <a:chExt cx="0" cy="0"/>
+        </a:xfrm>
+      </p:grpSpPr>
+      <p:sp>
+        <p:nvSpPr>
+          <p:cNvPr id="2" name="Slide Image Placeholder 1"/>
+          <p:cNvSpPr>
+            <a:spLocks noGrp="1" noRot="1" noChangeAspect="1"/>
+          </p:cNvSpPr>
+          <p:nvPr>
+            <p:ph type="sldImg"/>
+          </p:nvPr>
+        </p:nvSpPr>
+        <p:spPr/>
+      </p:sp>
+      <p:sp>
+        <p:nvSpPr>
+          <p:cNvPr id="3" name="Notes Placeholder 2"/>
+          <p:cNvSpPr>
+            <a:spLocks noGrp="1"/>
+          </p:cNvSpPr>
+          <p:nvPr>
+            <p:ph type="body" idx="1"/>
+          </p:nvPr>
+        </p:nvSpPr>
+        <p:spPr/>
+        <p:txBody>
+          <a:bodyPr/>
+          <a:lstStyle/>
+          <a:p>
+            <a:endParaRPr lang="en-US" dirty="0"/>
+          </a:p>
+        </p:txBody>
+      </p:sp>
+      <p:sp>
+        <p:nvSpPr>
+          <p:cNvPr id="4" name="Slide Number Placeholder 3"/>
+          <p:cNvSpPr>
+            <a:spLocks noGrp="1"/>
+          </p:cNvSpPr>
+          <p:nvPr>
+            <p:ph type="sldNum" sz="quarter" idx="5"/>
+          </p:nvPr>
+        </p:nvSpPr>
+        <p:spPr/>
+        <p:txBody>
+          <a:bodyPr/>
+          <a:lstStyle/>
+          <a:p>
+            <a:fld id="{23EBDB5D-BDAC-4914-AAE6-E8D70871AB7D}" type="slidenum">
+              <a:rPr lang="en-US" smtClean="0"/>
+              <a:t>10</a:t>
             </a:fld>
             <a:endParaRPr lang="en-US"/>
           </a:p>
@@ -713,7 +913,7 @@
           <a:p>
             <a:fld id="{8CDAED32-E67C-4797-9C64-40528E777E57}" type="datetimeFigureOut">
               <a:rPr lang="en-US" smtClean="0"/>
-              <a:t>3/16/2025</a:t>
+              <a:t>5/3/2025</a:t>
             </a:fld>
             <a:endParaRPr lang="en-US"/>
           </a:p>
@@ -783,6 +983,18 @@
   <p:clrMapOvr>
     <a:masterClrMapping/>
   </p:clrMapOvr>
+  <mc:AlternateContent xmlns:mc="http://schemas.openxmlformats.org/markup-compatibility/2006">
+    <mc:Choice xmlns:p159="http://schemas.microsoft.com/office/powerpoint/2015/09/main" Requires="p159">
+      <p:transition spd="slow">
+        <p159:morph option="byObject"/>
+      </p:transition>
+    </mc:Choice>
+    <mc:Fallback>
+      <p:transition spd="slow">
+        <p:fade/>
+      </p:transition>
+    </mc:Fallback>
+  </mc:AlternateContent>
 </p:sldLayout>
 </file>
 
@@ -911,7 +1123,7 @@
           <a:p>
             <a:fld id="{8CDAED32-E67C-4797-9C64-40528E777E57}" type="datetimeFigureOut">
               <a:rPr lang="en-US" smtClean="0"/>
-              <a:t>3/16/2025</a:t>
+              <a:t>5/3/2025</a:t>
             </a:fld>
             <a:endParaRPr lang="en-US"/>
           </a:p>
@@ -981,6 +1193,18 @@
   <p:clrMapOvr>
     <a:masterClrMapping/>
   </p:clrMapOvr>
+  <mc:AlternateContent xmlns:mc="http://schemas.openxmlformats.org/markup-compatibility/2006">
+    <mc:Choice xmlns:p159="http://schemas.microsoft.com/office/powerpoint/2015/09/main" Requires="p159">
+      <p:transition spd="slow">
+        <p159:morph option="byObject"/>
+      </p:transition>
+    </mc:Choice>
+    <mc:Fallback>
+      <p:transition spd="slow">
+        <p:fade/>
+      </p:transition>
+    </mc:Fallback>
+  </mc:AlternateContent>
 </p:sldLayout>
 </file>
 
@@ -1119,7 +1343,7 @@
           <a:p>
             <a:fld id="{8CDAED32-E67C-4797-9C64-40528E777E57}" type="datetimeFigureOut">
               <a:rPr lang="en-US" smtClean="0"/>
-              <a:t>3/16/2025</a:t>
+              <a:t>5/3/2025</a:t>
             </a:fld>
             <a:endParaRPr lang="en-US"/>
           </a:p>
@@ -1189,6 +1413,18 @@
   <p:clrMapOvr>
     <a:masterClrMapping/>
   </p:clrMapOvr>
+  <mc:AlternateContent xmlns:mc="http://schemas.openxmlformats.org/markup-compatibility/2006">
+    <mc:Choice xmlns:p159="http://schemas.microsoft.com/office/powerpoint/2015/09/main" Requires="p159">
+      <p:transition spd="slow">
+        <p159:morph option="byObject"/>
+      </p:transition>
+    </mc:Choice>
+    <mc:Fallback>
+      <p:transition spd="slow">
+        <p:fade/>
+      </p:transition>
+    </mc:Fallback>
+  </mc:AlternateContent>
 </p:sldLayout>
 </file>
 
@@ -1317,7 +1553,7 @@
           <a:p>
             <a:fld id="{8CDAED32-E67C-4797-9C64-40528E777E57}" type="datetimeFigureOut">
               <a:rPr lang="en-US" smtClean="0"/>
-              <a:t>3/16/2025</a:t>
+              <a:t>5/3/2025</a:t>
             </a:fld>
             <a:endParaRPr lang="en-US"/>
           </a:p>
@@ -1387,6 +1623,18 @@
   <p:clrMapOvr>
     <a:masterClrMapping/>
   </p:clrMapOvr>
+  <mc:AlternateContent xmlns:mc="http://schemas.openxmlformats.org/markup-compatibility/2006">
+    <mc:Choice xmlns:p159="http://schemas.microsoft.com/office/powerpoint/2015/09/main" Requires="p159">
+      <p:transition spd="slow">
+        <p159:morph option="byObject"/>
+      </p:transition>
+    </mc:Choice>
+    <mc:Fallback>
+      <p:transition spd="slow">
+        <p:fade/>
+      </p:transition>
+    </mc:Fallback>
+  </mc:AlternateContent>
 </p:sldLayout>
 </file>
 
@@ -1592,7 +1840,7 @@
           <a:p>
             <a:fld id="{8CDAED32-E67C-4797-9C64-40528E777E57}" type="datetimeFigureOut">
               <a:rPr lang="en-US" smtClean="0"/>
-              <a:t>3/16/2025</a:t>
+              <a:t>5/3/2025</a:t>
             </a:fld>
             <a:endParaRPr lang="en-US"/>
           </a:p>
@@ -1662,6 +1910,18 @@
   <p:clrMapOvr>
     <a:masterClrMapping/>
   </p:clrMapOvr>
+  <mc:AlternateContent xmlns:mc="http://schemas.openxmlformats.org/markup-compatibility/2006">
+    <mc:Choice xmlns:p159="http://schemas.microsoft.com/office/powerpoint/2015/09/main" Requires="p159">
+      <p:transition spd="slow">
+        <p159:morph option="byObject"/>
+      </p:transition>
+    </mc:Choice>
+    <mc:Fallback>
+      <p:transition spd="slow">
+        <p:fade/>
+      </p:transition>
+    </mc:Fallback>
+  </mc:AlternateContent>
 </p:sldLayout>
 </file>
 
@@ -1857,7 +2117,7 @@
           <a:p>
             <a:fld id="{8CDAED32-E67C-4797-9C64-40528E777E57}" type="datetimeFigureOut">
               <a:rPr lang="en-US" smtClean="0"/>
-              <a:t>3/16/2025</a:t>
+              <a:t>5/3/2025</a:t>
             </a:fld>
             <a:endParaRPr lang="en-US"/>
           </a:p>
@@ -1927,6 +2187,18 @@
   <p:clrMapOvr>
     <a:masterClrMapping/>
   </p:clrMapOvr>
+  <mc:AlternateContent xmlns:mc="http://schemas.openxmlformats.org/markup-compatibility/2006">
+    <mc:Choice xmlns:p159="http://schemas.microsoft.com/office/powerpoint/2015/09/main" Requires="p159">
+      <p:transition spd="slow">
+        <p159:morph option="byObject"/>
+      </p:transition>
+    </mc:Choice>
+    <mc:Fallback>
+      <p:transition spd="slow">
+        <p:fade/>
+      </p:transition>
+    </mc:Fallback>
+  </mc:AlternateContent>
 </p:sldLayout>
 </file>
 
@@ -2269,7 +2541,7 @@
           <a:p>
             <a:fld id="{8CDAED32-E67C-4797-9C64-40528E777E57}" type="datetimeFigureOut">
               <a:rPr lang="en-US" smtClean="0"/>
-              <a:t>3/16/2025</a:t>
+              <a:t>5/3/2025</a:t>
             </a:fld>
             <a:endParaRPr lang="en-US"/>
           </a:p>
@@ -2339,6 +2611,18 @@
   <p:clrMapOvr>
     <a:masterClrMapping/>
   </p:clrMapOvr>
+  <mc:AlternateContent xmlns:mc="http://schemas.openxmlformats.org/markup-compatibility/2006">
+    <mc:Choice xmlns:p159="http://schemas.microsoft.com/office/powerpoint/2015/09/main" Requires="p159">
+      <p:transition spd="slow">
+        <p159:morph option="byObject"/>
+      </p:transition>
+    </mc:Choice>
+    <mc:Fallback>
+      <p:transition spd="slow">
+        <p:fade/>
+      </p:transition>
+    </mc:Fallback>
+  </mc:AlternateContent>
 </p:sldLayout>
 </file>
 
@@ -2410,7 +2694,7 @@
           <a:p>
             <a:fld id="{8CDAED32-E67C-4797-9C64-40528E777E57}" type="datetimeFigureOut">
               <a:rPr lang="en-US" smtClean="0"/>
-              <a:t>3/16/2025</a:t>
+              <a:t>5/3/2025</a:t>
             </a:fld>
             <a:endParaRPr lang="en-US"/>
           </a:p>
@@ -2480,6 +2764,18 @@
   <p:clrMapOvr>
     <a:masterClrMapping/>
   </p:clrMapOvr>
+  <mc:AlternateContent xmlns:mc="http://schemas.openxmlformats.org/markup-compatibility/2006">
+    <mc:Choice xmlns:p159="http://schemas.microsoft.com/office/powerpoint/2015/09/main" Requires="p159">
+      <p:transition spd="slow">
+        <p159:morph option="byObject"/>
+      </p:transition>
+    </mc:Choice>
+    <mc:Fallback>
+      <p:transition spd="slow">
+        <p:fade/>
+      </p:transition>
+    </mc:Fallback>
+  </mc:AlternateContent>
 </p:sldLayout>
 </file>
 
@@ -2523,7 +2819,7 @@
           <a:p>
             <a:fld id="{8CDAED32-E67C-4797-9C64-40528E777E57}" type="datetimeFigureOut">
               <a:rPr lang="en-US" smtClean="0"/>
-              <a:t>3/16/2025</a:t>
+              <a:t>5/3/2025</a:t>
             </a:fld>
             <a:endParaRPr lang="en-US"/>
           </a:p>
@@ -2593,6 +2889,18 @@
   <p:clrMapOvr>
     <a:masterClrMapping/>
   </p:clrMapOvr>
+  <mc:AlternateContent xmlns:mc="http://schemas.openxmlformats.org/markup-compatibility/2006">
+    <mc:Choice xmlns:p159="http://schemas.microsoft.com/office/powerpoint/2015/09/main" Requires="p159">
+      <p:transition spd="slow">
+        <p159:morph option="byObject"/>
+      </p:transition>
+    </mc:Choice>
+    <mc:Fallback>
+      <p:transition spd="slow">
+        <p:fade/>
+      </p:transition>
+    </mc:Fallback>
+  </mc:AlternateContent>
 </p:sldLayout>
 </file>
 
@@ -2834,7 +3142,7 @@
           <a:p>
             <a:fld id="{8CDAED32-E67C-4797-9C64-40528E777E57}" type="datetimeFigureOut">
               <a:rPr lang="en-US" smtClean="0"/>
-              <a:t>3/16/2025</a:t>
+              <a:t>5/3/2025</a:t>
             </a:fld>
             <a:endParaRPr lang="en-US"/>
           </a:p>
@@ -2904,6 +3212,18 @@
   <p:clrMapOvr>
     <a:masterClrMapping/>
   </p:clrMapOvr>
+  <mc:AlternateContent xmlns:mc="http://schemas.openxmlformats.org/markup-compatibility/2006">
+    <mc:Choice xmlns:p159="http://schemas.microsoft.com/office/powerpoint/2015/09/main" Requires="p159">
+      <p:transition spd="slow">
+        <p159:morph option="byObject"/>
+      </p:transition>
+    </mc:Choice>
+    <mc:Fallback>
+      <p:transition spd="slow">
+        <p:fade/>
+      </p:transition>
+    </mc:Fallback>
+  </mc:AlternateContent>
 </p:sldLayout>
 </file>
 
@@ -3122,7 +3442,7 @@
           <a:p>
             <a:fld id="{8CDAED32-E67C-4797-9C64-40528E777E57}" type="datetimeFigureOut">
               <a:rPr lang="en-US" smtClean="0"/>
-              <a:t>3/16/2025</a:t>
+              <a:t>5/3/2025</a:t>
             </a:fld>
             <a:endParaRPr lang="en-US"/>
           </a:p>
@@ -3192,6 +3512,18 @@
   <p:clrMapOvr>
     <a:masterClrMapping/>
   </p:clrMapOvr>
+  <mc:AlternateContent xmlns:mc="http://schemas.openxmlformats.org/markup-compatibility/2006">
+    <mc:Choice xmlns:p159="http://schemas.microsoft.com/office/powerpoint/2015/09/main" Requires="p159">
+      <p:transition spd="slow">
+        <p159:morph option="byObject"/>
+      </p:transition>
+    </mc:Choice>
+    <mc:Fallback>
+      <p:transition spd="slow">
+        <p:fade/>
+      </p:transition>
+    </mc:Fallback>
+  </mc:AlternateContent>
 </p:sldLayout>
 </file>
 
@@ -3363,7 +3695,7 @@
           <a:p>
             <a:fld id="{8CDAED32-E67C-4797-9C64-40528E777E57}" type="datetimeFigureOut">
               <a:rPr lang="en-US" smtClean="0"/>
-              <a:t>3/16/2025</a:t>
+              <a:t>5/3/2025</a:t>
             </a:fld>
             <a:endParaRPr lang="en-US"/>
           </a:p>
@@ -3480,6 +3812,18 @@
     <p:sldLayoutId id="2147483658" r:id="rId10"/>
     <p:sldLayoutId id="2147483659" r:id="rId11"/>
   </p:sldLayoutIdLst>
+  <mc:AlternateContent xmlns:mc="http://schemas.openxmlformats.org/markup-compatibility/2006">
+    <mc:Choice xmlns:p159="http://schemas.microsoft.com/office/powerpoint/2015/09/main" Requires="p159">
+      <p:transition spd="slow">
+        <p159:morph option="byObject"/>
+      </p:transition>
+    </mc:Choice>
+    <mc:Fallback>
+      <p:transition spd="slow">
+        <p:fade/>
+      </p:transition>
+    </mc:Fallback>
+  </mc:AlternateContent>
   <p:txStyles>
     <p:titleStyle>
       <a:lvl1pPr algn="l" defTabSz="914400" rtl="0" eaLnBrk="1" latinLnBrk="0" hangingPunct="1">
@@ -4021,10 +4365,965 @@
   <p:clrMapOvr>
     <a:masterClrMapping/>
   </p:clrMapOvr>
+  <mc:AlternateContent xmlns:mc="http://schemas.openxmlformats.org/markup-compatibility/2006">
+    <mc:Choice xmlns:p159="http://schemas.microsoft.com/office/powerpoint/2015/09/main" Requires="p159">
+      <p:transition spd="slow">
+        <p159:morph option="byObject"/>
+      </p:transition>
+    </mc:Choice>
+    <mc:Fallback>
+      <p:transition spd="slow">
+        <p:fade/>
+      </p:transition>
+    </mc:Fallback>
+  </mc:AlternateContent>
 </p:sld>
 </file>
 
 <file path=ppt/slides/slide10.xml><?xml version="1.0" encoding="utf-8"?>
+<p:sld xmlns:a="http://schemas.openxmlformats.org/drawingml/2006/main" xmlns:r="http://schemas.openxmlformats.org/officeDocument/2006/relationships" xmlns:p="http://schemas.openxmlformats.org/presentationml/2006/main">
+  <p:cSld>
+    <p:spTree>
+      <p:nvGrpSpPr>
+        <p:cNvPr id="1" name="">
+          <a:extLst>
+            <a:ext uri="{FF2B5EF4-FFF2-40B4-BE49-F238E27FC236}">
+              <a16:creationId xmlns:a16="http://schemas.microsoft.com/office/drawing/2014/main" id="{81EC5CB5-F09B-75CD-9B78-D00C0D8F760B}"/>
+            </a:ext>
+          </a:extLst>
+        </p:cNvPr>
+        <p:cNvGrpSpPr/>
+        <p:nvPr/>
+      </p:nvGrpSpPr>
+      <p:grpSpPr>
+        <a:xfrm>
+          <a:off x="0" y="0"/>
+          <a:ext cx="0" cy="0"/>
+          <a:chOff x="0" y="0"/>
+          <a:chExt cx="0" cy="0"/>
+        </a:xfrm>
+      </p:grpSpPr>
+      <p:sp>
+        <p:nvSpPr>
+          <p:cNvPr id="2" name="Title 1">
+            <a:extLst>
+              <a:ext uri="{FF2B5EF4-FFF2-40B4-BE49-F238E27FC236}">
+                <a16:creationId xmlns:a16="http://schemas.microsoft.com/office/drawing/2014/main" id="{1FB18C1C-24C9-2617-7644-44003871835B}"/>
+              </a:ext>
+            </a:extLst>
+          </p:cNvPr>
+          <p:cNvSpPr>
+            <a:spLocks noGrp="1"/>
+          </p:cNvSpPr>
+          <p:nvPr>
+            <p:ph type="title"/>
+          </p:nvPr>
+        </p:nvSpPr>
+        <p:spPr>
+          <a:xfrm>
+            <a:off x="606318" y="214540"/>
+            <a:ext cx="10515600" cy="1325563"/>
+          </a:xfrm>
+        </p:spPr>
+        <p:txBody>
+          <a:bodyPr/>
+          <a:lstStyle/>
+          <a:p>
+            <a:r>
+              <a:rPr lang="en-US" sz="4400" dirty="0">
+                <a:solidFill>
+                  <a:srgbClr val="283C95"/>
+                </a:solidFill>
+                <a:latin typeface="Aptos ExtraBold" panose="020B0004020202020204" pitchFamily="34" charset="0"/>
+              </a:rPr>
+              <a:t>03 Data Cleaning and Preprocessing</a:t>
+            </a:r>
+            <a:endParaRPr lang="en-US" dirty="0">
+              <a:solidFill>
+                <a:srgbClr val="283C95"/>
+              </a:solidFill>
+              <a:latin typeface="Aptos ExtraBold" panose="020B0004020202020204" pitchFamily="34" charset="0"/>
+            </a:endParaRPr>
+          </a:p>
+        </p:txBody>
+      </p:sp>
+      <p:sp>
+        <p:nvSpPr>
+          <p:cNvPr id="3" name="Title 1">
+            <a:extLst>
+              <a:ext uri="{FF2B5EF4-FFF2-40B4-BE49-F238E27FC236}">
+                <a16:creationId xmlns:a16="http://schemas.microsoft.com/office/drawing/2014/main" id="{36E8E5A8-A303-EB44-953E-03278CE89478}"/>
+              </a:ext>
+            </a:extLst>
+          </p:cNvPr>
+          <p:cNvSpPr txBox="1">
+            <a:spLocks/>
+          </p:cNvSpPr>
+          <p:nvPr/>
+        </p:nvSpPr>
+        <p:spPr>
+          <a:xfrm>
+            <a:off x="838200" y="344853"/>
+            <a:ext cx="10515600" cy="1325563"/>
+          </a:xfrm>
+          <a:prstGeom prst="rect">
+            <a:avLst/>
+          </a:prstGeom>
+        </p:spPr>
+        <p:txBody>
+          <a:bodyPr vert="horz" lIns="91440" tIns="45720" rIns="91440" bIns="45720" rtlCol="0" anchor="ctr">
+            <a:normAutofit/>
+          </a:bodyPr>
+          <a:lstStyle>
+            <a:lvl1pPr algn="l" defTabSz="914400" rtl="0" eaLnBrk="1" latinLnBrk="0" hangingPunct="1">
+              <a:lnSpc>
+                <a:spcPct val="90000"/>
+              </a:lnSpc>
+              <a:spcBef>
+                <a:spcPct val="0"/>
+              </a:spcBef>
+              <a:buNone/>
+              <a:defRPr sz="4400" kern="1200">
+                <a:solidFill>
+                  <a:schemeClr val="tx1"/>
+                </a:solidFill>
+                <a:latin typeface="+mj-lt"/>
+                <a:ea typeface="+mj-ea"/>
+                <a:cs typeface="+mj-cs"/>
+              </a:defRPr>
+            </a:lvl1pPr>
+          </a:lstStyle>
+          <a:p>
+            <a:endParaRPr lang="en-US" dirty="0">
+              <a:solidFill>
+                <a:srgbClr val="283C95"/>
+              </a:solidFill>
+              <a:latin typeface="Aptos ExtraBold" panose="020B0004020202020204" pitchFamily="34" charset="0"/>
+            </a:endParaRPr>
+          </a:p>
+        </p:txBody>
+      </p:sp>
+      <p:sp>
+        <p:nvSpPr>
+          <p:cNvPr id="4" name="TextBox 3">
+            <a:extLst>
+              <a:ext uri="{FF2B5EF4-FFF2-40B4-BE49-F238E27FC236}">
+                <a16:creationId xmlns:a16="http://schemas.microsoft.com/office/drawing/2014/main" id="{9DC6492E-291F-1323-7C53-0D2C37E388CF}"/>
+              </a:ext>
+            </a:extLst>
+          </p:cNvPr>
+          <p:cNvSpPr txBox="1"/>
+          <p:nvPr/>
+        </p:nvSpPr>
+        <p:spPr>
+          <a:xfrm>
+            <a:off x="606318" y="1343650"/>
+            <a:ext cx="3426420" cy="523220"/>
+          </a:xfrm>
+          <a:prstGeom prst="rect">
+            <a:avLst/>
+          </a:prstGeom>
+          <a:noFill/>
+        </p:spPr>
+        <p:txBody>
+          <a:bodyPr wrap="square" rtlCol="0">
+            <a:spAutoFit/>
+          </a:bodyPr>
+          <a:lstStyle/>
+          <a:p>
+            <a:r>
+              <a:rPr lang="en-US" sz="2800" b="1" dirty="0">
+                <a:solidFill>
+                  <a:schemeClr val="tx1">
+                    <a:lumMod val="75000"/>
+                    <a:lumOff val="25000"/>
+                  </a:schemeClr>
+                </a:solidFill>
+              </a:rPr>
+              <a:t>Feature Engineering</a:t>
+            </a:r>
+          </a:p>
+        </p:txBody>
+      </p:sp>
+      <p:sp>
+        <p:nvSpPr>
+          <p:cNvPr id="11" name="TextBox 10">
+            <a:extLst>
+              <a:ext uri="{FF2B5EF4-FFF2-40B4-BE49-F238E27FC236}">
+                <a16:creationId xmlns:a16="http://schemas.microsoft.com/office/drawing/2014/main" id="{E349E6CD-4AB5-724B-0E48-19EA42D8FECB}"/>
+              </a:ext>
+            </a:extLst>
+          </p:cNvPr>
+          <p:cNvSpPr txBox="1"/>
+          <p:nvPr/>
+        </p:nvSpPr>
+        <p:spPr>
+          <a:xfrm>
+            <a:off x="606318" y="2384027"/>
+            <a:ext cx="9358297" cy="830997"/>
+          </a:xfrm>
+          <a:prstGeom prst="rect">
+            <a:avLst/>
+          </a:prstGeom>
+          <a:noFill/>
+        </p:spPr>
+        <p:txBody>
+          <a:bodyPr wrap="square" rtlCol="0">
+            <a:spAutoFit/>
+          </a:bodyPr>
+          <a:lstStyle/>
+          <a:p>
+            <a:pPr marL="342900" indent="-342900">
+              <a:buFont typeface="Arial" panose="020B0604020202020204" pitchFamily="34" charset="0"/>
+              <a:buChar char="•"/>
+            </a:pPr>
+            <a:r>
+              <a:rPr lang="en-US" sz="2400" b="1" dirty="0"/>
+              <a:t>Encoded Categorical Variables (One-Hot &amp; Label Encoding): Ship Mode, Segment …etc.</a:t>
+            </a:r>
+          </a:p>
+        </p:txBody>
+      </p:sp>
+      <p:sp>
+        <p:nvSpPr>
+          <p:cNvPr id="5" name="TextBox 4">
+            <a:extLst>
+              <a:ext uri="{FF2B5EF4-FFF2-40B4-BE49-F238E27FC236}">
+                <a16:creationId xmlns:a16="http://schemas.microsoft.com/office/drawing/2014/main" id="{277E6449-ACF5-1426-07C3-A4B49EF5332A}"/>
+              </a:ext>
+            </a:extLst>
+          </p:cNvPr>
+          <p:cNvSpPr txBox="1"/>
+          <p:nvPr/>
+        </p:nvSpPr>
+        <p:spPr>
+          <a:xfrm>
+            <a:off x="606317" y="3342891"/>
+            <a:ext cx="9358297" cy="1200329"/>
+          </a:xfrm>
+          <a:prstGeom prst="rect">
+            <a:avLst/>
+          </a:prstGeom>
+          <a:noFill/>
+        </p:spPr>
+        <p:txBody>
+          <a:bodyPr wrap="square" rtlCol="0">
+            <a:spAutoFit/>
+          </a:bodyPr>
+          <a:lstStyle/>
+          <a:p>
+            <a:pPr marL="342900" indent="-342900">
+              <a:buFont typeface="Arial" panose="020B0604020202020204" pitchFamily="34" charset="0"/>
+              <a:buChar char="•"/>
+            </a:pPr>
+            <a:r>
+              <a:rPr lang="en-US" sz="2400" b="1" dirty="0"/>
+              <a:t>Maintained a Unified Date Format across features “</a:t>
+            </a:r>
+            <a:r>
+              <a:rPr lang="en-US" sz="2400" b="0" dirty="0">
+                <a:effectLst/>
+              </a:rPr>
+              <a:t>%d/%m/%Y”.</a:t>
+            </a:r>
+            <a:r>
+              <a:rPr lang="en-US" sz="2400" b="1" dirty="0"/>
+              <a:t> And extracted Temporal features from the date column (</a:t>
+            </a:r>
+            <a:r>
+              <a:rPr lang="en-US" sz="2000" dirty="0"/>
+              <a:t>Day, Month, Year</a:t>
+            </a:r>
+            <a:r>
+              <a:rPr lang="en-US" sz="2400" b="1" dirty="0"/>
+              <a:t>)</a:t>
+            </a:r>
+          </a:p>
+        </p:txBody>
+      </p:sp>
+      <p:sp>
+        <p:nvSpPr>
+          <p:cNvPr id="6" name="TextBox 5">
+            <a:extLst>
+              <a:ext uri="{FF2B5EF4-FFF2-40B4-BE49-F238E27FC236}">
+                <a16:creationId xmlns:a16="http://schemas.microsoft.com/office/drawing/2014/main" id="{1A2DA8D0-6996-0865-0D9B-C9FB1881B850}"/>
+              </a:ext>
+            </a:extLst>
+          </p:cNvPr>
+          <p:cNvSpPr txBox="1"/>
+          <p:nvPr/>
+        </p:nvSpPr>
+        <p:spPr>
+          <a:xfrm>
+            <a:off x="606317" y="4612472"/>
+            <a:ext cx="9358297" cy="461665"/>
+          </a:xfrm>
+          <a:prstGeom prst="rect">
+            <a:avLst/>
+          </a:prstGeom>
+          <a:noFill/>
+        </p:spPr>
+        <p:txBody>
+          <a:bodyPr wrap="square" rtlCol="0">
+            <a:spAutoFit/>
+          </a:bodyPr>
+          <a:lstStyle/>
+          <a:p>
+            <a:pPr marL="342900" indent="-342900">
+              <a:buFont typeface="Arial" panose="020B0604020202020204" pitchFamily="34" charset="0"/>
+              <a:buChar char="•"/>
+            </a:pPr>
+            <a:r>
+              <a:rPr lang="en-US" sz="2400" b="1" dirty="0"/>
+              <a:t>Obtained an Aggregated Sales Performance per Product Feature</a:t>
+            </a:r>
+          </a:p>
+        </p:txBody>
+      </p:sp>
+    </p:spTree>
+    <p:extLst>
+      <p:ext uri="{BB962C8B-B14F-4D97-AF65-F5344CB8AC3E}">
+        <p14:creationId xmlns:p14="http://schemas.microsoft.com/office/powerpoint/2010/main" val="617375050"/>
+      </p:ext>
+    </p:extLst>
+  </p:cSld>
+  <p:clrMapOvr>
+    <a:masterClrMapping/>
+  </p:clrMapOvr>
+  <mc:AlternateContent xmlns:mc="http://schemas.openxmlformats.org/markup-compatibility/2006">
+    <mc:Choice xmlns:p159="http://schemas.microsoft.com/office/powerpoint/2015/09/main" Requires="p159">
+      <p:transition spd="slow">
+        <p159:morph option="byObject"/>
+      </p:transition>
+    </mc:Choice>
+    <mc:Fallback>
+      <p:transition spd="slow">
+        <p:fade/>
+      </p:transition>
+    </mc:Fallback>
+  </mc:AlternateContent>
+</p:sld>
+</file>
+
+<file path=ppt/slides/slide11.xml><?xml version="1.0" encoding="utf-8"?>
+<p:sld xmlns:a="http://schemas.openxmlformats.org/drawingml/2006/main" xmlns:r="http://schemas.openxmlformats.org/officeDocument/2006/relationships" xmlns:p="http://schemas.openxmlformats.org/presentationml/2006/main">
+  <p:cSld>
+    <p:spTree>
+      <p:nvGrpSpPr>
+        <p:cNvPr id="1" name="">
+          <a:extLst>
+            <a:ext uri="{FF2B5EF4-FFF2-40B4-BE49-F238E27FC236}">
+              <a16:creationId xmlns:a16="http://schemas.microsoft.com/office/drawing/2014/main" id="{2A547EFA-24ED-AA96-B71C-385585245D5E}"/>
+            </a:ext>
+          </a:extLst>
+        </p:cNvPr>
+        <p:cNvGrpSpPr/>
+        <p:nvPr/>
+      </p:nvGrpSpPr>
+      <p:grpSpPr>
+        <a:xfrm>
+          <a:off x="0" y="0"/>
+          <a:ext cx="0" cy="0"/>
+          <a:chOff x="0" y="0"/>
+          <a:chExt cx="0" cy="0"/>
+        </a:xfrm>
+      </p:grpSpPr>
+      <p:sp>
+        <p:nvSpPr>
+          <p:cNvPr id="2" name="Title 1">
+            <a:extLst>
+              <a:ext uri="{FF2B5EF4-FFF2-40B4-BE49-F238E27FC236}">
+                <a16:creationId xmlns:a16="http://schemas.microsoft.com/office/drawing/2014/main" id="{0B66F485-11AB-D480-1756-23E4CD846F6A}"/>
+              </a:ext>
+            </a:extLst>
+          </p:cNvPr>
+          <p:cNvSpPr>
+            <a:spLocks noGrp="1"/>
+          </p:cNvSpPr>
+          <p:nvPr>
+            <p:ph type="title"/>
+          </p:nvPr>
+        </p:nvSpPr>
+        <p:spPr>
+          <a:xfrm>
+            <a:off x="606318" y="214540"/>
+            <a:ext cx="10515600" cy="1325563"/>
+          </a:xfrm>
+        </p:spPr>
+        <p:txBody>
+          <a:bodyPr/>
+          <a:lstStyle/>
+          <a:p>
+            <a:r>
+              <a:rPr lang="en-US" sz="4400" dirty="0">
+                <a:solidFill>
+                  <a:srgbClr val="283C95"/>
+                </a:solidFill>
+                <a:latin typeface="Aptos ExtraBold" panose="020B0004020202020204" pitchFamily="34" charset="0"/>
+              </a:rPr>
+              <a:t>04 EDA Insights</a:t>
+            </a:r>
+            <a:endParaRPr lang="en-US" dirty="0">
+              <a:solidFill>
+                <a:srgbClr val="283C95"/>
+              </a:solidFill>
+              <a:latin typeface="Aptos ExtraBold" panose="020B0004020202020204" pitchFamily="34" charset="0"/>
+            </a:endParaRPr>
+          </a:p>
+        </p:txBody>
+      </p:sp>
+      <p:sp>
+        <p:nvSpPr>
+          <p:cNvPr id="3" name="Title 1">
+            <a:extLst>
+              <a:ext uri="{FF2B5EF4-FFF2-40B4-BE49-F238E27FC236}">
+                <a16:creationId xmlns:a16="http://schemas.microsoft.com/office/drawing/2014/main" id="{63DE4D1E-63B9-0FB2-884B-937FD34F2489}"/>
+              </a:ext>
+            </a:extLst>
+          </p:cNvPr>
+          <p:cNvSpPr txBox="1">
+            <a:spLocks/>
+          </p:cNvSpPr>
+          <p:nvPr/>
+        </p:nvSpPr>
+        <p:spPr>
+          <a:xfrm>
+            <a:off x="838200" y="344853"/>
+            <a:ext cx="10515600" cy="1325563"/>
+          </a:xfrm>
+          <a:prstGeom prst="rect">
+            <a:avLst/>
+          </a:prstGeom>
+        </p:spPr>
+        <p:txBody>
+          <a:bodyPr vert="horz" lIns="91440" tIns="45720" rIns="91440" bIns="45720" rtlCol="0" anchor="ctr">
+            <a:normAutofit/>
+          </a:bodyPr>
+          <a:lstStyle>
+            <a:lvl1pPr algn="l" defTabSz="914400" rtl="0" eaLnBrk="1" latinLnBrk="0" hangingPunct="1">
+              <a:lnSpc>
+                <a:spcPct val="90000"/>
+              </a:lnSpc>
+              <a:spcBef>
+                <a:spcPct val="0"/>
+              </a:spcBef>
+              <a:buNone/>
+              <a:defRPr sz="4400" kern="1200">
+                <a:solidFill>
+                  <a:schemeClr val="tx1"/>
+                </a:solidFill>
+                <a:latin typeface="+mj-lt"/>
+                <a:ea typeface="+mj-ea"/>
+                <a:cs typeface="+mj-cs"/>
+              </a:defRPr>
+            </a:lvl1pPr>
+          </a:lstStyle>
+          <a:p>
+            <a:endParaRPr lang="en-US" dirty="0">
+              <a:solidFill>
+                <a:srgbClr val="283C95"/>
+              </a:solidFill>
+              <a:latin typeface="Aptos ExtraBold" panose="020B0004020202020204" pitchFamily="34" charset="0"/>
+            </a:endParaRPr>
+          </a:p>
+        </p:txBody>
+      </p:sp>
+      <p:sp>
+        <p:nvSpPr>
+          <p:cNvPr id="4" name="TextBox 3">
+            <a:extLst>
+              <a:ext uri="{FF2B5EF4-FFF2-40B4-BE49-F238E27FC236}">
+                <a16:creationId xmlns:a16="http://schemas.microsoft.com/office/drawing/2014/main" id="{FBA2C955-E747-08C2-1EA4-8CBBEF95684D}"/>
+              </a:ext>
+            </a:extLst>
+          </p:cNvPr>
+          <p:cNvSpPr txBox="1"/>
+          <p:nvPr/>
+        </p:nvSpPr>
+        <p:spPr>
+          <a:xfrm>
+            <a:off x="606318" y="1343650"/>
+            <a:ext cx="4411159" cy="523220"/>
+          </a:xfrm>
+          <a:prstGeom prst="rect">
+            <a:avLst/>
+          </a:prstGeom>
+          <a:noFill/>
+        </p:spPr>
+        <p:txBody>
+          <a:bodyPr wrap="square" rtlCol="0">
+            <a:spAutoFit/>
+          </a:bodyPr>
+          <a:lstStyle/>
+          <a:p>
+            <a:r>
+              <a:rPr lang="en-US" sz="2800" b="1" dirty="0">
+                <a:solidFill>
+                  <a:schemeClr val="tx1">
+                    <a:lumMod val="75000"/>
+                    <a:lumOff val="25000"/>
+                  </a:schemeClr>
+                </a:solidFill>
+              </a:rPr>
+              <a:t>Product Analysis</a:t>
+            </a:r>
+          </a:p>
+        </p:txBody>
+      </p:sp>
+      <p:sp>
+        <p:nvSpPr>
+          <p:cNvPr id="8" name="TextBox 7">
+            <a:extLst>
+              <a:ext uri="{FF2B5EF4-FFF2-40B4-BE49-F238E27FC236}">
+                <a16:creationId xmlns:a16="http://schemas.microsoft.com/office/drawing/2014/main" id="{42A45353-7918-2A33-00E4-10E0C637F129}"/>
+              </a:ext>
+            </a:extLst>
+          </p:cNvPr>
+          <p:cNvSpPr txBox="1"/>
+          <p:nvPr/>
+        </p:nvSpPr>
+        <p:spPr>
+          <a:xfrm>
+            <a:off x="606317" y="2467362"/>
+            <a:ext cx="6568205" cy="3046988"/>
+          </a:xfrm>
+          <a:prstGeom prst="rect">
+            <a:avLst/>
+          </a:prstGeom>
+          <a:noFill/>
+        </p:spPr>
+        <p:txBody>
+          <a:bodyPr wrap="square" rtlCol="0">
+            <a:spAutoFit/>
+          </a:bodyPr>
+          <a:lstStyle/>
+          <a:p>
+            <a:pPr>
+              <a:buNone/>
+            </a:pPr>
+            <a:r>
+              <a:rPr lang="en-US" sz="2400" b="1" dirty="0">
+                <a:solidFill>
+                  <a:schemeClr val="tx1">
+                    <a:lumMod val="65000"/>
+                    <a:lumOff val="35000"/>
+                  </a:schemeClr>
+                </a:solidFill>
+              </a:rPr>
+              <a:t>The analysis indicates that the </a:t>
+            </a:r>
+            <a:r>
+              <a:rPr lang="en-US" sz="2400" b="1" dirty="0"/>
+              <a:t>Technology product category </a:t>
+            </a:r>
+            <a:r>
+              <a:rPr lang="en-US" sz="2400" b="1" dirty="0">
+                <a:solidFill>
+                  <a:schemeClr val="tx1">
+                    <a:lumMod val="65000"/>
+                    <a:lumOff val="35000"/>
+                  </a:schemeClr>
+                </a:solidFill>
+              </a:rPr>
+              <a:t>generates the </a:t>
+            </a:r>
+            <a:r>
+              <a:rPr lang="en-US" sz="2400" b="1" dirty="0"/>
+              <a:t>highest sales</a:t>
+            </a:r>
+            <a:r>
+              <a:rPr lang="en-US" sz="2400" b="1" dirty="0">
+                <a:solidFill>
+                  <a:schemeClr val="tx1">
+                    <a:lumMod val="65000"/>
+                    <a:lumOff val="35000"/>
+                  </a:schemeClr>
+                </a:solidFill>
+              </a:rPr>
+              <a:t>, despite the majority of offered products belonging</a:t>
+            </a:r>
+            <a:r>
+              <a:rPr lang="en-US" sz="2400" dirty="0"/>
+              <a:t> </a:t>
+            </a:r>
+            <a:r>
+              <a:rPr lang="en-US" sz="2400" b="1" dirty="0">
+                <a:solidFill>
+                  <a:schemeClr val="tx1">
+                    <a:lumMod val="65000"/>
+                    <a:lumOff val="35000"/>
+                  </a:schemeClr>
+                </a:solidFill>
+              </a:rPr>
+              <a:t>to the </a:t>
+            </a:r>
+            <a:r>
+              <a:rPr lang="en-US" sz="2400" b="1" dirty="0"/>
+              <a:t>Office Supplies</a:t>
+            </a:r>
+            <a:r>
+              <a:rPr lang="en-US" sz="2400" dirty="0"/>
+              <a:t> </a:t>
+            </a:r>
+            <a:r>
+              <a:rPr lang="en-US" sz="2400" b="1" dirty="0">
+                <a:solidFill>
+                  <a:schemeClr val="tx1">
+                    <a:lumMod val="65000"/>
+                    <a:lumOff val="35000"/>
+                  </a:schemeClr>
+                </a:solidFill>
+              </a:rPr>
+              <a:t>category.</a:t>
+            </a:r>
+          </a:p>
+          <a:p>
+            <a:pPr>
+              <a:buNone/>
+            </a:pPr>
+            <a:endParaRPr lang="en-US" sz="2400" b="1" dirty="0">
+              <a:solidFill>
+                <a:schemeClr val="tx1">
+                  <a:lumMod val="65000"/>
+                  <a:lumOff val="35000"/>
+                </a:schemeClr>
+              </a:solidFill>
+            </a:endParaRPr>
+          </a:p>
+          <a:p>
+            <a:r>
+              <a:rPr lang="en-US" sz="2400" b="1" dirty="0">
+                <a:solidFill>
+                  <a:schemeClr val="tx1">
+                    <a:lumMod val="65000"/>
+                    <a:lumOff val="35000"/>
+                  </a:schemeClr>
+                </a:solidFill>
+              </a:rPr>
+              <a:t>This suggests that </a:t>
+            </a:r>
+            <a:r>
+              <a:rPr lang="en-US" sz="2400" b="1" dirty="0"/>
+              <a:t>expanding the range of technology-related products</a:t>
+            </a:r>
+            <a:r>
+              <a:rPr lang="en-US" sz="2400" dirty="0"/>
+              <a:t> could lead to </a:t>
+            </a:r>
+            <a:r>
+              <a:rPr lang="en-US" sz="2400" b="1" dirty="0"/>
+              <a:t>higher future sales and revenue growth.</a:t>
+            </a:r>
+            <a:endParaRPr lang="en-US" sz="2400" dirty="0"/>
+          </a:p>
+        </p:txBody>
+      </p:sp>
+      <p:pic>
+        <p:nvPicPr>
+          <p:cNvPr id="12" name="Picture 11">
+            <a:extLst>
+              <a:ext uri="{FF2B5EF4-FFF2-40B4-BE49-F238E27FC236}">
+                <a16:creationId xmlns:a16="http://schemas.microsoft.com/office/drawing/2014/main" id="{C7B659A1-9130-485A-04E8-F9C22B28E088}"/>
+              </a:ext>
+            </a:extLst>
+          </p:cNvPr>
+          <p:cNvPicPr>
+            <a:picLocks noChangeAspect="1"/>
+          </p:cNvPicPr>
+          <p:nvPr/>
+        </p:nvPicPr>
+        <p:blipFill>
+          <a:blip r:embed="rId2"/>
+          <a:stretch>
+            <a:fillRect/>
+          </a:stretch>
+        </p:blipFill>
+        <p:spPr>
+          <a:xfrm>
+            <a:off x="7312619" y="344853"/>
+            <a:ext cx="4668365" cy="3157024"/>
+          </a:xfrm>
+          <a:prstGeom prst="rect">
+            <a:avLst/>
+          </a:prstGeom>
+        </p:spPr>
+      </p:pic>
+      <p:pic>
+        <p:nvPicPr>
+          <p:cNvPr id="14" name="Picture 13">
+            <a:extLst>
+              <a:ext uri="{FF2B5EF4-FFF2-40B4-BE49-F238E27FC236}">
+                <a16:creationId xmlns:a16="http://schemas.microsoft.com/office/drawing/2014/main" id="{F3673FAA-7273-CB57-6ED8-5163BD7355B7}"/>
+              </a:ext>
+            </a:extLst>
+          </p:cNvPr>
+          <p:cNvPicPr>
+            <a:picLocks noChangeAspect="1"/>
+          </p:cNvPicPr>
+          <p:nvPr/>
+        </p:nvPicPr>
+        <p:blipFill>
+          <a:blip r:embed="rId3"/>
+          <a:stretch>
+            <a:fillRect/>
+          </a:stretch>
+        </p:blipFill>
+        <p:spPr>
+          <a:xfrm>
+            <a:off x="7456976" y="3690955"/>
+            <a:ext cx="4641605" cy="2822192"/>
+          </a:xfrm>
+          <a:prstGeom prst="rect">
+            <a:avLst/>
+          </a:prstGeom>
+        </p:spPr>
+      </p:pic>
+    </p:spTree>
+    <p:extLst>
+      <p:ext uri="{BB962C8B-B14F-4D97-AF65-F5344CB8AC3E}">
+        <p14:creationId xmlns:p14="http://schemas.microsoft.com/office/powerpoint/2010/main" val="2751214929"/>
+      </p:ext>
+    </p:extLst>
+  </p:cSld>
+  <p:clrMapOvr>
+    <a:masterClrMapping/>
+  </p:clrMapOvr>
+  <mc:AlternateContent xmlns:mc="http://schemas.openxmlformats.org/markup-compatibility/2006">
+    <mc:Choice xmlns:p159="http://schemas.microsoft.com/office/powerpoint/2015/09/main" Requires="p159">
+      <p:transition spd="slow">
+        <p159:morph option="byObject"/>
+      </p:transition>
+    </mc:Choice>
+    <mc:Fallback>
+      <p:transition spd="slow">
+        <p:fade/>
+      </p:transition>
+    </mc:Fallback>
+  </mc:AlternateContent>
+</p:sld>
+</file>
+
+<file path=ppt/slides/slide12.xml><?xml version="1.0" encoding="utf-8"?>
+<p:sld xmlns:a="http://schemas.openxmlformats.org/drawingml/2006/main" xmlns:r="http://schemas.openxmlformats.org/officeDocument/2006/relationships" xmlns:p="http://schemas.openxmlformats.org/presentationml/2006/main">
+  <p:cSld>
+    <p:spTree>
+      <p:nvGrpSpPr>
+        <p:cNvPr id="1" name="">
+          <a:extLst>
+            <a:ext uri="{FF2B5EF4-FFF2-40B4-BE49-F238E27FC236}">
+              <a16:creationId xmlns:a16="http://schemas.microsoft.com/office/drawing/2014/main" id="{EF6B64B3-B001-3DBD-7D44-7A57EC760D9F}"/>
+            </a:ext>
+          </a:extLst>
+        </p:cNvPr>
+        <p:cNvGrpSpPr/>
+        <p:nvPr/>
+      </p:nvGrpSpPr>
+      <p:grpSpPr>
+        <a:xfrm>
+          <a:off x="0" y="0"/>
+          <a:ext cx="0" cy="0"/>
+          <a:chOff x="0" y="0"/>
+          <a:chExt cx="0" cy="0"/>
+        </a:xfrm>
+      </p:grpSpPr>
+      <p:sp>
+        <p:nvSpPr>
+          <p:cNvPr id="2" name="Title 1">
+            <a:extLst>
+              <a:ext uri="{FF2B5EF4-FFF2-40B4-BE49-F238E27FC236}">
+                <a16:creationId xmlns:a16="http://schemas.microsoft.com/office/drawing/2014/main" id="{2AF5112D-9A51-7B4D-A705-3FF1207791B8}"/>
+              </a:ext>
+            </a:extLst>
+          </p:cNvPr>
+          <p:cNvSpPr>
+            <a:spLocks noGrp="1"/>
+          </p:cNvSpPr>
+          <p:nvPr>
+            <p:ph type="title"/>
+          </p:nvPr>
+        </p:nvSpPr>
+        <p:spPr>
+          <a:xfrm>
+            <a:off x="606318" y="214540"/>
+            <a:ext cx="10515600" cy="1325563"/>
+          </a:xfrm>
+        </p:spPr>
+        <p:txBody>
+          <a:bodyPr/>
+          <a:lstStyle/>
+          <a:p>
+            <a:r>
+              <a:rPr lang="en-US" sz="4400" dirty="0">
+                <a:solidFill>
+                  <a:srgbClr val="283C95"/>
+                </a:solidFill>
+                <a:latin typeface="Aptos ExtraBold" panose="020B0004020202020204" pitchFamily="34" charset="0"/>
+              </a:rPr>
+              <a:t>04 EDA Insights</a:t>
+            </a:r>
+            <a:endParaRPr lang="en-US" dirty="0">
+              <a:solidFill>
+                <a:srgbClr val="283C95"/>
+              </a:solidFill>
+              <a:latin typeface="Aptos ExtraBold" panose="020B0004020202020204" pitchFamily="34" charset="0"/>
+            </a:endParaRPr>
+          </a:p>
+        </p:txBody>
+      </p:sp>
+      <p:sp>
+        <p:nvSpPr>
+          <p:cNvPr id="3" name="Title 1">
+            <a:extLst>
+              <a:ext uri="{FF2B5EF4-FFF2-40B4-BE49-F238E27FC236}">
+                <a16:creationId xmlns:a16="http://schemas.microsoft.com/office/drawing/2014/main" id="{99F7E5FA-EA89-1ACE-0BFF-9EB54C7F9EEC}"/>
+              </a:ext>
+            </a:extLst>
+          </p:cNvPr>
+          <p:cNvSpPr txBox="1">
+            <a:spLocks/>
+          </p:cNvSpPr>
+          <p:nvPr/>
+        </p:nvSpPr>
+        <p:spPr>
+          <a:xfrm>
+            <a:off x="838200" y="344853"/>
+            <a:ext cx="10515600" cy="1325563"/>
+          </a:xfrm>
+          <a:prstGeom prst="rect">
+            <a:avLst/>
+          </a:prstGeom>
+        </p:spPr>
+        <p:txBody>
+          <a:bodyPr vert="horz" lIns="91440" tIns="45720" rIns="91440" bIns="45720" rtlCol="0" anchor="ctr">
+            <a:normAutofit/>
+          </a:bodyPr>
+          <a:lstStyle>
+            <a:lvl1pPr algn="l" defTabSz="914400" rtl="0" eaLnBrk="1" latinLnBrk="0" hangingPunct="1">
+              <a:lnSpc>
+                <a:spcPct val="90000"/>
+              </a:lnSpc>
+              <a:spcBef>
+                <a:spcPct val="0"/>
+              </a:spcBef>
+              <a:buNone/>
+              <a:defRPr sz="4400" kern="1200">
+                <a:solidFill>
+                  <a:schemeClr val="tx1"/>
+                </a:solidFill>
+                <a:latin typeface="+mj-lt"/>
+                <a:ea typeface="+mj-ea"/>
+                <a:cs typeface="+mj-cs"/>
+              </a:defRPr>
+            </a:lvl1pPr>
+          </a:lstStyle>
+          <a:p>
+            <a:endParaRPr lang="en-US" dirty="0">
+              <a:solidFill>
+                <a:srgbClr val="283C95"/>
+              </a:solidFill>
+              <a:latin typeface="Aptos ExtraBold" panose="020B0004020202020204" pitchFamily="34" charset="0"/>
+            </a:endParaRPr>
+          </a:p>
+        </p:txBody>
+      </p:sp>
+      <p:sp>
+        <p:nvSpPr>
+          <p:cNvPr id="4" name="TextBox 3">
+            <a:extLst>
+              <a:ext uri="{FF2B5EF4-FFF2-40B4-BE49-F238E27FC236}">
+                <a16:creationId xmlns:a16="http://schemas.microsoft.com/office/drawing/2014/main" id="{EA5FCF39-A8D2-6FAD-D963-3E2B1C3E936A}"/>
+              </a:ext>
+            </a:extLst>
+          </p:cNvPr>
+          <p:cNvSpPr txBox="1"/>
+          <p:nvPr/>
+        </p:nvSpPr>
+        <p:spPr>
+          <a:xfrm>
+            <a:off x="606318" y="1363469"/>
+            <a:ext cx="4411159" cy="523220"/>
+          </a:xfrm>
+          <a:prstGeom prst="rect">
+            <a:avLst/>
+          </a:prstGeom>
+          <a:noFill/>
+        </p:spPr>
+        <p:txBody>
+          <a:bodyPr wrap="square" rtlCol="0">
+            <a:spAutoFit/>
+          </a:bodyPr>
+          <a:lstStyle/>
+          <a:p>
+            <a:r>
+              <a:rPr lang="en-US" sz="2800" b="1" dirty="0">
+                <a:solidFill>
+                  <a:schemeClr val="tx1">
+                    <a:lumMod val="75000"/>
+                    <a:lumOff val="25000"/>
+                  </a:schemeClr>
+                </a:solidFill>
+              </a:rPr>
+              <a:t>Top 10 Products Sales</a:t>
+            </a:r>
+          </a:p>
+        </p:txBody>
+      </p:sp>
+      <p:pic>
+        <p:nvPicPr>
+          <p:cNvPr id="8" name="Picture 7">
+            <a:extLst>
+              <a:ext uri="{FF2B5EF4-FFF2-40B4-BE49-F238E27FC236}">
+                <a16:creationId xmlns:a16="http://schemas.microsoft.com/office/drawing/2014/main" id="{6E0EEB83-C0AE-1F73-6CBF-850E0DA63C29}"/>
+              </a:ext>
+            </a:extLst>
+          </p:cNvPr>
+          <p:cNvPicPr>
+            <a:picLocks noChangeAspect="1"/>
+          </p:cNvPicPr>
+          <p:nvPr/>
+        </p:nvPicPr>
+        <p:blipFill>
+          <a:blip r:embed="rId2"/>
+          <a:stretch>
+            <a:fillRect/>
+          </a:stretch>
+        </p:blipFill>
+        <p:spPr>
+          <a:xfrm>
+            <a:off x="163944" y="2086708"/>
+            <a:ext cx="11864111" cy="4309209"/>
+          </a:xfrm>
+          <a:prstGeom prst="rect">
+            <a:avLst/>
+          </a:prstGeom>
+        </p:spPr>
+      </p:pic>
+    </p:spTree>
+    <p:extLst>
+      <p:ext uri="{BB962C8B-B14F-4D97-AF65-F5344CB8AC3E}">
+        <p14:creationId xmlns:p14="http://schemas.microsoft.com/office/powerpoint/2010/main" val="3419974981"/>
+      </p:ext>
+    </p:extLst>
+  </p:cSld>
+  <p:clrMapOvr>
+    <a:masterClrMapping/>
+  </p:clrMapOvr>
+  <mc:AlternateContent xmlns:mc="http://schemas.openxmlformats.org/markup-compatibility/2006">
+    <mc:Choice xmlns:p159="http://schemas.microsoft.com/office/powerpoint/2015/09/main" Requires="p159">
+      <p:transition spd="slow">
+        <p159:morph option="byObject"/>
+      </p:transition>
+    </mc:Choice>
+    <mc:Fallback>
+      <p:transition spd="slow">
+        <p:fade/>
+      </p:transition>
+    </mc:Fallback>
+  </mc:AlternateContent>
+</p:sld>
+</file>
+
+<file path=ppt/slides/slide13.xml><?xml version="1.0" encoding="utf-8"?>
 <p:sld xmlns:a="http://schemas.openxmlformats.org/drawingml/2006/main" xmlns:r="http://schemas.openxmlformats.org/officeDocument/2006/relationships" xmlns:p="http://schemas.openxmlformats.org/presentationml/2006/main">
   <p:cSld>
     <p:spTree>
@@ -4284,13 +5583,13 @@
   <p:clrMapOvr>
     <a:masterClrMapping/>
   </p:clrMapOvr>
-  <mc:AlternateContent xmlns:mc="http://schemas.openxmlformats.org/markup-compatibility/2006" xmlns:p159="http://schemas.microsoft.com/office/powerpoint/2015/09/main">
-    <mc:Choice Requires="p159">
-      <p:transition xmlns:p14="http://schemas.microsoft.com/office/powerpoint/2010/main" spd="slow" p14:dur="2000">
+  <mc:AlternateContent xmlns:mc="http://schemas.openxmlformats.org/markup-compatibility/2006">
+    <mc:Choice xmlns:p159="http://schemas.microsoft.com/office/powerpoint/2015/09/main" Requires="p159">
+      <p:transition spd="slow">
         <p159:morph option="byObject"/>
       </p:transition>
     </mc:Choice>
-    <mc:Fallback xmlns="">
+    <mc:Fallback>
       <p:transition spd="slow">
         <p:fade/>
       </p:transition>
@@ -4299,7 +5598,7 @@
 </p:sld>
 </file>
 
-<file path=ppt/slides/slide11.xml><?xml version="1.0" encoding="utf-8"?>
+<file path=ppt/slides/slide14.xml><?xml version="1.0" encoding="utf-8"?>
 <p:sld xmlns:a="http://schemas.openxmlformats.org/drawingml/2006/main" xmlns:r="http://schemas.openxmlformats.org/officeDocument/2006/relationships" xmlns:p="http://schemas.openxmlformats.org/presentationml/2006/main">
   <p:cSld>
     <p:spTree>
@@ -4544,7 +5843,7 @@
   </p:clrMapOvr>
   <mc:AlternateContent xmlns:mc="http://schemas.openxmlformats.org/markup-compatibility/2006">
     <mc:Choice xmlns:p159="http://schemas.microsoft.com/office/powerpoint/2015/09/main" Requires="p159">
-      <p:transition xmlns:p14="http://schemas.microsoft.com/office/powerpoint/2010/main" spd="slow" p14:dur="2000">
+      <p:transition spd="slow">
         <p159:morph option="byObject"/>
       </p:transition>
     </mc:Choice>
@@ -4557,7 +5856,7 @@
 </p:sld>
 </file>
 
-<file path=ppt/slides/slide12.xml><?xml version="1.0" encoding="utf-8"?>
+<file path=ppt/slides/slide15.xml><?xml version="1.0" encoding="utf-8"?>
 <p:sld xmlns:a="http://schemas.openxmlformats.org/drawingml/2006/main" xmlns:r="http://schemas.openxmlformats.org/officeDocument/2006/relationships" xmlns:p="http://schemas.openxmlformats.org/presentationml/2006/main">
   <p:cSld>
     <p:spTree>
@@ -4810,7 +6109,7 @@
   </p:clrMapOvr>
   <mc:AlternateContent xmlns:mc="http://schemas.openxmlformats.org/markup-compatibility/2006">
     <mc:Choice xmlns:p159="http://schemas.microsoft.com/office/powerpoint/2015/09/main" Requires="p159">
-      <p:transition xmlns:p14="http://schemas.microsoft.com/office/powerpoint/2010/main" spd="slow" p14:dur="2000">
+      <p:transition spd="slow">
         <p159:morph option="byObject"/>
       </p:transition>
     </mc:Choice>
@@ -4823,7 +6122,7 @@
 </p:sld>
 </file>
 
-<file path=ppt/slides/slide13.xml><?xml version="1.0" encoding="utf-8"?>
+<file path=ppt/slides/slide16.xml><?xml version="1.0" encoding="utf-8"?>
 <p:sld xmlns:a="http://schemas.openxmlformats.org/drawingml/2006/main" xmlns:r="http://schemas.openxmlformats.org/officeDocument/2006/relationships" xmlns:p="http://schemas.openxmlformats.org/presentationml/2006/main">
   <p:cSld>
     <p:spTree>
@@ -5101,7 +6400,7 @@
   </p:clrMapOvr>
   <mc:AlternateContent xmlns:mc="http://schemas.openxmlformats.org/markup-compatibility/2006">
     <mc:Choice xmlns:p159="http://schemas.microsoft.com/office/powerpoint/2015/09/main" Requires="p159">
-      <p:transition xmlns:p14="http://schemas.microsoft.com/office/powerpoint/2010/main" spd="slow" p14:dur="2000">
+      <p:transition spd="slow">
         <p159:morph option="byObject"/>
       </p:transition>
     </mc:Choice>
@@ -5114,7 +6413,7 @@
 </p:sld>
 </file>
 
-<file path=ppt/slides/slide14.xml><?xml version="1.0" encoding="utf-8"?>
+<file path=ppt/slides/slide17.xml><?xml version="1.0" encoding="utf-8"?>
 <p:sld xmlns:a="http://schemas.openxmlformats.org/drawingml/2006/main" xmlns:r="http://schemas.openxmlformats.org/officeDocument/2006/relationships" xmlns:p="http://schemas.openxmlformats.org/presentationml/2006/main">
   <p:cSld>
     <p:spTree>
@@ -5699,7 +6998,7 @@
   </p:clrMapOvr>
   <mc:AlternateContent xmlns:mc="http://schemas.openxmlformats.org/markup-compatibility/2006">
     <mc:Choice xmlns:p159="http://schemas.microsoft.com/office/powerpoint/2015/09/main" Requires="p159">
-      <p:transition xmlns:p14="http://schemas.microsoft.com/office/powerpoint/2010/main" spd="slow" p14:dur="2000">
+      <p:transition spd="slow">
         <p159:morph option="byObject"/>
       </p:transition>
     </mc:Choice>
@@ -5712,7 +7011,7 @@
 </p:sld>
 </file>
 
-<file path=ppt/slides/slide15.xml><?xml version="1.0" encoding="utf-8"?>
+<file path=ppt/slides/slide18.xml><?xml version="1.0" encoding="utf-8"?>
 <p:sld xmlns:a="http://schemas.openxmlformats.org/drawingml/2006/main" xmlns:r="http://schemas.openxmlformats.org/officeDocument/2006/relationships" xmlns:p="http://schemas.openxmlformats.org/presentationml/2006/main">
   <p:cSld>
     <p:spTree>
@@ -5988,7 +7287,7 @@
   </p:clrMapOvr>
   <mc:AlternateContent xmlns:mc="http://schemas.openxmlformats.org/markup-compatibility/2006">
     <mc:Choice xmlns:p159="http://schemas.microsoft.com/office/powerpoint/2015/09/main" Requires="p159">
-      <p:transition xmlns:p14="http://schemas.microsoft.com/office/powerpoint/2010/main" spd="slow" p14:dur="2000">
+      <p:transition spd="slow">
         <p159:morph option="byObject"/>
       </p:transition>
     </mc:Choice>
@@ -6001,7 +7300,7 @@
 </p:sld>
 </file>
 
-<file path=ppt/slides/slide16.xml><?xml version="1.0" encoding="utf-8"?>
+<file path=ppt/slides/slide19.xml><?xml version="1.0" encoding="utf-8"?>
 <p:sld xmlns:a="http://schemas.openxmlformats.org/drawingml/2006/main" xmlns:r="http://schemas.openxmlformats.org/officeDocument/2006/relationships" xmlns:p="http://schemas.openxmlformats.org/presentationml/2006/main">
   <p:cSld>
     <p:spTree>
@@ -6295,7 +7594,7 @@
   </p:clrMapOvr>
   <mc:AlternateContent xmlns:mc="http://schemas.openxmlformats.org/markup-compatibility/2006">
     <mc:Choice xmlns:p159="http://schemas.microsoft.com/office/powerpoint/2015/09/main" Requires="p159">
-      <p:transition xmlns:p14="http://schemas.microsoft.com/office/powerpoint/2010/main" spd="slow" p14:dur="2000">
+      <p:transition spd="slow">
         <p159:morph option="byObject"/>
       </p:transition>
     </mc:Choice>
@@ -6308,7 +7607,438 @@
 </p:sld>
 </file>
 
-<file path=ppt/slides/slide17.xml><?xml version="1.0" encoding="utf-8"?>
+<file path=ppt/slides/slide2.xml><?xml version="1.0" encoding="utf-8"?>
+<p:sld xmlns:a="http://schemas.openxmlformats.org/drawingml/2006/main" xmlns:r="http://schemas.openxmlformats.org/officeDocument/2006/relationships" xmlns:p="http://schemas.openxmlformats.org/presentationml/2006/main">
+  <p:cSld>
+    <p:spTree>
+      <p:nvGrpSpPr>
+        <p:cNvPr id="1" name=""/>
+        <p:cNvGrpSpPr/>
+        <p:nvPr/>
+      </p:nvGrpSpPr>
+      <p:grpSpPr>
+        <a:xfrm>
+          <a:off x="0" y="0"/>
+          <a:ext cx="0" cy="0"/>
+          <a:chOff x="0" y="0"/>
+          <a:chExt cx="0" cy="0"/>
+        </a:xfrm>
+      </p:grpSpPr>
+      <p:sp>
+        <p:nvSpPr>
+          <p:cNvPr id="2" name="Title 1">
+            <a:extLst>
+              <a:ext uri="{FF2B5EF4-FFF2-40B4-BE49-F238E27FC236}">
+                <a16:creationId xmlns:a16="http://schemas.microsoft.com/office/drawing/2014/main" id="{B3A4D9AD-6F2F-26C9-7774-2EEBCA3D6945}"/>
+              </a:ext>
+            </a:extLst>
+          </p:cNvPr>
+          <p:cNvSpPr>
+            <a:spLocks noGrp="1"/>
+          </p:cNvSpPr>
+          <p:nvPr>
+            <p:ph type="title"/>
+          </p:nvPr>
+        </p:nvSpPr>
+        <p:spPr/>
+        <p:txBody>
+          <a:bodyPr/>
+          <a:lstStyle/>
+          <a:p>
+            <a:r>
+              <a:rPr lang="en-US" dirty="0">
+                <a:solidFill>
+                  <a:srgbClr val="283C95"/>
+                </a:solidFill>
+                <a:latin typeface="Aptos ExtraBold" panose="020B0004020202020204" pitchFamily="34" charset="0"/>
+              </a:rPr>
+              <a:t>CONTENT</a:t>
+            </a:r>
+          </a:p>
+        </p:txBody>
+      </p:sp>
+      <p:sp>
+        <p:nvSpPr>
+          <p:cNvPr id="8" name="Rectangle 7">
+            <a:extLst>
+              <a:ext uri="{FF2B5EF4-FFF2-40B4-BE49-F238E27FC236}">
+                <a16:creationId xmlns:a16="http://schemas.microsoft.com/office/drawing/2014/main" id="{21E05427-1858-586C-8989-14B624E4E6BD}"/>
+              </a:ext>
+            </a:extLst>
+          </p:cNvPr>
+          <p:cNvSpPr/>
+          <p:nvPr/>
+        </p:nvSpPr>
+        <p:spPr>
+          <a:xfrm rot="20111035">
+            <a:off x="9061161" y="633756"/>
+            <a:ext cx="5097767" cy="5189901"/>
+          </a:xfrm>
+          <a:prstGeom prst="rect">
+            <a:avLst/>
+          </a:prstGeom>
+          <a:noFill/>
+          <a:ln>
+            <a:solidFill>
+              <a:srgbClr val="283C95"/>
+            </a:solidFill>
+          </a:ln>
+        </p:spPr>
+        <p:style>
+          <a:lnRef idx="2">
+            <a:schemeClr val="accent1">
+              <a:shade val="15000"/>
+            </a:schemeClr>
+          </a:lnRef>
+          <a:fillRef idx="1">
+            <a:schemeClr val="accent1"/>
+          </a:fillRef>
+          <a:effectRef idx="0">
+            <a:schemeClr val="accent1"/>
+          </a:effectRef>
+          <a:fontRef idx="minor">
+            <a:schemeClr val="lt1"/>
+          </a:fontRef>
+        </p:style>
+        <p:txBody>
+          <a:bodyPr rtlCol="0" anchor="ctr"/>
+          <a:lstStyle/>
+          <a:p>
+            <a:pPr algn="ctr"/>
+            <a:endParaRPr lang="en-US"/>
+          </a:p>
+        </p:txBody>
+      </p:sp>
+      <p:sp>
+        <p:nvSpPr>
+          <p:cNvPr id="9" name="Rectangle 8">
+            <a:extLst>
+              <a:ext uri="{FF2B5EF4-FFF2-40B4-BE49-F238E27FC236}">
+                <a16:creationId xmlns:a16="http://schemas.microsoft.com/office/drawing/2014/main" id="{AAB8DB72-8F49-7F69-E574-006AEC5E2540}"/>
+              </a:ext>
+            </a:extLst>
+          </p:cNvPr>
+          <p:cNvSpPr/>
+          <p:nvPr/>
+        </p:nvSpPr>
+        <p:spPr>
+          <a:xfrm rot="20111035">
+            <a:off x="9643116" y="633756"/>
+            <a:ext cx="5097767" cy="5189901"/>
+          </a:xfrm>
+          <a:prstGeom prst="rect">
+            <a:avLst/>
+          </a:prstGeom>
+          <a:noFill/>
+          <a:ln>
+            <a:solidFill>
+              <a:srgbClr val="283C95"/>
+            </a:solidFill>
+          </a:ln>
+        </p:spPr>
+        <p:style>
+          <a:lnRef idx="2">
+            <a:schemeClr val="accent1">
+              <a:shade val="15000"/>
+            </a:schemeClr>
+          </a:lnRef>
+          <a:fillRef idx="1">
+            <a:schemeClr val="accent1"/>
+          </a:fillRef>
+          <a:effectRef idx="0">
+            <a:schemeClr val="accent1"/>
+          </a:effectRef>
+          <a:fontRef idx="minor">
+            <a:schemeClr val="lt1"/>
+          </a:fontRef>
+        </p:style>
+        <p:txBody>
+          <a:bodyPr rtlCol="0" anchor="ctr"/>
+          <a:lstStyle/>
+          <a:p>
+            <a:pPr algn="ctr"/>
+            <a:endParaRPr lang="en-US" dirty="0"/>
+          </a:p>
+        </p:txBody>
+      </p:sp>
+      <p:sp>
+        <p:nvSpPr>
+          <p:cNvPr id="10" name="Rectangle 9">
+            <a:extLst>
+              <a:ext uri="{FF2B5EF4-FFF2-40B4-BE49-F238E27FC236}">
+                <a16:creationId xmlns:a16="http://schemas.microsoft.com/office/drawing/2014/main" id="{D992B7BB-C55B-15A3-2B9A-AED9C58A7566}"/>
+              </a:ext>
+            </a:extLst>
+          </p:cNvPr>
+          <p:cNvSpPr/>
+          <p:nvPr/>
+        </p:nvSpPr>
+        <p:spPr>
+          <a:xfrm rot="20111035">
+            <a:off x="10225071" y="633756"/>
+            <a:ext cx="5097767" cy="5189901"/>
+          </a:xfrm>
+          <a:prstGeom prst="rect">
+            <a:avLst/>
+          </a:prstGeom>
+          <a:noFill/>
+          <a:ln>
+            <a:solidFill>
+              <a:srgbClr val="283C95"/>
+            </a:solidFill>
+          </a:ln>
+        </p:spPr>
+        <p:style>
+          <a:lnRef idx="2">
+            <a:schemeClr val="accent1">
+              <a:shade val="15000"/>
+            </a:schemeClr>
+          </a:lnRef>
+          <a:fillRef idx="1">
+            <a:schemeClr val="accent1"/>
+          </a:fillRef>
+          <a:effectRef idx="0">
+            <a:schemeClr val="accent1"/>
+          </a:effectRef>
+          <a:fontRef idx="minor">
+            <a:schemeClr val="lt1"/>
+          </a:fontRef>
+        </p:style>
+        <p:txBody>
+          <a:bodyPr rtlCol="0" anchor="ctr"/>
+          <a:lstStyle/>
+          <a:p>
+            <a:pPr algn="ctr"/>
+            <a:endParaRPr lang="en-US" dirty="0"/>
+          </a:p>
+        </p:txBody>
+      </p:sp>
+      <p:sp>
+        <p:nvSpPr>
+          <p:cNvPr id="11" name="TextBox 10">
+            <a:extLst>
+              <a:ext uri="{FF2B5EF4-FFF2-40B4-BE49-F238E27FC236}">
+                <a16:creationId xmlns:a16="http://schemas.microsoft.com/office/drawing/2014/main" id="{8D63E177-2AF5-6E8F-9032-39D23A9C0063}"/>
+              </a:ext>
+            </a:extLst>
+          </p:cNvPr>
+          <p:cNvSpPr txBox="1"/>
+          <p:nvPr/>
+        </p:nvSpPr>
+        <p:spPr>
+          <a:xfrm>
+            <a:off x="838200" y="2317166"/>
+            <a:ext cx="5827776" cy="399940"/>
+          </a:xfrm>
+          <a:prstGeom prst="rect">
+            <a:avLst/>
+          </a:prstGeom>
+          <a:noFill/>
+        </p:spPr>
+        <p:txBody>
+          <a:bodyPr wrap="square" rtlCol="0">
+            <a:spAutoFit/>
+          </a:bodyPr>
+          <a:lstStyle/>
+          <a:p>
+            <a:r>
+              <a:rPr lang="en-US" sz="2400" dirty="0">
+                <a:solidFill>
+                  <a:srgbClr val="283C95"/>
+                </a:solidFill>
+                <a:latin typeface="Aptos ExtraBold" panose="020B0004020202020204" pitchFamily="34" charset="0"/>
+              </a:rPr>
+              <a:t>01 Introduction</a:t>
+            </a:r>
+          </a:p>
+        </p:txBody>
+      </p:sp>
+      <p:sp>
+        <p:nvSpPr>
+          <p:cNvPr id="12" name="TextBox 11">
+            <a:extLst>
+              <a:ext uri="{FF2B5EF4-FFF2-40B4-BE49-F238E27FC236}">
+                <a16:creationId xmlns:a16="http://schemas.microsoft.com/office/drawing/2014/main" id="{61D39F05-96A8-B56E-3C53-03CDFD864544}"/>
+              </a:ext>
+            </a:extLst>
+          </p:cNvPr>
+          <p:cNvSpPr txBox="1"/>
+          <p:nvPr/>
+        </p:nvSpPr>
+        <p:spPr>
+          <a:xfrm>
+            <a:off x="838200" y="2816360"/>
+            <a:ext cx="5827776" cy="399940"/>
+          </a:xfrm>
+          <a:prstGeom prst="rect">
+            <a:avLst/>
+          </a:prstGeom>
+          <a:noFill/>
+        </p:spPr>
+        <p:txBody>
+          <a:bodyPr wrap="square" rtlCol="0">
+            <a:spAutoFit/>
+          </a:bodyPr>
+          <a:lstStyle/>
+          <a:p>
+            <a:r>
+              <a:rPr lang="en-US" sz="2400" dirty="0">
+                <a:solidFill>
+                  <a:srgbClr val="283C95"/>
+                </a:solidFill>
+                <a:latin typeface="Aptos ExtraBold" panose="020B0004020202020204" pitchFamily="34" charset="0"/>
+              </a:rPr>
+              <a:t>02 Dataset Overview</a:t>
+            </a:r>
+          </a:p>
+        </p:txBody>
+      </p:sp>
+      <p:sp>
+        <p:nvSpPr>
+          <p:cNvPr id="13" name="TextBox 12">
+            <a:extLst>
+              <a:ext uri="{FF2B5EF4-FFF2-40B4-BE49-F238E27FC236}">
+                <a16:creationId xmlns:a16="http://schemas.microsoft.com/office/drawing/2014/main" id="{E381D678-F5CA-B6A2-5615-AA5E1A23EA41}"/>
+              </a:ext>
+            </a:extLst>
+          </p:cNvPr>
+          <p:cNvSpPr txBox="1"/>
+          <p:nvPr/>
+        </p:nvSpPr>
+        <p:spPr>
+          <a:xfrm>
+            <a:off x="838200" y="3328825"/>
+            <a:ext cx="5827776" cy="399940"/>
+          </a:xfrm>
+          <a:prstGeom prst="rect">
+            <a:avLst/>
+          </a:prstGeom>
+          <a:noFill/>
+        </p:spPr>
+        <p:txBody>
+          <a:bodyPr wrap="square" rtlCol="0">
+            <a:spAutoFit/>
+          </a:bodyPr>
+          <a:lstStyle/>
+          <a:p>
+            <a:r>
+              <a:rPr lang="en-US" sz="2400" dirty="0">
+                <a:solidFill>
+                  <a:srgbClr val="283C95"/>
+                </a:solidFill>
+                <a:latin typeface="Aptos ExtraBold" panose="020B0004020202020204" pitchFamily="34" charset="0"/>
+              </a:rPr>
+              <a:t>03 Data Cleaning and Preprocessing</a:t>
+            </a:r>
+          </a:p>
+        </p:txBody>
+      </p:sp>
+      <p:sp>
+        <p:nvSpPr>
+          <p:cNvPr id="14" name="TextBox 13">
+            <a:extLst>
+              <a:ext uri="{FF2B5EF4-FFF2-40B4-BE49-F238E27FC236}">
+                <a16:creationId xmlns:a16="http://schemas.microsoft.com/office/drawing/2014/main" id="{46F6D6D9-5932-893F-6476-3EDCF780C962}"/>
+              </a:ext>
+            </a:extLst>
+          </p:cNvPr>
+          <p:cNvSpPr txBox="1"/>
+          <p:nvPr/>
+        </p:nvSpPr>
+        <p:spPr>
+          <a:xfrm>
+            <a:off x="838200" y="3843586"/>
+            <a:ext cx="5827776" cy="399940"/>
+          </a:xfrm>
+          <a:prstGeom prst="rect">
+            <a:avLst/>
+          </a:prstGeom>
+          <a:noFill/>
+        </p:spPr>
+        <p:txBody>
+          <a:bodyPr wrap="square" rtlCol="0">
+            <a:spAutoFit/>
+          </a:bodyPr>
+          <a:lstStyle/>
+          <a:p>
+            <a:r>
+              <a:rPr lang="en-US" sz="2400" dirty="0">
+                <a:solidFill>
+                  <a:srgbClr val="283C95"/>
+                </a:solidFill>
+                <a:latin typeface="Aptos ExtraBold" panose="020B0004020202020204" pitchFamily="34" charset="0"/>
+              </a:rPr>
+              <a:t>04 EDA Insights</a:t>
+            </a:r>
+          </a:p>
+        </p:txBody>
+      </p:sp>
+      <p:sp>
+        <p:nvSpPr>
+          <p:cNvPr id="4" name="TextBox 3">
+            <a:extLst>
+              <a:ext uri="{FF2B5EF4-FFF2-40B4-BE49-F238E27FC236}">
+                <a16:creationId xmlns:a16="http://schemas.microsoft.com/office/drawing/2014/main" id="{A1AB6849-8D27-660F-1FCD-E4B6AC838F51}"/>
+              </a:ext>
+            </a:extLst>
+          </p:cNvPr>
+          <p:cNvSpPr txBox="1"/>
+          <p:nvPr/>
+        </p:nvSpPr>
+        <p:spPr>
+          <a:xfrm>
+            <a:off x="838200" y="4315436"/>
+            <a:ext cx="5827776" cy="461665"/>
+          </a:xfrm>
+          <a:prstGeom prst="rect">
+            <a:avLst/>
+          </a:prstGeom>
+          <a:noFill/>
+        </p:spPr>
+        <p:txBody>
+          <a:bodyPr wrap="square" rtlCol="0">
+            <a:spAutoFit/>
+          </a:bodyPr>
+          <a:lstStyle/>
+          <a:p>
+            <a:r>
+              <a:rPr lang="en-US" sz="2400" dirty="0">
+                <a:solidFill>
+                  <a:srgbClr val="283C95"/>
+                </a:solidFill>
+                <a:latin typeface="Aptos ExtraBold" panose="020B0004020202020204" pitchFamily="34" charset="0"/>
+              </a:rPr>
+              <a:t>05 Modeling</a:t>
+            </a:r>
+          </a:p>
+        </p:txBody>
+      </p:sp>
+    </p:spTree>
+    <p:extLst>
+      <p:ext uri="{BB962C8B-B14F-4D97-AF65-F5344CB8AC3E}">
+        <p14:creationId xmlns:p14="http://schemas.microsoft.com/office/powerpoint/2010/main" val="2253367093"/>
+      </p:ext>
+    </p:extLst>
+  </p:cSld>
+  <p:clrMapOvr>
+    <a:masterClrMapping/>
+  </p:clrMapOvr>
+  <mc:AlternateContent xmlns:mc="http://schemas.openxmlformats.org/markup-compatibility/2006">
+    <mc:Choice xmlns:p159="http://schemas.microsoft.com/office/powerpoint/2015/09/main" Requires="p159">
+      <p:transition spd="slow">
+        <p159:morph option="byObject"/>
+      </p:transition>
+    </mc:Choice>
+    <mc:Fallback>
+      <p:transition spd="slow">
+        <p:fade/>
+      </p:transition>
+    </mc:Fallback>
+  </mc:AlternateContent>
+</p:sld>
+</file>
+
+<file path=ppt/slides/slide20.xml><?xml version="1.0" encoding="utf-8"?>
 <p:sld xmlns:a="http://schemas.openxmlformats.org/drawingml/2006/main" xmlns:r="http://schemas.openxmlformats.org/officeDocument/2006/relationships" xmlns:p="http://schemas.openxmlformats.org/presentationml/2006/main">
   <p:cSld>
     <p:spTree>
@@ -6515,7 +8245,7 @@
   </p:clrMapOvr>
   <mc:AlternateContent xmlns:mc="http://schemas.openxmlformats.org/markup-compatibility/2006">
     <mc:Choice xmlns:p159="http://schemas.microsoft.com/office/powerpoint/2015/09/main" Requires="p159">
-      <p:transition xmlns:p14="http://schemas.microsoft.com/office/powerpoint/2010/main" spd="slow" p14:dur="2000">
+      <p:transition spd="slow">
         <p159:morph option="byObject"/>
       </p:transition>
     </mc:Choice>
@@ -6528,7 +8258,4276 @@
 </p:sld>
 </file>
 
-<file path=ppt/slides/slide18.xml><?xml version="1.0" encoding="utf-8"?>
+<file path=ppt/slides/slide21.xml><?xml version="1.0" encoding="utf-8"?>
+<p:sld xmlns:a="http://schemas.openxmlformats.org/drawingml/2006/main" xmlns:r="http://schemas.openxmlformats.org/officeDocument/2006/relationships" xmlns:p="http://schemas.openxmlformats.org/presentationml/2006/main">
+  <p:cSld>
+    <p:spTree>
+      <p:nvGrpSpPr>
+        <p:cNvPr id="1" name="">
+          <a:extLst>
+            <a:ext uri="{FF2B5EF4-FFF2-40B4-BE49-F238E27FC236}">
+              <a16:creationId xmlns:a16="http://schemas.microsoft.com/office/drawing/2014/main" id="{9F6ED27C-99A7-DF9D-E24A-9C98DBA74555}"/>
+            </a:ext>
+          </a:extLst>
+        </p:cNvPr>
+        <p:cNvGrpSpPr/>
+        <p:nvPr/>
+      </p:nvGrpSpPr>
+      <p:grpSpPr>
+        <a:xfrm>
+          <a:off x="0" y="0"/>
+          <a:ext cx="0" cy="0"/>
+          <a:chOff x="0" y="0"/>
+          <a:chExt cx="0" cy="0"/>
+        </a:xfrm>
+      </p:grpSpPr>
+      <p:sp>
+        <p:nvSpPr>
+          <p:cNvPr id="2" name="Title 1">
+            <a:extLst>
+              <a:ext uri="{FF2B5EF4-FFF2-40B4-BE49-F238E27FC236}">
+                <a16:creationId xmlns:a16="http://schemas.microsoft.com/office/drawing/2014/main" id="{CABECEFB-7D2D-A131-4C53-4ECBDC1827E1}"/>
+              </a:ext>
+            </a:extLst>
+          </p:cNvPr>
+          <p:cNvSpPr>
+            <a:spLocks noGrp="1"/>
+          </p:cNvSpPr>
+          <p:nvPr>
+            <p:ph type="title"/>
+          </p:nvPr>
+        </p:nvSpPr>
+        <p:spPr>
+          <a:xfrm>
+            <a:off x="256245" y="689"/>
+            <a:ext cx="4448908" cy="1325563"/>
+          </a:xfrm>
+        </p:spPr>
+        <p:txBody>
+          <a:bodyPr/>
+          <a:lstStyle/>
+          <a:p>
+            <a:r>
+              <a:rPr lang="en-US" sz="4400" dirty="0">
+                <a:solidFill>
+                  <a:srgbClr val="283C95"/>
+                </a:solidFill>
+                <a:latin typeface="Aptos ExtraBold" panose="020B0004020202020204" pitchFamily="34" charset="0"/>
+              </a:rPr>
+              <a:t>05 Modeling</a:t>
+            </a:r>
+            <a:endParaRPr lang="en-US" dirty="0">
+              <a:solidFill>
+                <a:srgbClr val="283C95"/>
+              </a:solidFill>
+              <a:latin typeface="Aptos ExtraBold" panose="020B0004020202020204" pitchFamily="34" charset="0"/>
+            </a:endParaRPr>
+          </a:p>
+        </p:txBody>
+      </p:sp>
+      <p:grpSp>
+        <p:nvGrpSpPr>
+          <p:cNvPr id="8" name="Group 7">
+            <a:extLst>
+              <a:ext uri="{FF2B5EF4-FFF2-40B4-BE49-F238E27FC236}">
+                <a16:creationId xmlns:a16="http://schemas.microsoft.com/office/drawing/2014/main" id="{05A5E326-8147-0E6A-896C-C1CA803D67B7}"/>
+              </a:ext>
+            </a:extLst>
+          </p:cNvPr>
+          <p:cNvGrpSpPr/>
+          <p:nvPr/>
+        </p:nvGrpSpPr>
+        <p:grpSpPr>
+          <a:xfrm>
+            <a:off x="296967" y="2724213"/>
+            <a:ext cx="7802521" cy="2875607"/>
+            <a:chOff x="4389479" y="3026182"/>
+            <a:chExt cx="7802521" cy="2875607"/>
+          </a:xfrm>
+        </p:grpSpPr>
+        <p:sp>
+          <p:nvSpPr>
+            <p:cNvPr id="7" name="TextBox 6">
+              <a:extLst>
+                <a:ext uri="{FF2B5EF4-FFF2-40B4-BE49-F238E27FC236}">
+                  <a16:creationId xmlns:a16="http://schemas.microsoft.com/office/drawing/2014/main" id="{48B48B9E-64D2-2CD7-B1F5-0DD360815D55}"/>
+                </a:ext>
+              </a:extLst>
+            </p:cNvPr>
+            <p:cNvSpPr txBox="1"/>
+            <p:nvPr/>
+          </p:nvSpPr>
+          <p:spPr>
+            <a:xfrm>
+              <a:off x="4404946" y="3026182"/>
+              <a:ext cx="7787054" cy="1446550"/>
+            </a:xfrm>
+            <a:prstGeom prst="rect">
+              <a:avLst/>
+            </a:prstGeom>
+            <a:noFill/>
+          </p:spPr>
+          <p:txBody>
+            <a:bodyPr wrap="square" rtlCol="0">
+              <a:spAutoFit/>
+            </a:bodyPr>
+            <a:lstStyle/>
+            <a:p>
+              <a:r>
+                <a:rPr lang="en-US" sz="2800" b="1" dirty="0">
+                  <a:solidFill>
+                    <a:srgbClr val="283C95"/>
+                  </a:solidFill>
+                  <a:latin typeface="+mj-lt"/>
+                </a:rPr>
+                <a:t>Models Used</a:t>
+              </a:r>
+              <a:r>
+                <a:rPr lang="en-US" sz="2400" b="0" i="0" dirty="0">
+                  <a:solidFill>
+                    <a:srgbClr val="F8FAFF"/>
+                  </a:solidFill>
+                  <a:effectLst/>
+                  <a:latin typeface="Inter"/>
+                </a:rPr>
+                <a:t>:</a:t>
+              </a:r>
+            </a:p>
+            <a:p>
+              <a:pPr marL="342900" indent="-342900" algn="l">
+                <a:buFont typeface="Arial" panose="020B0604020202020204" pitchFamily="34" charset="0"/>
+                <a:buChar char="•"/>
+              </a:pPr>
+              <a:r>
+                <a:rPr lang="en-US" sz="2000" b="1" dirty="0"/>
+                <a:t>Linear Regression</a:t>
+              </a:r>
+            </a:p>
+            <a:p>
+              <a:pPr marL="342900" indent="-342900" algn="l">
+                <a:buFont typeface="Arial" panose="020B0604020202020204" pitchFamily="34" charset="0"/>
+                <a:buChar char="•"/>
+              </a:pPr>
+              <a:r>
+                <a:rPr lang="en-US" sz="2000" b="1" dirty="0"/>
+                <a:t>Decision Tree Regressor</a:t>
+              </a:r>
+              <a:endParaRPr lang="en-US" sz="2000" b="1" i="0" dirty="0">
+                <a:effectLst/>
+                <a:latin typeface="+mj-lt"/>
+              </a:endParaRPr>
+            </a:p>
+            <a:p>
+              <a:pPr marL="342900" indent="-342900">
+                <a:buFont typeface="Arial" panose="020B0604020202020204" pitchFamily="34" charset="0"/>
+                <a:buChar char="•"/>
+              </a:pPr>
+              <a:r>
+                <a:rPr lang="en-US" sz="2000" b="1" dirty="0"/>
+                <a:t>Random Forest Regressor</a:t>
+              </a:r>
+              <a:endParaRPr lang="en-US" sz="2000" b="1" dirty="0">
+                <a:solidFill>
+                  <a:srgbClr val="283C95"/>
+                </a:solidFill>
+                <a:latin typeface="+mj-lt"/>
+              </a:endParaRPr>
+            </a:p>
+          </p:txBody>
+        </p:sp>
+        <p:sp>
+          <p:nvSpPr>
+            <p:cNvPr id="11" name="TextBox 10">
+              <a:extLst>
+                <a:ext uri="{FF2B5EF4-FFF2-40B4-BE49-F238E27FC236}">
+                  <a16:creationId xmlns:a16="http://schemas.microsoft.com/office/drawing/2014/main" id="{5DFBDA21-87E3-6AD4-91CF-6D8247260409}"/>
+                </a:ext>
+              </a:extLst>
+            </p:cNvPr>
+            <p:cNvSpPr txBox="1"/>
+            <p:nvPr/>
+          </p:nvSpPr>
+          <p:spPr>
+            <a:xfrm>
+              <a:off x="4389479" y="4724544"/>
+              <a:ext cx="7531580" cy="1177245"/>
+            </a:xfrm>
+            <a:prstGeom prst="rect">
+              <a:avLst/>
+            </a:prstGeom>
+            <a:noFill/>
+          </p:spPr>
+          <p:txBody>
+            <a:bodyPr wrap="square" rtlCol="0">
+              <a:spAutoFit/>
+            </a:bodyPr>
+            <a:lstStyle/>
+            <a:p>
+              <a:r>
+                <a:rPr lang="en-US" sz="2800" b="1" i="0" dirty="0">
+                  <a:solidFill>
+                    <a:srgbClr val="283C95"/>
+                  </a:solidFill>
+                  <a:effectLst/>
+                  <a:latin typeface="+mj-lt"/>
+                </a:rPr>
+                <a:t>Evaluation Metrics</a:t>
+              </a:r>
+              <a:endParaRPr lang="en-US" sz="2400" b="0" i="0" dirty="0">
+                <a:solidFill>
+                  <a:srgbClr val="F8FAFF"/>
+                </a:solidFill>
+                <a:effectLst/>
+                <a:latin typeface="Inter"/>
+              </a:endParaRPr>
+            </a:p>
+            <a:p>
+              <a:pPr marL="342900" indent="-342900" algn="l">
+                <a:buFont typeface="Arial" panose="020B0604020202020204" pitchFamily="34" charset="0"/>
+                <a:buChar char="•"/>
+              </a:pPr>
+              <a:r>
+                <a:rPr lang="en-US" sz="2000" b="1" i="0" dirty="0">
+                  <a:effectLst/>
+                  <a:latin typeface="+mj-lt"/>
+                </a:rPr>
+                <a:t>MAE, MSE, RMSE: Measure prediction error</a:t>
+              </a:r>
+            </a:p>
+            <a:p>
+              <a:pPr marL="342900" indent="-342900" algn="l">
+                <a:spcBef>
+                  <a:spcPts val="300"/>
+                </a:spcBef>
+                <a:buFont typeface="Arial" panose="020B0604020202020204" pitchFamily="34" charset="0"/>
+                <a:buChar char="•"/>
+              </a:pPr>
+              <a:r>
+                <a:rPr lang="en-US" sz="2000" b="1" dirty="0">
+                  <a:latin typeface="+mj-lt"/>
+                </a:rPr>
+                <a:t>RMSLE: Accounts for relative error, useful for skewed sales data</a:t>
+              </a:r>
+              <a:endParaRPr lang="en-US" sz="2000" b="1" i="0" dirty="0">
+                <a:effectLst/>
+                <a:latin typeface="+mj-lt"/>
+              </a:endParaRPr>
+            </a:p>
+          </p:txBody>
+        </p:sp>
+      </p:grpSp>
+      <p:sp>
+        <p:nvSpPr>
+          <p:cNvPr id="4" name="TextBox 3">
+            <a:extLst>
+              <a:ext uri="{FF2B5EF4-FFF2-40B4-BE49-F238E27FC236}">
+                <a16:creationId xmlns:a16="http://schemas.microsoft.com/office/drawing/2014/main" id="{C2310C6E-53C8-8140-1187-BFE8044A1D5B}"/>
+              </a:ext>
+            </a:extLst>
+          </p:cNvPr>
+          <p:cNvSpPr txBox="1"/>
+          <p:nvPr/>
+        </p:nvSpPr>
+        <p:spPr>
+          <a:xfrm>
+            <a:off x="304414" y="1144066"/>
+            <a:ext cx="7787054" cy="1446550"/>
+          </a:xfrm>
+          <a:prstGeom prst="rect">
+            <a:avLst/>
+          </a:prstGeom>
+          <a:noFill/>
+        </p:spPr>
+        <p:txBody>
+          <a:bodyPr wrap="square" rtlCol="0">
+            <a:spAutoFit/>
+          </a:bodyPr>
+          <a:lstStyle/>
+          <a:p>
+            <a:r>
+              <a:rPr lang="en-US" sz="2800" b="1" dirty="0">
+                <a:solidFill>
+                  <a:srgbClr val="283C95"/>
+                </a:solidFill>
+                <a:latin typeface="+mj-lt"/>
+              </a:rPr>
+              <a:t>Objectives</a:t>
+            </a:r>
+            <a:r>
+              <a:rPr lang="en-US" sz="2400" b="0" i="0" dirty="0">
+                <a:solidFill>
+                  <a:srgbClr val="F8FAFF"/>
+                </a:solidFill>
+                <a:effectLst/>
+                <a:latin typeface="Inter"/>
+              </a:rPr>
+              <a:t>:</a:t>
+            </a:r>
+          </a:p>
+          <a:p>
+            <a:pPr marL="342900" indent="-342900" algn="l">
+              <a:buFont typeface="Arial" panose="020B0604020202020204" pitchFamily="34" charset="0"/>
+              <a:buChar char="•"/>
+            </a:pPr>
+            <a:r>
+              <a:rPr lang="en-US" sz="2000" b="1" dirty="0"/>
+              <a:t>Select appropriate regression models</a:t>
+            </a:r>
+          </a:p>
+          <a:p>
+            <a:pPr marL="342900" indent="-342900" algn="l">
+              <a:buFont typeface="Arial" panose="020B0604020202020204" pitchFamily="34" charset="0"/>
+              <a:buChar char="•"/>
+            </a:pPr>
+            <a:r>
+              <a:rPr lang="en-US" sz="2000" b="1" dirty="0"/>
+              <a:t>Evaluate their performance using key metrics</a:t>
+            </a:r>
+            <a:endParaRPr lang="en-US" sz="2000" b="1" i="0" dirty="0">
+              <a:effectLst/>
+              <a:latin typeface="+mj-lt"/>
+            </a:endParaRPr>
+          </a:p>
+          <a:p>
+            <a:pPr marL="342900" indent="-342900">
+              <a:buFont typeface="Arial" panose="020B0604020202020204" pitchFamily="34" charset="0"/>
+              <a:buChar char="•"/>
+            </a:pPr>
+            <a:r>
+              <a:rPr lang="en-US" sz="2000" b="1" dirty="0"/>
+              <a:t>Apply cross-validation to ensure model reliability</a:t>
+            </a:r>
+            <a:endParaRPr lang="en-US" sz="2000" b="1" dirty="0">
+              <a:solidFill>
+                <a:srgbClr val="283C95"/>
+              </a:solidFill>
+              <a:latin typeface="+mj-lt"/>
+            </a:endParaRPr>
+          </a:p>
+        </p:txBody>
+      </p:sp>
+      <p:pic>
+        <p:nvPicPr>
+          <p:cNvPr id="14" name="Picture 13" descr="A graph on a screen&#10;&#10;AI-generated content may be incorrect.">
+            <a:extLst>
+              <a:ext uri="{FF2B5EF4-FFF2-40B4-BE49-F238E27FC236}">
+                <a16:creationId xmlns:a16="http://schemas.microsoft.com/office/drawing/2014/main" id="{7F84FF2A-065B-4CE0-FFDE-6044D67C93D4}"/>
+              </a:ext>
+            </a:extLst>
+          </p:cNvPr>
+          <p:cNvPicPr>
+            <a:picLocks noChangeAspect="1"/>
+          </p:cNvPicPr>
+          <p:nvPr/>
+        </p:nvPicPr>
+        <p:blipFill>
+          <a:blip r:embed="rId2">
+            <a:extLst>
+              <a:ext uri="{28A0092B-C50C-407E-A947-70E740481C1C}">
+                <a14:useLocalDpi xmlns:a14="http://schemas.microsoft.com/office/drawing/2010/main" val="0"/>
+              </a:ext>
+            </a:extLst>
+          </a:blip>
+          <a:stretch>
+            <a:fillRect/>
+          </a:stretch>
+        </p:blipFill>
+        <p:spPr>
+          <a:xfrm>
+            <a:off x="8349574" y="0"/>
+            <a:ext cx="3842426" cy="6858000"/>
+          </a:xfrm>
+          <a:prstGeom prst="rect">
+            <a:avLst/>
+          </a:prstGeom>
+          <a:ln>
+            <a:noFill/>
+          </a:ln>
+        </p:spPr>
+      </p:pic>
+      <p:sp>
+        <p:nvSpPr>
+          <p:cNvPr id="9" name="Rectangle 8">
+            <a:extLst>
+              <a:ext uri="{FF2B5EF4-FFF2-40B4-BE49-F238E27FC236}">
+                <a16:creationId xmlns:a16="http://schemas.microsoft.com/office/drawing/2014/main" id="{266CBD9C-BA65-747A-BFDE-9D8986C112A1}"/>
+              </a:ext>
+            </a:extLst>
+          </p:cNvPr>
+          <p:cNvSpPr/>
+          <p:nvPr/>
+        </p:nvSpPr>
+        <p:spPr>
+          <a:xfrm rot="20111035">
+            <a:off x="7892327" y="-6145973"/>
+            <a:ext cx="5097767" cy="5189901"/>
+          </a:xfrm>
+          <a:prstGeom prst="rect">
+            <a:avLst/>
+          </a:prstGeom>
+          <a:noFill/>
+          <a:ln>
+            <a:solidFill>
+              <a:srgbClr val="283C95"/>
+            </a:solidFill>
+          </a:ln>
+        </p:spPr>
+        <p:style>
+          <a:lnRef idx="2">
+            <a:schemeClr val="accent1">
+              <a:shade val="15000"/>
+            </a:schemeClr>
+          </a:lnRef>
+          <a:fillRef idx="1">
+            <a:schemeClr val="accent1"/>
+          </a:fillRef>
+          <a:effectRef idx="0">
+            <a:schemeClr val="accent1"/>
+          </a:effectRef>
+          <a:fontRef idx="minor">
+            <a:schemeClr val="lt1"/>
+          </a:fontRef>
+        </p:style>
+        <p:txBody>
+          <a:bodyPr rtlCol="0" anchor="ctr"/>
+          <a:lstStyle/>
+          <a:p>
+            <a:pPr algn="ctr"/>
+            <a:endParaRPr lang="en-US"/>
+          </a:p>
+        </p:txBody>
+      </p:sp>
+      <p:sp>
+        <p:nvSpPr>
+          <p:cNvPr id="10" name="Rectangle 9">
+            <a:extLst>
+              <a:ext uri="{FF2B5EF4-FFF2-40B4-BE49-F238E27FC236}">
+                <a16:creationId xmlns:a16="http://schemas.microsoft.com/office/drawing/2014/main" id="{4E0462AF-705F-6602-0148-21F067639A3F}"/>
+              </a:ext>
+            </a:extLst>
+          </p:cNvPr>
+          <p:cNvSpPr/>
+          <p:nvPr/>
+        </p:nvSpPr>
+        <p:spPr>
+          <a:xfrm rot="20111035">
+            <a:off x="8474282" y="-6145973"/>
+            <a:ext cx="5097767" cy="5189901"/>
+          </a:xfrm>
+          <a:prstGeom prst="rect">
+            <a:avLst/>
+          </a:prstGeom>
+          <a:noFill/>
+          <a:ln>
+            <a:solidFill>
+              <a:srgbClr val="283C95"/>
+            </a:solidFill>
+          </a:ln>
+        </p:spPr>
+        <p:style>
+          <a:lnRef idx="2">
+            <a:schemeClr val="accent1">
+              <a:shade val="15000"/>
+            </a:schemeClr>
+          </a:lnRef>
+          <a:fillRef idx="1">
+            <a:schemeClr val="accent1"/>
+          </a:fillRef>
+          <a:effectRef idx="0">
+            <a:schemeClr val="accent1"/>
+          </a:effectRef>
+          <a:fontRef idx="minor">
+            <a:schemeClr val="lt1"/>
+          </a:fontRef>
+        </p:style>
+        <p:txBody>
+          <a:bodyPr rtlCol="0" anchor="ctr"/>
+          <a:lstStyle/>
+          <a:p>
+            <a:pPr algn="ctr"/>
+            <a:endParaRPr lang="en-US" dirty="0"/>
+          </a:p>
+        </p:txBody>
+      </p:sp>
+      <p:sp>
+        <p:nvSpPr>
+          <p:cNvPr id="12" name="Rectangle 11">
+            <a:extLst>
+              <a:ext uri="{FF2B5EF4-FFF2-40B4-BE49-F238E27FC236}">
+                <a16:creationId xmlns:a16="http://schemas.microsoft.com/office/drawing/2014/main" id="{D9C79297-788A-B380-B20E-32598ED8709F}"/>
+              </a:ext>
+            </a:extLst>
+          </p:cNvPr>
+          <p:cNvSpPr/>
+          <p:nvPr/>
+        </p:nvSpPr>
+        <p:spPr>
+          <a:xfrm rot="20111035">
+            <a:off x="9056237" y="-6145973"/>
+            <a:ext cx="5097767" cy="5189901"/>
+          </a:xfrm>
+          <a:prstGeom prst="rect">
+            <a:avLst/>
+          </a:prstGeom>
+          <a:noFill/>
+          <a:ln>
+            <a:solidFill>
+              <a:srgbClr val="283C95"/>
+            </a:solidFill>
+          </a:ln>
+        </p:spPr>
+        <p:style>
+          <a:lnRef idx="2">
+            <a:schemeClr val="accent1">
+              <a:shade val="15000"/>
+            </a:schemeClr>
+          </a:lnRef>
+          <a:fillRef idx="1">
+            <a:schemeClr val="accent1"/>
+          </a:fillRef>
+          <a:effectRef idx="0">
+            <a:schemeClr val="accent1"/>
+          </a:effectRef>
+          <a:fontRef idx="minor">
+            <a:schemeClr val="lt1"/>
+          </a:fontRef>
+        </p:style>
+        <p:txBody>
+          <a:bodyPr rtlCol="0" anchor="ctr"/>
+          <a:lstStyle/>
+          <a:p>
+            <a:pPr algn="ctr"/>
+            <a:endParaRPr lang="en-US" dirty="0"/>
+          </a:p>
+        </p:txBody>
+      </p:sp>
+      <p:sp>
+        <p:nvSpPr>
+          <p:cNvPr id="13" name="Rectangle 12">
+            <a:extLst>
+              <a:ext uri="{FF2B5EF4-FFF2-40B4-BE49-F238E27FC236}">
+                <a16:creationId xmlns:a16="http://schemas.microsoft.com/office/drawing/2014/main" id="{26F77EA6-82DF-2A05-D760-454B59415A1C}"/>
+              </a:ext>
+            </a:extLst>
+          </p:cNvPr>
+          <p:cNvSpPr/>
+          <p:nvPr/>
+        </p:nvSpPr>
+        <p:spPr>
+          <a:xfrm rot="20111035">
+            <a:off x="6590704" y="7814071"/>
+            <a:ext cx="5097767" cy="5189901"/>
+          </a:xfrm>
+          <a:prstGeom prst="rect">
+            <a:avLst/>
+          </a:prstGeom>
+          <a:noFill/>
+          <a:ln>
+            <a:solidFill>
+              <a:srgbClr val="283C95"/>
+            </a:solidFill>
+          </a:ln>
+        </p:spPr>
+        <p:style>
+          <a:lnRef idx="2">
+            <a:schemeClr val="accent1">
+              <a:shade val="15000"/>
+            </a:schemeClr>
+          </a:lnRef>
+          <a:fillRef idx="1">
+            <a:schemeClr val="accent1"/>
+          </a:fillRef>
+          <a:effectRef idx="0">
+            <a:schemeClr val="accent1"/>
+          </a:effectRef>
+          <a:fontRef idx="minor">
+            <a:schemeClr val="lt1"/>
+          </a:fontRef>
+        </p:style>
+        <p:txBody>
+          <a:bodyPr rtlCol="0" anchor="ctr"/>
+          <a:lstStyle/>
+          <a:p>
+            <a:pPr algn="ctr"/>
+            <a:endParaRPr lang="en-US"/>
+          </a:p>
+        </p:txBody>
+      </p:sp>
+      <p:sp>
+        <p:nvSpPr>
+          <p:cNvPr id="15" name="Rectangle 14">
+            <a:extLst>
+              <a:ext uri="{FF2B5EF4-FFF2-40B4-BE49-F238E27FC236}">
+                <a16:creationId xmlns:a16="http://schemas.microsoft.com/office/drawing/2014/main" id="{0DAA1966-3695-9287-AE74-925CFE515A09}"/>
+              </a:ext>
+            </a:extLst>
+          </p:cNvPr>
+          <p:cNvSpPr/>
+          <p:nvPr/>
+        </p:nvSpPr>
+        <p:spPr>
+          <a:xfrm rot="20111035">
+            <a:off x="7172659" y="7814071"/>
+            <a:ext cx="5097767" cy="5189901"/>
+          </a:xfrm>
+          <a:prstGeom prst="rect">
+            <a:avLst/>
+          </a:prstGeom>
+          <a:noFill/>
+          <a:ln>
+            <a:solidFill>
+              <a:srgbClr val="283C95"/>
+            </a:solidFill>
+          </a:ln>
+        </p:spPr>
+        <p:style>
+          <a:lnRef idx="2">
+            <a:schemeClr val="accent1">
+              <a:shade val="15000"/>
+            </a:schemeClr>
+          </a:lnRef>
+          <a:fillRef idx="1">
+            <a:schemeClr val="accent1"/>
+          </a:fillRef>
+          <a:effectRef idx="0">
+            <a:schemeClr val="accent1"/>
+          </a:effectRef>
+          <a:fontRef idx="minor">
+            <a:schemeClr val="lt1"/>
+          </a:fontRef>
+        </p:style>
+        <p:txBody>
+          <a:bodyPr rtlCol="0" anchor="ctr"/>
+          <a:lstStyle/>
+          <a:p>
+            <a:pPr algn="ctr"/>
+            <a:endParaRPr lang="en-US" dirty="0"/>
+          </a:p>
+        </p:txBody>
+      </p:sp>
+      <p:sp>
+        <p:nvSpPr>
+          <p:cNvPr id="16" name="Rectangle 15">
+            <a:extLst>
+              <a:ext uri="{FF2B5EF4-FFF2-40B4-BE49-F238E27FC236}">
+                <a16:creationId xmlns:a16="http://schemas.microsoft.com/office/drawing/2014/main" id="{D918798D-6719-0B85-2AA3-250E5207034F}"/>
+              </a:ext>
+            </a:extLst>
+          </p:cNvPr>
+          <p:cNvSpPr/>
+          <p:nvPr/>
+        </p:nvSpPr>
+        <p:spPr>
+          <a:xfrm rot="20111035">
+            <a:off x="7754614" y="7814071"/>
+            <a:ext cx="5097767" cy="5189901"/>
+          </a:xfrm>
+          <a:prstGeom prst="rect">
+            <a:avLst/>
+          </a:prstGeom>
+          <a:noFill/>
+          <a:ln>
+            <a:solidFill>
+              <a:srgbClr val="283C95"/>
+            </a:solidFill>
+          </a:ln>
+        </p:spPr>
+        <p:style>
+          <a:lnRef idx="2">
+            <a:schemeClr val="accent1">
+              <a:shade val="15000"/>
+            </a:schemeClr>
+          </a:lnRef>
+          <a:fillRef idx="1">
+            <a:schemeClr val="accent1"/>
+          </a:fillRef>
+          <a:effectRef idx="0">
+            <a:schemeClr val="accent1"/>
+          </a:effectRef>
+          <a:fontRef idx="minor">
+            <a:schemeClr val="lt1"/>
+          </a:fontRef>
+        </p:style>
+        <p:txBody>
+          <a:bodyPr rtlCol="0" anchor="ctr"/>
+          <a:lstStyle/>
+          <a:p>
+            <a:pPr algn="ctr"/>
+            <a:endParaRPr lang="en-US" dirty="0"/>
+          </a:p>
+        </p:txBody>
+      </p:sp>
+    </p:spTree>
+    <p:extLst>
+      <p:ext uri="{BB962C8B-B14F-4D97-AF65-F5344CB8AC3E}">
+        <p14:creationId xmlns:p14="http://schemas.microsoft.com/office/powerpoint/2010/main" val="2201673340"/>
+      </p:ext>
+    </p:extLst>
+  </p:cSld>
+  <p:clrMapOvr>
+    <a:masterClrMapping/>
+  </p:clrMapOvr>
+  <mc:AlternateContent xmlns:mc="http://schemas.openxmlformats.org/markup-compatibility/2006">
+    <mc:Choice xmlns:p159="http://schemas.microsoft.com/office/powerpoint/2015/09/main" Requires="p159">
+      <p:transition spd="slow">
+        <p159:morph option="byObject"/>
+      </p:transition>
+    </mc:Choice>
+    <mc:Fallback>
+      <p:transition spd="slow">
+        <p:fade/>
+      </p:transition>
+    </mc:Fallback>
+  </mc:AlternateContent>
+</p:sld>
+</file>
+
+<file path=ppt/slides/slide22.xml><?xml version="1.0" encoding="utf-8"?>
+<p:sld xmlns:a="http://schemas.openxmlformats.org/drawingml/2006/main" xmlns:r="http://schemas.openxmlformats.org/officeDocument/2006/relationships" xmlns:p="http://schemas.openxmlformats.org/presentationml/2006/main">
+  <p:cSld>
+    <p:spTree>
+      <p:nvGrpSpPr>
+        <p:cNvPr id="1" name="">
+          <a:extLst>
+            <a:ext uri="{FF2B5EF4-FFF2-40B4-BE49-F238E27FC236}">
+              <a16:creationId xmlns:a16="http://schemas.microsoft.com/office/drawing/2014/main" id="{C978DA6B-7802-5269-82A4-D60CFF5C9C99}"/>
+            </a:ext>
+          </a:extLst>
+        </p:cNvPr>
+        <p:cNvGrpSpPr/>
+        <p:nvPr/>
+      </p:nvGrpSpPr>
+      <p:grpSpPr>
+        <a:xfrm>
+          <a:off x="0" y="0"/>
+          <a:ext cx="0" cy="0"/>
+          <a:chOff x="0" y="0"/>
+          <a:chExt cx="0" cy="0"/>
+        </a:xfrm>
+      </p:grpSpPr>
+      <p:sp>
+        <p:nvSpPr>
+          <p:cNvPr id="2" name="Title 1">
+            <a:extLst>
+              <a:ext uri="{FF2B5EF4-FFF2-40B4-BE49-F238E27FC236}">
+                <a16:creationId xmlns:a16="http://schemas.microsoft.com/office/drawing/2014/main" id="{375BEB7D-CD6F-AF23-AC14-AC118EA76CE4}"/>
+              </a:ext>
+            </a:extLst>
+          </p:cNvPr>
+          <p:cNvSpPr>
+            <a:spLocks noGrp="1"/>
+          </p:cNvSpPr>
+          <p:nvPr>
+            <p:ph type="title"/>
+          </p:nvPr>
+        </p:nvSpPr>
+        <p:spPr>
+          <a:xfrm>
+            <a:off x="90194" y="53240"/>
+            <a:ext cx="8700879" cy="1325563"/>
+          </a:xfrm>
+        </p:spPr>
+        <p:txBody>
+          <a:bodyPr>
+            <a:normAutofit/>
+          </a:bodyPr>
+          <a:lstStyle/>
+          <a:p>
+            <a:r>
+              <a:rPr lang="en-US" sz="4400" dirty="0">
+                <a:solidFill>
+                  <a:srgbClr val="283C95"/>
+                </a:solidFill>
+                <a:latin typeface="Aptos ExtraBold" panose="020B0004020202020204" pitchFamily="34" charset="0"/>
+              </a:rPr>
+              <a:t>05 Modeling : </a:t>
+            </a:r>
+            <a:r>
+              <a:rPr lang="en-US" sz="4400" b="1" dirty="0">
+                <a:solidFill>
+                  <a:srgbClr val="283C95"/>
+                </a:solidFill>
+                <a:latin typeface="+mj-lt"/>
+              </a:rPr>
+              <a:t>Linear Regression</a:t>
+            </a:r>
+            <a:endParaRPr lang="en-US" dirty="0">
+              <a:solidFill>
+                <a:srgbClr val="283C95"/>
+              </a:solidFill>
+              <a:latin typeface="Aptos ExtraBold" panose="020B0004020202020204" pitchFamily="34" charset="0"/>
+            </a:endParaRPr>
+          </a:p>
+        </p:txBody>
+      </p:sp>
+      <p:sp>
+        <p:nvSpPr>
+          <p:cNvPr id="3" name="Title 1">
+            <a:extLst>
+              <a:ext uri="{FF2B5EF4-FFF2-40B4-BE49-F238E27FC236}">
+                <a16:creationId xmlns:a16="http://schemas.microsoft.com/office/drawing/2014/main" id="{01E84C62-3D24-970E-78CA-D17C9C1D15A2}"/>
+              </a:ext>
+            </a:extLst>
+          </p:cNvPr>
+          <p:cNvSpPr txBox="1">
+            <a:spLocks/>
+          </p:cNvSpPr>
+          <p:nvPr/>
+        </p:nvSpPr>
+        <p:spPr>
+          <a:xfrm>
+            <a:off x="838200" y="344853"/>
+            <a:ext cx="10515600" cy="1325563"/>
+          </a:xfrm>
+          <a:prstGeom prst="rect">
+            <a:avLst/>
+          </a:prstGeom>
+        </p:spPr>
+        <p:txBody>
+          <a:bodyPr vert="horz" lIns="91440" tIns="45720" rIns="91440" bIns="45720" rtlCol="0" anchor="ctr">
+            <a:normAutofit/>
+          </a:bodyPr>
+          <a:lstStyle>
+            <a:lvl1pPr algn="l" defTabSz="914400" rtl="0" eaLnBrk="1" latinLnBrk="0" hangingPunct="1">
+              <a:lnSpc>
+                <a:spcPct val="90000"/>
+              </a:lnSpc>
+              <a:spcBef>
+                <a:spcPct val="0"/>
+              </a:spcBef>
+              <a:buNone/>
+              <a:defRPr sz="4400" kern="1200">
+                <a:solidFill>
+                  <a:schemeClr val="tx1"/>
+                </a:solidFill>
+                <a:latin typeface="+mj-lt"/>
+                <a:ea typeface="+mj-ea"/>
+                <a:cs typeface="+mj-cs"/>
+              </a:defRPr>
+            </a:lvl1pPr>
+          </a:lstStyle>
+          <a:p>
+            <a:endParaRPr lang="en-US" dirty="0">
+              <a:solidFill>
+                <a:srgbClr val="283C95"/>
+              </a:solidFill>
+              <a:latin typeface="Aptos ExtraBold" panose="020B0004020202020204" pitchFamily="34" charset="0"/>
+            </a:endParaRPr>
+          </a:p>
+        </p:txBody>
+      </p:sp>
+      <p:grpSp>
+        <p:nvGrpSpPr>
+          <p:cNvPr id="8" name="Group 7">
+            <a:extLst>
+              <a:ext uri="{FF2B5EF4-FFF2-40B4-BE49-F238E27FC236}">
+                <a16:creationId xmlns:a16="http://schemas.microsoft.com/office/drawing/2014/main" id="{E0909537-84ED-BA4E-AF83-F481D827D704}"/>
+              </a:ext>
+            </a:extLst>
+          </p:cNvPr>
+          <p:cNvGrpSpPr/>
+          <p:nvPr/>
+        </p:nvGrpSpPr>
+        <p:grpSpPr>
+          <a:xfrm>
+            <a:off x="428776" y="1651539"/>
+            <a:ext cx="7463940" cy="4679998"/>
+            <a:chOff x="4404946" y="3026182"/>
+            <a:chExt cx="7787054" cy="4679998"/>
+          </a:xfrm>
+        </p:grpSpPr>
+        <p:sp>
+          <p:nvSpPr>
+            <p:cNvPr id="6" name="TextBox 5">
+              <a:extLst>
+                <a:ext uri="{FF2B5EF4-FFF2-40B4-BE49-F238E27FC236}">
+                  <a16:creationId xmlns:a16="http://schemas.microsoft.com/office/drawing/2014/main" id="{4F782079-AE8E-63F0-86E6-DA9451B50142}"/>
+                </a:ext>
+              </a:extLst>
+            </p:cNvPr>
+            <p:cNvSpPr txBox="1"/>
+            <p:nvPr/>
+          </p:nvSpPr>
+          <p:spPr>
+            <a:xfrm>
+              <a:off x="4404946" y="5028524"/>
+              <a:ext cx="6805275" cy="2677656"/>
+            </a:xfrm>
+            <a:prstGeom prst="rect">
+              <a:avLst/>
+            </a:prstGeom>
+            <a:noFill/>
+          </p:spPr>
+          <p:txBody>
+            <a:bodyPr wrap="square" rtlCol="0">
+              <a:spAutoFit/>
+            </a:bodyPr>
+            <a:lstStyle/>
+            <a:p>
+              <a:r>
+                <a:rPr lang="en-US" sz="2800" b="1" i="0" dirty="0">
+                  <a:solidFill>
+                    <a:srgbClr val="283C95"/>
+                  </a:solidFill>
+                  <a:effectLst/>
+                  <a:latin typeface="+mj-lt"/>
+                </a:rPr>
+                <a:t>Conclusion</a:t>
+              </a:r>
+            </a:p>
+            <a:p>
+              <a:r>
+                <a:rPr lang="en-US" sz="2000" b="1" dirty="0"/>
+                <a:t>The linear regression model gave us a decent start, but as seen in the metrics, there’s quite a bit of error — especially noticeable in the RMSLE. This suggests that our sales data might have a skewed or wide distribution, which this linear model doesn’t capture well. That’s why we explored more flexible models next.</a:t>
+              </a:r>
+            </a:p>
+          </p:txBody>
+        </p:sp>
+        <p:sp>
+          <p:nvSpPr>
+            <p:cNvPr id="7" name="TextBox 6">
+              <a:extLst>
+                <a:ext uri="{FF2B5EF4-FFF2-40B4-BE49-F238E27FC236}">
+                  <a16:creationId xmlns:a16="http://schemas.microsoft.com/office/drawing/2014/main" id="{DE977A9C-61D7-2A77-ABD2-6B89201B9AED}"/>
+                </a:ext>
+              </a:extLst>
+            </p:cNvPr>
+            <p:cNvSpPr txBox="1"/>
+            <p:nvPr/>
+          </p:nvSpPr>
+          <p:spPr>
+            <a:xfrm>
+              <a:off x="4404946" y="3026182"/>
+              <a:ext cx="7787054" cy="1754326"/>
+            </a:xfrm>
+            <a:prstGeom prst="rect">
+              <a:avLst/>
+            </a:prstGeom>
+            <a:noFill/>
+          </p:spPr>
+          <p:txBody>
+            <a:bodyPr wrap="square" rtlCol="0">
+              <a:spAutoFit/>
+            </a:bodyPr>
+            <a:lstStyle/>
+            <a:p>
+              <a:r>
+                <a:rPr lang="en-US" sz="2800" b="1" dirty="0">
+                  <a:solidFill>
+                    <a:srgbClr val="283C95"/>
+                  </a:solidFill>
+                  <a:latin typeface="+mj-lt"/>
+                </a:rPr>
+                <a:t>Interpretation</a:t>
+              </a:r>
+              <a:r>
+                <a:rPr lang="en-US" sz="2400" b="0" i="0" dirty="0">
+                  <a:solidFill>
+                    <a:srgbClr val="F8FAFF"/>
+                  </a:solidFill>
+                  <a:effectLst/>
+                  <a:latin typeface="Inter"/>
+                </a:rPr>
+                <a:t>:</a:t>
+              </a:r>
+            </a:p>
+            <a:p>
+              <a:pPr marL="342900" indent="-342900" algn="l">
+                <a:buFont typeface="Arial" panose="020B0604020202020204" pitchFamily="34" charset="0"/>
+                <a:buChar char="•"/>
+              </a:pPr>
+              <a:r>
+                <a:rPr lang="en-US" sz="2000" b="1" dirty="0"/>
+                <a:t>The average error between predicted and actual sales is ~241 units.</a:t>
+              </a:r>
+            </a:p>
+            <a:p>
+              <a:pPr marL="342900" indent="-342900" algn="l">
+                <a:buFont typeface="Arial" panose="020B0604020202020204" pitchFamily="34" charset="0"/>
+                <a:buChar char="•"/>
+              </a:pPr>
+              <a:r>
+                <a:rPr lang="en-US" sz="2000" b="1" dirty="0"/>
+                <a:t>A relatively high RMSLE (1.55) suggests the model struggles more with larger sales values.</a:t>
+              </a:r>
+            </a:p>
+          </p:txBody>
+        </p:sp>
+      </p:grpSp>
+      <p:sp>
+        <p:nvSpPr>
+          <p:cNvPr id="21" name="Rectangle 20">
+            <a:extLst>
+              <a:ext uri="{FF2B5EF4-FFF2-40B4-BE49-F238E27FC236}">
+                <a16:creationId xmlns:a16="http://schemas.microsoft.com/office/drawing/2014/main" id="{B928E12D-E937-7807-483E-E77C6DC185C5}"/>
+              </a:ext>
+            </a:extLst>
+          </p:cNvPr>
+          <p:cNvSpPr/>
+          <p:nvPr/>
+        </p:nvSpPr>
+        <p:spPr>
+          <a:xfrm rot="20111035">
+            <a:off x="7892328" y="-5103822"/>
+            <a:ext cx="5097767" cy="5189901"/>
+          </a:xfrm>
+          <a:prstGeom prst="rect">
+            <a:avLst/>
+          </a:prstGeom>
+          <a:noFill/>
+          <a:ln>
+            <a:solidFill>
+              <a:srgbClr val="283C95"/>
+            </a:solidFill>
+          </a:ln>
+        </p:spPr>
+        <p:style>
+          <a:lnRef idx="2">
+            <a:schemeClr val="accent1">
+              <a:shade val="15000"/>
+            </a:schemeClr>
+          </a:lnRef>
+          <a:fillRef idx="1">
+            <a:schemeClr val="accent1"/>
+          </a:fillRef>
+          <a:effectRef idx="0">
+            <a:schemeClr val="accent1"/>
+          </a:effectRef>
+          <a:fontRef idx="minor">
+            <a:schemeClr val="lt1"/>
+          </a:fontRef>
+        </p:style>
+        <p:txBody>
+          <a:bodyPr rtlCol="0" anchor="ctr"/>
+          <a:lstStyle/>
+          <a:p>
+            <a:pPr algn="ctr"/>
+            <a:endParaRPr lang="en-US"/>
+          </a:p>
+        </p:txBody>
+      </p:sp>
+      <p:sp>
+        <p:nvSpPr>
+          <p:cNvPr id="22" name="Rectangle 21">
+            <a:extLst>
+              <a:ext uri="{FF2B5EF4-FFF2-40B4-BE49-F238E27FC236}">
+                <a16:creationId xmlns:a16="http://schemas.microsoft.com/office/drawing/2014/main" id="{3D0E37AC-A444-1850-D78F-20CA7220FB80}"/>
+              </a:ext>
+            </a:extLst>
+          </p:cNvPr>
+          <p:cNvSpPr/>
+          <p:nvPr/>
+        </p:nvSpPr>
+        <p:spPr>
+          <a:xfrm rot="20111035">
+            <a:off x="8474283" y="-5103822"/>
+            <a:ext cx="5097767" cy="5189901"/>
+          </a:xfrm>
+          <a:prstGeom prst="rect">
+            <a:avLst/>
+          </a:prstGeom>
+          <a:noFill/>
+          <a:ln>
+            <a:solidFill>
+              <a:srgbClr val="283C95"/>
+            </a:solidFill>
+          </a:ln>
+        </p:spPr>
+        <p:style>
+          <a:lnRef idx="2">
+            <a:schemeClr val="accent1">
+              <a:shade val="15000"/>
+            </a:schemeClr>
+          </a:lnRef>
+          <a:fillRef idx="1">
+            <a:schemeClr val="accent1"/>
+          </a:fillRef>
+          <a:effectRef idx="0">
+            <a:schemeClr val="accent1"/>
+          </a:effectRef>
+          <a:fontRef idx="minor">
+            <a:schemeClr val="lt1"/>
+          </a:fontRef>
+        </p:style>
+        <p:txBody>
+          <a:bodyPr rtlCol="0" anchor="ctr"/>
+          <a:lstStyle/>
+          <a:p>
+            <a:pPr algn="ctr"/>
+            <a:endParaRPr lang="en-US" dirty="0"/>
+          </a:p>
+        </p:txBody>
+      </p:sp>
+      <p:sp>
+        <p:nvSpPr>
+          <p:cNvPr id="23" name="Rectangle 22">
+            <a:extLst>
+              <a:ext uri="{FF2B5EF4-FFF2-40B4-BE49-F238E27FC236}">
+                <a16:creationId xmlns:a16="http://schemas.microsoft.com/office/drawing/2014/main" id="{5AC1DD0E-7429-7D1F-7E14-E583E54454AF}"/>
+              </a:ext>
+            </a:extLst>
+          </p:cNvPr>
+          <p:cNvSpPr/>
+          <p:nvPr/>
+        </p:nvSpPr>
+        <p:spPr>
+          <a:xfrm rot="20111035">
+            <a:off x="9056238" y="-5103822"/>
+            <a:ext cx="5097767" cy="5189901"/>
+          </a:xfrm>
+          <a:prstGeom prst="rect">
+            <a:avLst/>
+          </a:prstGeom>
+          <a:noFill/>
+          <a:ln>
+            <a:solidFill>
+              <a:srgbClr val="283C95"/>
+            </a:solidFill>
+          </a:ln>
+        </p:spPr>
+        <p:style>
+          <a:lnRef idx="2">
+            <a:schemeClr val="accent1">
+              <a:shade val="15000"/>
+            </a:schemeClr>
+          </a:lnRef>
+          <a:fillRef idx="1">
+            <a:schemeClr val="accent1"/>
+          </a:fillRef>
+          <a:effectRef idx="0">
+            <a:schemeClr val="accent1"/>
+          </a:effectRef>
+          <a:fontRef idx="minor">
+            <a:schemeClr val="lt1"/>
+          </a:fontRef>
+        </p:style>
+        <p:txBody>
+          <a:bodyPr rtlCol="0" anchor="ctr"/>
+          <a:lstStyle/>
+          <a:p>
+            <a:pPr algn="ctr"/>
+            <a:endParaRPr lang="en-US" dirty="0"/>
+          </a:p>
+        </p:txBody>
+      </p:sp>
+      <p:graphicFrame>
+        <p:nvGraphicFramePr>
+          <p:cNvPr id="4" name="Table 3">
+            <a:extLst>
+              <a:ext uri="{FF2B5EF4-FFF2-40B4-BE49-F238E27FC236}">
+                <a16:creationId xmlns:a16="http://schemas.microsoft.com/office/drawing/2014/main" id="{6D195C89-9CA6-DA09-C02C-43AD14C85A37}"/>
+              </a:ext>
+            </a:extLst>
+          </p:cNvPr>
+          <p:cNvGraphicFramePr>
+            <a:graphicFrameLocks noGrp="1"/>
+          </p:cNvGraphicFramePr>
+          <p:nvPr>
+            <p:extLst>
+              <p:ext uri="{D42A27DB-BD31-4B8C-83A1-F6EECF244321}">
+                <p14:modId xmlns:p14="http://schemas.microsoft.com/office/powerpoint/2010/main" val="1237895849"/>
+              </p:ext>
+            </p:extLst>
+          </p:nvPr>
+        </p:nvGraphicFramePr>
+        <p:xfrm>
+          <a:off x="7889600" y="2101517"/>
+          <a:ext cx="3881486" cy="3104945"/>
+        </p:xfrm>
+        <a:graphic>
+          <a:graphicData uri="http://schemas.openxmlformats.org/drawingml/2006/table">
+            <a:tbl>
+              <a:tblPr firstRow="1" bandRow="1">
+                <a:tableStyleId>{5C22544A-7EE6-4342-B048-85BDC9FD1C3A}</a:tableStyleId>
+              </a:tblPr>
+              <a:tblGrid>
+                <a:gridCol w="1940743">
+                  <a:extLst>
+                    <a:ext uri="{9D8B030D-6E8A-4147-A177-3AD203B41FA5}">
+                      <a16:colId xmlns:a16="http://schemas.microsoft.com/office/drawing/2014/main" val="4078473568"/>
+                    </a:ext>
+                  </a:extLst>
+                </a:gridCol>
+                <a:gridCol w="1940743">
+                  <a:extLst>
+                    <a:ext uri="{9D8B030D-6E8A-4147-A177-3AD203B41FA5}">
+                      <a16:colId xmlns:a16="http://schemas.microsoft.com/office/drawing/2014/main" val="4078701055"/>
+                    </a:ext>
+                  </a:extLst>
+                </a:gridCol>
+              </a:tblGrid>
+              <a:tr h="620989">
+                <a:tc gridSpan="2">
+                  <a:txBody>
+                    <a:bodyPr/>
+                    <a:lstStyle/>
+                    <a:p>
+                      <a:pPr algn="ctr"/>
+                      <a:r>
+                        <a:rPr lang="en-US" sz="2500" dirty="0"/>
+                        <a:t>Performance Metrics</a:t>
+                      </a:r>
+                    </a:p>
+                  </a:txBody>
+                  <a:tcPr anchor="ctr"/>
+                </a:tc>
+                <a:tc hMerge="1">
+                  <a:txBody>
+                    <a:bodyPr/>
+                    <a:lstStyle/>
+                    <a:p>
+                      <a:endParaRPr lang="en-US" dirty="0"/>
+                    </a:p>
+                  </a:txBody>
+                  <a:tcPr/>
+                </a:tc>
+                <a:extLst>
+                  <a:ext uri="{0D108BD9-81ED-4DB2-BD59-A6C34878D82A}">
+                    <a16:rowId xmlns:a16="http://schemas.microsoft.com/office/drawing/2014/main" val="2919094624"/>
+                  </a:ext>
+                </a:extLst>
+              </a:tr>
+              <a:tr h="620989">
+                <a:tc>
+                  <a:txBody>
+                    <a:bodyPr/>
+                    <a:lstStyle/>
+                    <a:p>
+                      <a:pPr algn="ctr"/>
+                      <a:r>
+                        <a:rPr lang="en-US" b="1" dirty="0"/>
+                        <a:t>RMSLE</a:t>
+                      </a:r>
+                    </a:p>
+                  </a:txBody>
+                  <a:tcPr anchor="ctr"/>
+                </a:tc>
+                <a:tc>
+                  <a:txBody>
+                    <a:bodyPr/>
+                    <a:lstStyle/>
+                    <a:p>
+                      <a:pPr algn="ctr"/>
+                      <a:r>
+                        <a:rPr lang="en-US" b="1" dirty="0"/>
+                        <a:t>1.55</a:t>
+                      </a:r>
+                    </a:p>
+                  </a:txBody>
+                  <a:tcPr anchor="ctr"/>
+                </a:tc>
+                <a:extLst>
+                  <a:ext uri="{0D108BD9-81ED-4DB2-BD59-A6C34878D82A}">
+                    <a16:rowId xmlns:a16="http://schemas.microsoft.com/office/drawing/2014/main" val="23947187"/>
+                  </a:ext>
+                </a:extLst>
+              </a:tr>
+              <a:tr h="620989">
+                <a:tc>
+                  <a:txBody>
+                    <a:bodyPr/>
+                    <a:lstStyle/>
+                    <a:p>
+                      <a:pPr algn="ctr"/>
+                      <a:r>
+                        <a:rPr lang="en-US" b="1" dirty="0"/>
+                        <a:t>RMSE</a:t>
+                      </a:r>
+                    </a:p>
+                  </a:txBody>
+                  <a:tcPr anchor="ctr"/>
+                </a:tc>
+                <a:tc>
+                  <a:txBody>
+                    <a:bodyPr/>
+                    <a:lstStyle/>
+                    <a:p>
+                      <a:pPr algn="ctr"/>
+                      <a:r>
+                        <a:rPr lang="en-US" b="1" dirty="0"/>
+                        <a:t>740.92</a:t>
+                      </a:r>
+                    </a:p>
+                  </a:txBody>
+                  <a:tcPr anchor="ctr"/>
+                </a:tc>
+                <a:extLst>
+                  <a:ext uri="{0D108BD9-81ED-4DB2-BD59-A6C34878D82A}">
+                    <a16:rowId xmlns:a16="http://schemas.microsoft.com/office/drawing/2014/main" val="2137564356"/>
+                  </a:ext>
+                </a:extLst>
+              </a:tr>
+              <a:tr h="620989">
+                <a:tc>
+                  <a:txBody>
+                    <a:bodyPr/>
+                    <a:lstStyle/>
+                    <a:p>
+                      <a:pPr algn="ctr"/>
+                      <a:r>
+                        <a:rPr lang="en-US" b="1" dirty="0"/>
+                        <a:t>MSE</a:t>
+                      </a:r>
+                    </a:p>
+                  </a:txBody>
+                  <a:tcPr anchor="ctr"/>
+                </a:tc>
+                <a:tc>
+                  <a:txBody>
+                    <a:bodyPr/>
+                    <a:lstStyle/>
+                    <a:p>
+                      <a:pPr algn="ctr"/>
+                      <a:r>
+                        <a:rPr lang="en-US" b="1" dirty="0"/>
+                        <a:t>548960.22</a:t>
+                      </a:r>
+                    </a:p>
+                  </a:txBody>
+                  <a:tcPr anchor="ctr"/>
+                </a:tc>
+                <a:extLst>
+                  <a:ext uri="{0D108BD9-81ED-4DB2-BD59-A6C34878D82A}">
+                    <a16:rowId xmlns:a16="http://schemas.microsoft.com/office/drawing/2014/main" val="1878555358"/>
+                  </a:ext>
+                </a:extLst>
+              </a:tr>
+              <a:tr h="620989">
+                <a:tc>
+                  <a:txBody>
+                    <a:bodyPr/>
+                    <a:lstStyle/>
+                    <a:p>
+                      <a:pPr algn="ctr"/>
+                      <a:r>
+                        <a:rPr lang="en-US" b="1" dirty="0"/>
+                        <a:t>MAE</a:t>
+                      </a:r>
+                    </a:p>
+                  </a:txBody>
+                  <a:tcPr anchor="ctr"/>
+                </a:tc>
+                <a:tc>
+                  <a:txBody>
+                    <a:bodyPr/>
+                    <a:lstStyle/>
+                    <a:p>
+                      <a:pPr algn="ctr"/>
+                      <a:r>
+                        <a:rPr lang="en-US" b="1" dirty="0"/>
+                        <a:t>240.86</a:t>
+                      </a:r>
+                    </a:p>
+                  </a:txBody>
+                  <a:tcPr anchor="ctr"/>
+                </a:tc>
+                <a:extLst>
+                  <a:ext uri="{0D108BD9-81ED-4DB2-BD59-A6C34878D82A}">
+                    <a16:rowId xmlns:a16="http://schemas.microsoft.com/office/drawing/2014/main" val="3709831111"/>
+                  </a:ext>
+                </a:extLst>
+              </a:tr>
+            </a:tbl>
+          </a:graphicData>
+        </a:graphic>
+      </p:graphicFrame>
+      <p:sp>
+        <p:nvSpPr>
+          <p:cNvPr id="9" name="Rectangle 8">
+            <a:extLst>
+              <a:ext uri="{FF2B5EF4-FFF2-40B4-BE49-F238E27FC236}">
+                <a16:creationId xmlns:a16="http://schemas.microsoft.com/office/drawing/2014/main" id="{D7F4E979-5EFD-DFA3-73FC-853A4CCCD062}"/>
+              </a:ext>
+            </a:extLst>
+          </p:cNvPr>
+          <p:cNvSpPr/>
+          <p:nvPr/>
+        </p:nvSpPr>
+        <p:spPr>
+          <a:xfrm rot="20111035">
+            <a:off x="6590704" y="6854592"/>
+            <a:ext cx="5097767" cy="5189901"/>
+          </a:xfrm>
+          <a:prstGeom prst="rect">
+            <a:avLst/>
+          </a:prstGeom>
+          <a:noFill/>
+          <a:ln>
+            <a:solidFill>
+              <a:srgbClr val="283C95"/>
+            </a:solidFill>
+          </a:ln>
+        </p:spPr>
+        <p:style>
+          <a:lnRef idx="2">
+            <a:schemeClr val="accent1">
+              <a:shade val="15000"/>
+            </a:schemeClr>
+          </a:lnRef>
+          <a:fillRef idx="1">
+            <a:schemeClr val="accent1"/>
+          </a:fillRef>
+          <a:effectRef idx="0">
+            <a:schemeClr val="accent1"/>
+          </a:effectRef>
+          <a:fontRef idx="minor">
+            <a:schemeClr val="lt1"/>
+          </a:fontRef>
+        </p:style>
+        <p:txBody>
+          <a:bodyPr rtlCol="0" anchor="ctr"/>
+          <a:lstStyle/>
+          <a:p>
+            <a:pPr algn="ctr"/>
+            <a:endParaRPr lang="en-US"/>
+          </a:p>
+        </p:txBody>
+      </p:sp>
+      <p:sp>
+        <p:nvSpPr>
+          <p:cNvPr id="10" name="Rectangle 9">
+            <a:extLst>
+              <a:ext uri="{FF2B5EF4-FFF2-40B4-BE49-F238E27FC236}">
+                <a16:creationId xmlns:a16="http://schemas.microsoft.com/office/drawing/2014/main" id="{745A8E04-AB53-B24C-B32A-33C2ADDC8048}"/>
+              </a:ext>
+            </a:extLst>
+          </p:cNvPr>
+          <p:cNvSpPr/>
+          <p:nvPr/>
+        </p:nvSpPr>
+        <p:spPr>
+          <a:xfrm rot="20111035">
+            <a:off x="7172659" y="6854592"/>
+            <a:ext cx="5097767" cy="5189901"/>
+          </a:xfrm>
+          <a:prstGeom prst="rect">
+            <a:avLst/>
+          </a:prstGeom>
+          <a:noFill/>
+          <a:ln>
+            <a:solidFill>
+              <a:srgbClr val="283C95"/>
+            </a:solidFill>
+          </a:ln>
+        </p:spPr>
+        <p:style>
+          <a:lnRef idx="2">
+            <a:schemeClr val="accent1">
+              <a:shade val="15000"/>
+            </a:schemeClr>
+          </a:lnRef>
+          <a:fillRef idx="1">
+            <a:schemeClr val="accent1"/>
+          </a:fillRef>
+          <a:effectRef idx="0">
+            <a:schemeClr val="accent1"/>
+          </a:effectRef>
+          <a:fontRef idx="minor">
+            <a:schemeClr val="lt1"/>
+          </a:fontRef>
+        </p:style>
+        <p:txBody>
+          <a:bodyPr rtlCol="0" anchor="ctr"/>
+          <a:lstStyle/>
+          <a:p>
+            <a:pPr algn="ctr"/>
+            <a:endParaRPr lang="en-US" dirty="0"/>
+          </a:p>
+        </p:txBody>
+      </p:sp>
+      <p:sp>
+        <p:nvSpPr>
+          <p:cNvPr id="12" name="Rectangle 11">
+            <a:extLst>
+              <a:ext uri="{FF2B5EF4-FFF2-40B4-BE49-F238E27FC236}">
+                <a16:creationId xmlns:a16="http://schemas.microsoft.com/office/drawing/2014/main" id="{E0E755BB-923D-B77A-4421-C87F47FDAE1A}"/>
+              </a:ext>
+            </a:extLst>
+          </p:cNvPr>
+          <p:cNvSpPr/>
+          <p:nvPr/>
+        </p:nvSpPr>
+        <p:spPr>
+          <a:xfrm rot="20111035">
+            <a:off x="7754614" y="6854592"/>
+            <a:ext cx="5097767" cy="5189901"/>
+          </a:xfrm>
+          <a:prstGeom prst="rect">
+            <a:avLst/>
+          </a:prstGeom>
+          <a:noFill/>
+          <a:ln>
+            <a:solidFill>
+              <a:srgbClr val="283C95"/>
+            </a:solidFill>
+          </a:ln>
+        </p:spPr>
+        <p:style>
+          <a:lnRef idx="2">
+            <a:schemeClr val="accent1">
+              <a:shade val="15000"/>
+            </a:schemeClr>
+          </a:lnRef>
+          <a:fillRef idx="1">
+            <a:schemeClr val="accent1"/>
+          </a:fillRef>
+          <a:effectRef idx="0">
+            <a:schemeClr val="accent1"/>
+          </a:effectRef>
+          <a:fontRef idx="minor">
+            <a:schemeClr val="lt1"/>
+          </a:fontRef>
+        </p:style>
+        <p:txBody>
+          <a:bodyPr rtlCol="0" anchor="ctr"/>
+          <a:lstStyle/>
+          <a:p>
+            <a:pPr algn="ctr"/>
+            <a:endParaRPr lang="en-US" dirty="0"/>
+          </a:p>
+        </p:txBody>
+      </p:sp>
+    </p:spTree>
+    <p:extLst>
+      <p:ext uri="{BB962C8B-B14F-4D97-AF65-F5344CB8AC3E}">
+        <p14:creationId xmlns:p14="http://schemas.microsoft.com/office/powerpoint/2010/main" val="2767684695"/>
+      </p:ext>
+    </p:extLst>
+  </p:cSld>
+  <p:clrMapOvr>
+    <a:masterClrMapping/>
+  </p:clrMapOvr>
+  <mc:AlternateContent xmlns:mc="http://schemas.openxmlformats.org/markup-compatibility/2006">
+    <mc:Choice xmlns:p159="http://schemas.microsoft.com/office/powerpoint/2015/09/main" Requires="p159">
+      <p:transition spd="slow">
+        <p159:morph option="byObject"/>
+      </p:transition>
+    </mc:Choice>
+    <mc:Fallback>
+      <p:transition spd="slow">
+        <p:fade/>
+      </p:transition>
+    </mc:Fallback>
+  </mc:AlternateContent>
+</p:sld>
+</file>
+
+<file path=ppt/slides/slide23.xml><?xml version="1.0" encoding="utf-8"?>
+<p:sld xmlns:a="http://schemas.openxmlformats.org/drawingml/2006/main" xmlns:r="http://schemas.openxmlformats.org/officeDocument/2006/relationships" xmlns:p="http://schemas.openxmlformats.org/presentationml/2006/main">
+  <p:cSld>
+    <p:spTree>
+      <p:nvGrpSpPr>
+        <p:cNvPr id="1" name="">
+          <a:extLst>
+            <a:ext uri="{FF2B5EF4-FFF2-40B4-BE49-F238E27FC236}">
+              <a16:creationId xmlns:a16="http://schemas.microsoft.com/office/drawing/2014/main" id="{03E0F9A5-70E2-F0B9-6C41-77607D0F751B}"/>
+            </a:ext>
+          </a:extLst>
+        </p:cNvPr>
+        <p:cNvGrpSpPr/>
+        <p:nvPr/>
+      </p:nvGrpSpPr>
+      <p:grpSpPr>
+        <a:xfrm>
+          <a:off x="0" y="0"/>
+          <a:ext cx="0" cy="0"/>
+          <a:chOff x="0" y="0"/>
+          <a:chExt cx="0" cy="0"/>
+        </a:xfrm>
+      </p:grpSpPr>
+      <p:sp>
+        <p:nvSpPr>
+          <p:cNvPr id="2" name="Title 1">
+            <a:extLst>
+              <a:ext uri="{FF2B5EF4-FFF2-40B4-BE49-F238E27FC236}">
+                <a16:creationId xmlns:a16="http://schemas.microsoft.com/office/drawing/2014/main" id="{C8527E2F-421D-E8D8-9486-5333D050592E}"/>
+              </a:ext>
+            </a:extLst>
+          </p:cNvPr>
+          <p:cNvSpPr>
+            <a:spLocks noGrp="1"/>
+          </p:cNvSpPr>
+          <p:nvPr>
+            <p:ph type="title"/>
+          </p:nvPr>
+        </p:nvSpPr>
+        <p:spPr>
+          <a:xfrm>
+            <a:off x="90194" y="53240"/>
+            <a:ext cx="10802395" cy="1325563"/>
+          </a:xfrm>
+        </p:spPr>
+        <p:txBody>
+          <a:bodyPr>
+            <a:normAutofit/>
+          </a:bodyPr>
+          <a:lstStyle/>
+          <a:p>
+            <a:r>
+              <a:rPr lang="en-US" sz="4400" dirty="0">
+                <a:solidFill>
+                  <a:srgbClr val="283C95"/>
+                </a:solidFill>
+                <a:latin typeface="Aptos ExtraBold" panose="020B0004020202020204" pitchFamily="34" charset="0"/>
+              </a:rPr>
+              <a:t>05 Modeling : </a:t>
+            </a:r>
+            <a:r>
+              <a:rPr lang="en-US" dirty="0">
+                <a:solidFill>
+                  <a:srgbClr val="283C95"/>
+                </a:solidFill>
+                <a:latin typeface="Aptos ExtraBold" panose="020B0004020202020204" pitchFamily="34" charset="0"/>
+              </a:rPr>
+              <a:t>Decision Tree Regressor</a:t>
+            </a:r>
+          </a:p>
+        </p:txBody>
+      </p:sp>
+      <p:sp>
+        <p:nvSpPr>
+          <p:cNvPr id="3" name="Title 1">
+            <a:extLst>
+              <a:ext uri="{FF2B5EF4-FFF2-40B4-BE49-F238E27FC236}">
+                <a16:creationId xmlns:a16="http://schemas.microsoft.com/office/drawing/2014/main" id="{B57E2B10-B756-18F2-FEA8-DC7ADBD2AB05}"/>
+              </a:ext>
+            </a:extLst>
+          </p:cNvPr>
+          <p:cNvSpPr txBox="1">
+            <a:spLocks/>
+          </p:cNvSpPr>
+          <p:nvPr/>
+        </p:nvSpPr>
+        <p:spPr>
+          <a:xfrm>
+            <a:off x="838200" y="344853"/>
+            <a:ext cx="10515600" cy="1325563"/>
+          </a:xfrm>
+          <a:prstGeom prst="rect">
+            <a:avLst/>
+          </a:prstGeom>
+        </p:spPr>
+        <p:txBody>
+          <a:bodyPr vert="horz" lIns="91440" tIns="45720" rIns="91440" bIns="45720" rtlCol="0" anchor="ctr">
+            <a:normAutofit/>
+          </a:bodyPr>
+          <a:lstStyle>
+            <a:lvl1pPr algn="l" defTabSz="914400" rtl="0" eaLnBrk="1" latinLnBrk="0" hangingPunct="1">
+              <a:lnSpc>
+                <a:spcPct val="90000"/>
+              </a:lnSpc>
+              <a:spcBef>
+                <a:spcPct val="0"/>
+              </a:spcBef>
+              <a:buNone/>
+              <a:defRPr sz="4400" kern="1200">
+                <a:solidFill>
+                  <a:schemeClr val="tx1"/>
+                </a:solidFill>
+                <a:latin typeface="+mj-lt"/>
+                <a:ea typeface="+mj-ea"/>
+                <a:cs typeface="+mj-cs"/>
+              </a:defRPr>
+            </a:lvl1pPr>
+          </a:lstStyle>
+          <a:p>
+            <a:endParaRPr lang="en-US" dirty="0">
+              <a:solidFill>
+                <a:srgbClr val="283C95"/>
+              </a:solidFill>
+              <a:latin typeface="Aptos ExtraBold" panose="020B0004020202020204" pitchFamily="34" charset="0"/>
+            </a:endParaRPr>
+          </a:p>
+        </p:txBody>
+      </p:sp>
+      <p:grpSp>
+        <p:nvGrpSpPr>
+          <p:cNvPr id="8" name="Group 7">
+            <a:extLst>
+              <a:ext uri="{FF2B5EF4-FFF2-40B4-BE49-F238E27FC236}">
+                <a16:creationId xmlns:a16="http://schemas.microsoft.com/office/drawing/2014/main" id="{9BC98AE5-8768-1436-61B7-FAC4F170DE01}"/>
+              </a:ext>
+            </a:extLst>
+          </p:cNvPr>
+          <p:cNvGrpSpPr/>
+          <p:nvPr/>
+        </p:nvGrpSpPr>
+        <p:grpSpPr>
+          <a:xfrm>
+            <a:off x="428776" y="1651539"/>
+            <a:ext cx="7463940" cy="3853473"/>
+            <a:chOff x="4404946" y="3026182"/>
+            <a:chExt cx="7787054" cy="3853473"/>
+          </a:xfrm>
+        </p:grpSpPr>
+        <p:sp>
+          <p:nvSpPr>
+            <p:cNvPr id="6" name="TextBox 5">
+              <a:extLst>
+                <a:ext uri="{FF2B5EF4-FFF2-40B4-BE49-F238E27FC236}">
+                  <a16:creationId xmlns:a16="http://schemas.microsoft.com/office/drawing/2014/main" id="{E7D49B51-659C-6C15-88F5-EB8CCC49DA71}"/>
+                </a:ext>
+              </a:extLst>
+            </p:cNvPr>
+            <p:cNvSpPr txBox="1"/>
+            <p:nvPr/>
+          </p:nvSpPr>
+          <p:spPr>
+            <a:xfrm>
+              <a:off x="4404946" y="5433105"/>
+              <a:ext cx="6805275" cy="1446550"/>
+            </a:xfrm>
+            <a:prstGeom prst="rect">
+              <a:avLst/>
+            </a:prstGeom>
+            <a:noFill/>
+          </p:spPr>
+          <p:txBody>
+            <a:bodyPr wrap="square" rtlCol="0">
+              <a:spAutoFit/>
+            </a:bodyPr>
+            <a:lstStyle/>
+            <a:p>
+              <a:r>
+                <a:rPr lang="en-US" sz="2800" b="1" i="0" dirty="0">
+                  <a:solidFill>
+                    <a:srgbClr val="283C95"/>
+                  </a:solidFill>
+                  <a:effectLst/>
+                  <a:latin typeface="+mj-lt"/>
+                </a:rPr>
+                <a:t>Conclusion</a:t>
+              </a:r>
+            </a:p>
+            <a:p>
+              <a:r>
+                <a:rPr lang="en-US" sz="2000" b="1" dirty="0"/>
+                <a:t>The Decision Tree didn’t outperform Linear Regression, indicating a need for either better tuning or an ensemble method like Random Forest.</a:t>
+              </a:r>
+            </a:p>
+          </p:txBody>
+        </p:sp>
+        <p:sp>
+          <p:nvSpPr>
+            <p:cNvPr id="7" name="TextBox 6">
+              <a:extLst>
+                <a:ext uri="{FF2B5EF4-FFF2-40B4-BE49-F238E27FC236}">
+                  <a16:creationId xmlns:a16="http://schemas.microsoft.com/office/drawing/2014/main" id="{C9972FDC-E54F-D440-05CF-48DF18B5237C}"/>
+                </a:ext>
+              </a:extLst>
+            </p:cNvPr>
+            <p:cNvSpPr txBox="1"/>
+            <p:nvPr/>
+          </p:nvSpPr>
+          <p:spPr>
+            <a:xfrm>
+              <a:off x="4404946" y="3026182"/>
+              <a:ext cx="7787054" cy="2062103"/>
+            </a:xfrm>
+            <a:prstGeom prst="rect">
+              <a:avLst/>
+            </a:prstGeom>
+            <a:noFill/>
+          </p:spPr>
+          <p:txBody>
+            <a:bodyPr wrap="square" rtlCol="0">
+              <a:spAutoFit/>
+            </a:bodyPr>
+            <a:lstStyle/>
+            <a:p>
+              <a:r>
+                <a:rPr lang="en-US" sz="2800" b="1" dirty="0">
+                  <a:solidFill>
+                    <a:srgbClr val="283C95"/>
+                  </a:solidFill>
+                  <a:latin typeface="+mj-lt"/>
+                </a:rPr>
+                <a:t>Interpretation</a:t>
+              </a:r>
+              <a:r>
+                <a:rPr lang="en-US" sz="2400" b="0" i="0" dirty="0">
+                  <a:solidFill>
+                    <a:srgbClr val="F8FAFF"/>
+                  </a:solidFill>
+                  <a:effectLst/>
+                  <a:latin typeface="Inter"/>
+                </a:rPr>
+                <a:t>:</a:t>
+              </a:r>
+            </a:p>
+            <a:p>
+              <a:pPr marL="342900" indent="-342900" algn="l">
+                <a:buFont typeface="Arial" panose="020B0604020202020204" pitchFamily="34" charset="0"/>
+                <a:buChar char="•"/>
+              </a:pPr>
+              <a:r>
+                <a:rPr lang="en-US" sz="2000" b="1" dirty="0"/>
+                <a:t>The MAE increased to ~326 units compared to Linear Regression's 240.</a:t>
+              </a:r>
+              <a:endParaRPr lang="ar-EG" sz="2000" b="1" dirty="0"/>
+            </a:p>
+            <a:p>
+              <a:pPr algn="l"/>
+              <a:endParaRPr lang="ar-EG" sz="2000" b="1" dirty="0"/>
+            </a:p>
+            <a:p>
+              <a:pPr marL="342900" indent="-342900" algn="l">
+                <a:buFont typeface="Arial" panose="020B0604020202020204" pitchFamily="34" charset="0"/>
+                <a:buChar char="•"/>
+              </a:pPr>
+              <a:r>
+                <a:rPr lang="en-US" sz="2000" b="1" dirty="0"/>
+                <a:t>RMSLE (1.63) is higher than Linear Regression → worse at handling larger sales values.</a:t>
+              </a:r>
+            </a:p>
+          </p:txBody>
+        </p:sp>
+      </p:grpSp>
+      <p:graphicFrame>
+        <p:nvGraphicFramePr>
+          <p:cNvPr id="4" name="Table 3">
+            <a:extLst>
+              <a:ext uri="{FF2B5EF4-FFF2-40B4-BE49-F238E27FC236}">
+                <a16:creationId xmlns:a16="http://schemas.microsoft.com/office/drawing/2014/main" id="{0C7279A1-5190-8F4E-411A-52693F994DCA}"/>
+              </a:ext>
+            </a:extLst>
+          </p:cNvPr>
+          <p:cNvGraphicFramePr>
+            <a:graphicFrameLocks noGrp="1"/>
+          </p:cNvGraphicFramePr>
+          <p:nvPr>
+            <p:extLst>
+              <p:ext uri="{D42A27DB-BD31-4B8C-83A1-F6EECF244321}">
+                <p14:modId xmlns:p14="http://schemas.microsoft.com/office/powerpoint/2010/main" val="791544672"/>
+              </p:ext>
+            </p:extLst>
+          </p:nvPr>
+        </p:nvGraphicFramePr>
+        <p:xfrm>
+          <a:off x="7889600" y="2101517"/>
+          <a:ext cx="3881486" cy="3104945"/>
+        </p:xfrm>
+        <a:graphic>
+          <a:graphicData uri="http://schemas.openxmlformats.org/drawingml/2006/table">
+            <a:tbl>
+              <a:tblPr firstRow="1" bandRow="1">
+                <a:tableStyleId>{5C22544A-7EE6-4342-B048-85BDC9FD1C3A}</a:tableStyleId>
+              </a:tblPr>
+              <a:tblGrid>
+                <a:gridCol w="1940743">
+                  <a:extLst>
+                    <a:ext uri="{9D8B030D-6E8A-4147-A177-3AD203B41FA5}">
+                      <a16:colId xmlns:a16="http://schemas.microsoft.com/office/drawing/2014/main" val="4078473568"/>
+                    </a:ext>
+                  </a:extLst>
+                </a:gridCol>
+                <a:gridCol w="1940743">
+                  <a:extLst>
+                    <a:ext uri="{9D8B030D-6E8A-4147-A177-3AD203B41FA5}">
+                      <a16:colId xmlns:a16="http://schemas.microsoft.com/office/drawing/2014/main" val="4078701055"/>
+                    </a:ext>
+                  </a:extLst>
+                </a:gridCol>
+              </a:tblGrid>
+              <a:tr h="620989">
+                <a:tc gridSpan="2">
+                  <a:txBody>
+                    <a:bodyPr/>
+                    <a:lstStyle/>
+                    <a:p>
+                      <a:pPr algn="ctr"/>
+                      <a:r>
+                        <a:rPr lang="en-US" sz="2500" dirty="0"/>
+                        <a:t>Performance Metrics</a:t>
+                      </a:r>
+                    </a:p>
+                  </a:txBody>
+                  <a:tcPr anchor="ctr"/>
+                </a:tc>
+                <a:tc hMerge="1">
+                  <a:txBody>
+                    <a:bodyPr/>
+                    <a:lstStyle/>
+                    <a:p>
+                      <a:endParaRPr lang="en-US" dirty="0"/>
+                    </a:p>
+                  </a:txBody>
+                  <a:tcPr/>
+                </a:tc>
+                <a:extLst>
+                  <a:ext uri="{0D108BD9-81ED-4DB2-BD59-A6C34878D82A}">
+                    <a16:rowId xmlns:a16="http://schemas.microsoft.com/office/drawing/2014/main" val="2919094624"/>
+                  </a:ext>
+                </a:extLst>
+              </a:tr>
+              <a:tr h="620989">
+                <a:tc>
+                  <a:txBody>
+                    <a:bodyPr/>
+                    <a:lstStyle/>
+                    <a:p>
+                      <a:pPr algn="ctr"/>
+                      <a:r>
+                        <a:rPr lang="en-US" b="1" dirty="0"/>
+                        <a:t>RMSLE</a:t>
+                      </a:r>
+                    </a:p>
+                  </a:txBody>
+                  <a:tcPr anchor="ctr"/>
+                </a:tc>
+                <a:tc>
+                  <a:txBody>
+                    <a:bodyPr/>
+                    <a:lstStyle/>
+                    <a:p>
+                      <a:pPr algn="ctr"/>
+                      <a:r>
+                        <a:rPr lang="ar-EG" b="1" dirty="0"/>
+                        <a:t>1.63</a:t>
+                      </a:r>
+                      <a:endParaRPr lang="en-US" b="1" dirty="0"/>
+                    </a:p>
+                  </a:txBody>
+                  <a:tcPr anchor="ctr"/>
+                </a:tc>
+                <a:extLst>
+                  <a:ext uri="{0D108BD9-81ED-4DB2-BD59-A6C34878D82A}">
+                    <a16:rowId xmlns:a16="http://schemas.microsoft.com/office/drawing/2014/main" val="23947187"/>
+                  </a:ext>
+                </a:extLst>
+              </a:tr>
+              <a:tr h="620989">
+                <a:tc>
+                  <a:txBody>
+                    <a:bodyPr/>
+                    <a:lstStyle/>
+                    <a:p>
+                      <a:pPr algn="ctr"/>
+                      <a:r>
+                        <a:rPr lang="en-US" b="1" dirty="0"/>
+                        <a:t>RMSE</a:t>
+                      </a:r>
+                    </a:p>
+                  </a:txBody>
+                  <a:tcPr anchor="ctr"/>
+                </a:tc>
+                <a:tc>
+                  <a:txBody>
+                    <a:bodyPr/>
+                    <a:lstStyle/>
+                    <a:p>
+                      <a:pPr algn="ctr"/>
+                      <a:r>
+                        <a:rPr lang="ar-EG" b="1" dirty="0"/>
+                        <a:t>1053.69</a:t>
+                      </a:r>
+                      <a:endParaRPr lang="en-US" b="1" dirty="0"/>
+                    </a:p>
+                  </a:txBody>
+                  <a:tcPr anchor="ctr"/>
+                </a:tc>
+                <a:extLst>
+                  <a:ext uri="{0D108BD9-81ED-4DB2-BD59-A6C34878D82A}">
+                    <a16:rowId xmlns:a16="http://schemas.microsoft.com/office/drawing/2014/main" val="2137564356"/>
+                  </a:ext>
+                </a:extLst>
+              </a:tr>
+              <a:tr h="620989">
+                <a:tc>
+                  <a:txBody>
+                    <a:bodyPr/>
+                    <a:lstStyle/>
+                    <a:p>
+                      <a:pPr algn="ctr"/>
+                      <a:r>
+                        <a:rPr lang="en-US" b="1" dirty="0"/>
+                        <a:t>MSE</a:t>
+                      </a:r>
+                    </a:p>
+                  </a:txBody>
+                  <a:tcPr anchor="ctr"/>
+                </a:tc>
+                <a:tc>
+                  <a:txBody>
+                    <a:bodyPr/>
+                    <a:lstStyle/>
+                    <a:p>
+                      <a:pPr algn="ctr"/>
+                      <a:r>
+                        <a:rPr lang="ar-EG" b="1" dirty="0"/>
+                        <a:t>1110271.53</a:t>
+                      </a:r>
+                      <a:endParaRPr lang="en-US" b="1" dirty="0"/>
+                    </a:p>
+                  </a:txBody>
+                  <a:tcPr anchor="ctr"/>
+                </a:tc>
+                <a:extLst>
+                  <a:ext uri="{0D108BD9-81ED-4DB2-BD59-A6C34878D82A}">
+                    <a16:rowId xmlns:a16="http://schemas.microsoft.com/office/drawing/2014/main" val="1878555358"/>
+                  </a:ext>
+                </a:extLst>
+              </a:tr>
+              <a:tr h="620989">
+                <a:tc>
+                  <a:txBody>
+                    <a:bodyPr/>
+                    <a:lstStyle/>
+                    <a:p>
+                      <a:pPr algn="ctr"/>
+                      <a:r>
+                        <a:rPr lang="en-US" b="1" dirty="0"/>
+                        <a:t>MAE</a:t>
+                      </a:r>
+                    </a:p>
+                  </a:txBody>
+                  <a:tcPr anchor="ctr"/>
+                </a:tc>
+                <a:tc>
+                  <a:txBody>
+                    <a:bodyPr/>
+                    <a:lstStyle/>
+                    <a:p>
+                      <a:pPr algn="ctr"/>
+                      <a:r>
+                        <a:rPr lang="ar-EG" b="1" dirty="0"/>
+                        <a:t>326.07</a:t>
+                      </a:r>
+                      <a:endParaRPr lang="en-US" b="1" dirty="0"/>
+                    </a:p>
+                  </a:txBody>
+                  <a:tcPr anchor="ctr"/>
+                </a:tc>
+                <a:extLst>
+                  <a:ext uri="{0D108BD9-81ED-4DB2-BD59-A6C34878D82A}">
+                    <a16:rowId xmlns:a16="http://schemas.microsoft.com/office/drawing/2014/main" val="3709831111"/>
+                  </a:ext>
+                </a:extLst>
+              </a:tr>
+            </a:tbl>
+          </a:graphicData>
+        </a:graphic>
+      </p:graphicFrame>
+      <p:sp>
+        <p:nvSpPr>
+          <p:cNvPr id="5" name="Rectangle 4">
+            <a:extLst>
+              <a:ext uri="{FF2B5EF4-FFF2-40B4-BE49-F238E27FC236}">
+                <a16:creationId xmlns:a16="http://schemas.microsoft.com/office/drawing/2014/main" id="{6265D988-DD7E-9D30-366B-B4E35E1BC992}"/>
+              </a:ext>
+            </a:extLst>
+          </p:cNvPr>
+          <p:cNvSpPr/>
+          <p:nvPr/>
+        </p:nvSpPr>
+        <p:spPr>
+          <a:xfrm rot="20111035">
+            <a:off x="9530628" y="-5014208"/>
+            <a:ext cx="5097767" cy="5189901"/>
+          </a:xfrm>
+          <a:prstGeom prst="rect">
+            <a:avLst/>
+          </a:prstGeom>
+          <a:noFill/>
+          <a:ln>
+            <a:solidFill>
+              <a:srgbClr val="283C95"/>
+            </a:solidFill>
+          </a:ln>
+        </p:spPr>
+        <p:style>
+          <a:lnRef idx="2">
+            <a:schemeClr val="accent1">
+              <a:shade val="15000"/>
+            </a:schemeClr>
+          </a:lnRef>
+          <a:fillRef idx="1">
+            <a:schemeClr val="accent1"/>
+          </a:fillRef>
+          <a:effectRef idx="0">
+            <a:schemeClr val="accent1"/>
+          </a:effectRef>
+          <a:fontRef idx="minor">
+            <a:schemeClr val="lt1"/>
+          </a:fontRef>
+        </p:style>
+        <p:txBody>
+          <a:bodyPr rtlCol="0" anchor="ctr"/>
+          <a:lstStyle/>
+          <a:p>
+            <a:pPr algn="ctr"/>
+            <a:endParaRPr lang="en-US"/>
+          </a:p>
+        </p:txBody>
+      </p:sp>
+      <p:sp>
+        <p:nvSpPr>
+          <p:cNvPr id="9" name="Rectangle 8">
+            <a:extLst>
+              <a:ext uri="{FF2B5EF4-FFF2-40B4-BE49-F238E27FC236}">
+                <a16:creationId xmlns:a16="http://schemas.microsoft.com/office/drawing/2014/main" id="{40DE607A-6C20-9100-B916-77E00692D0F8}"/>
+              </a:ext>
+            </a:extLst>
+          </p:cNvPr>
+          <p:cNvSpPr/>
+          <p:nvPr/>
+        </p:nvSpPr>
+        <p:spPr>
+          <a:xfrm rot="20111035">
+            <a:off x="10112583" y="-5014208"/>
+            <a:ext cx="5097767" cy="5189901"/>
+          </a:xfrm>
+          <a:prstGeom prst="rect">
+            <a:avLst/>
+          </a:prstGeom>
+          <a:noFill/>
+          <a:ln>
+            <a:solidFill>
+              <a:srgbClr val="283C95"/>
+            </a:solidFill>
+          </a:ln>
+        </p:spPr>
+        <p:style>
+          <a:lnRef idx="2">
+            <a:schemeClr val="accent1">
+              <a:shade val="15000"/>
+            </a:schemeClr>
+          </a:lnRef>
+          <a:fillRef idx="1">
+            <a:schemeClr val="accent1"/>
+          </a:fillRef>
+          <a:effectRef idx="0">
+            <a:schemeClr val="accent1"/>
+          </a:effectRef>
+          <a:fontRef idx="minor">
+            <a:schemeClr val="lt1"/>
+          </a:fontRef>
+        </p:style>
+        <p:txBody>
+          <a:bodyPr rtlCol="0" anchor="ctr"/>
+          <a:lstStyle/>
+          <a:p>
+            <a:pPr algn="ctr"/>
+            <a:endParaRPr lang="en-US" dirty="0"/>
+          </a:p>
+        </p:txBody>
+      </p:sp>
+      <p:sp>
+        <p:nvSpPr>
+          <p:cNvPr id="10" name="Rectangle 9">
+            <a:extLst>
+              <a:ext uri="{FF2B5EF4-FFF2-40B4-BE49-F238E27FC236}">
+                <a16:creationId xmlns:a16="http://schemas.microsoft.com/office/drawing/2014/main" id="{CF1C3A6B-54C7-017F-55CD-D7B94674919E}"/>
+              </a:ext>
+            </a:extLst>
+          </p:cNvPr>
+          <p:cNvSpPr/>
+          <p:nvPr/>
+        </p:nvSpPr>
+        <p:spPr>
+          <a:xfrm rot="20111035">
+            <a:off x="10694538" y="-5014208"/>
+            <a:ext cx="5097767" cy="5189901"/>
+          </a:xfrm>
+          <a:prstGeom prst="rect">
+            <a:avLst/>
+          </a:prstGeom>
+          <a:noFill/>
+          <a:ln>
+            <a:solidFill>
+              <a:srgbClr val="283C95"/>
+            </a:solidFill>
+          </a:ln>
+        </p:spPr>
+        <p:style>
+          <a:lnRef idx="2">
+            <a:schemeClr val="accent1">
+              <a:shade val="15000"/>
+            </a:schemeClr>
+          </a:lnRef>
+          <a:fillRef idx="1">
+            <a:schemeClr val="accent1"/>
+          </a:fillRef>
+          <a:effectRef idx="0">
+            <a:schemeClr val="accent1"/>
+          </a:effectRef>
+          <a:fontRef idx="minor">
+            <a:schemeClr val="lt1"/>
+          </a:fontRef>
+        </p:style>
+        <p:txBody>
+          <a:bodyPr rtlCol="0" anchor="ctr"/>
+          <a:lstStyle/>
+          <a:p>
+            <a:pPr algn="ctr"/>
+            <a:endParaRPr lang="en-US" dirty="0"/>
+          </a:p>
+        </p:txBody>
+      </p:sp>
+      <p:sp>
+        <p:nvSpPr>
+          <p:cNvPr id="11" name="Rectangle 10">
+            <a:extLst>
+              <a:ext uri="{FF2B5EF4-FFF2-40B4-BE49-F238E27FC236}">
+                <a16:creationId xmlns:a16="http://schemas.microsoft.com/office/drawing/2014/main" id="{622DF151-23B8-C6D3-A9EC-EA8990C65616}"/>
+              </a:ext>
+            </a:extLst>
+          </p:cNvPr>
+          <p:cNvSpPr/>
+          <p:nvPr/>
+        </p:nvSpPr>
+        <p:spPr>
+          <a:xfrm rot="20111035">
+            <a:off x="6266854" y="6918832"/>
+            <a:ext cx="5097767" cy="5189901"/>
+          </a:xfrm>
+          <a:prstGeom prst="rect">
+            <a:avLst/>
+          </a:prstGeom>
+          <a:noFill/>
+          <a:ln>
+            <a:solidFill>
+              <a:srgbClr val="283C95"/>
+            </a:solidFill>
+          </a:ln>
+        </p:spPr>
+        <p:style>
+          <a:lnRef idx="2">
+            <a:schemeClr val="accent1">
+              <a:shade val="15000"/>
+            </a:schemeClr>
+          </a:lnRef>
+          <a:fillRef idx="1">
+            <a:schemeClr val="accent1"/>
+          </a:fillRef>
+          <a:effectRef idx="0">
+            <a:schemeClr val="accent1"/>
+          </a:effectRef>
+          <a:fontRef idx="minor">
+            <a:schemeClr val="lt1"/>
+          </a:fontRef>
+        </p:style>
+        <p:txBody>
+          <a:bodyPr rtlCol="0" anchor="ctr"/>
+          <a:lstStyle/>
+          <a:p>
+            <a:pPr algn="ctr"/>
+            <a:endParaRPr lang="en-US"/>
+          </a:p>
+        </p:txBody>
+      </p:sp>
+      <p:sp>
+        <p:nvSpPr>
+          <p:cNvPr id="12" name="Rectangle 11">
+            <a:extLst>
+              <a:ext uri="{FF2B5EF4-FFF2-40B4-BE49-F238E27FC236}">
+                <a16:creationId xmlns:a16="http://schemas.microsoft.com/office/drawing/2014/main" id="{244E0C72-0275-FD8F-4D5D-E79F2EC90AB8}"/>
+              </a:ext>
+            </a:extLst>
+          </p:cNvPr>
+          <p:cNvSpPr/>
+          <p:nvPr/>
+        </p:nvSpPr>
+        <p:spPr>
+          <a:xfrm rot="20111035">
+            <a:off x="6848809" y="6918832"/>
+            <a:ext cx="5097767" cy="5189901"/>
+          </a:xfrm>
+          <a:prstGeom prst="rect">
+            <a:avLst/>
+          </a:prstGeom>
+          <a:noFill/>
+          <a:ln>
+            <a:solidFill>
+              <a:srgbClr val="283C95"/>
+            </a:solidFill>
+          </a:ln>
+        </p:spPr>
+        <p:style>
+          <a:lnRef idx="2">
+            <a:schemeClr val="accent1">
+              <a:shade val="15000"/>
+            </a:schemeClr>
+          </a:lnRef>
+          <a:fillRef idx="1">
+            <a:schemeClr val="accent1"/>
+          </a:fillRef>
+          <a:effectRef idx="0">
+            <a:schemeClr val="accent1"/>
+          </a:effectRef>
+          <a:fontRef idx="minor">
+            <a:schemeClr val="lt1"/>
+          </a:fontRef>
+        </p:style>
+        <p:txBody>
+          <a:bodyPr rtlCol="0" anchor="ctr"/>
+          <a:lstStyle/>
+          <a:p>
+            <a:pPr algn="ctr"/>
+            <a:endParaRPr lang="en-US" dirty="0"/>
+          </a:p>
+        </p:txBody>
+      </p:sp>
+      <p:sp>
+        <p:nvSpPr>
+          <p:cNvPr id="13" name="Rectangle 12">
+            <a:extLst>
+              <a:ext uri="{FF2B5EF4-FFF2-40B4-BE49-F238E27FC236}">
+                <a16:creationId xmlns:a16="http://schemas.microsoft.com/office/drawing/2014/main" id="{B20577BC-0C05-EE24-5E69-F63A49678929}"/>
+              </a:ext>
+            </a:extLst>
+          </p:cNvPr>
+          <p:cNvSpPr/>
+          <p:nvPr/>
+        </p:nvSpPr>
+        <p:spPr>
+          <a:xfrm rot="20111035">
+            <a:off x="7430764" y="6918832"/>
+            <a:ext cx="5097767" cy="5189901"/>
+          </a:xfrm>
+          <a:prstGeom prst="rect">
+            <a:avLst/>
+          </a:prstGeom>
+          <a:noFill/>
+          <a:ln>
+            <a:solidFill>
+              <a:srgbClr val="283C95"/>
+            </a:solidFill>
+          </a:ln>
+        </p:spPr>
+        <p:style>
+          <a:lnRef idx="2">
+            <a:schemeClr val="accent1">
+              <a:shade val="15000"/>
+            </a:schemeClr>
+          </a:lnRef>
+          <a:fillRef idx="1">
+            <a:schemeClr val="accent1"/>
+          </a:fillRef>
+          <a:effectRef idx="0">
+            <a:schemeClr val="accent1"/>
+          </a:effectRef>
+          <a:fontRef idx="minor">
+            <a:schemeClr val="lt1"/>
+          </a:fontRef>
+        </p:style>
+        <p:txBody>
+          <a:bodyPr rtlCol="0" anchor="ctr"/>
+          <a:lstStyle/>
+          <a:p>
+            <a:pPr algn="ctr"/>
+            <a:endParaRPr lang="en-US" dirty="0"/>
+          </a:p>
+        </p:txBody>
+      </p:sp>
+    </p:spTree>
+    <p:extLst>
+      <p:ext uri="{BB962C8B-B14F-4D97-AF65-F5344CB8AC3E}">
+        <p14:creationId xmlns:p14="http://schemas.microsoft.com/office/powerpoint/2010/main" val="3843712027"/>
+      </p:ext>
+    </p:extLst>
+  </p:cSld>
+  <p:clrMapOvr>
+    <a:masterClrMapping/>
+  </p:clrMapOvr>
+  <mc:AlternateContent xmlns:mc="http://schemas.openxmlformats.org/markup-compatibility/2006">
+    <mc:Choice xmlns:p159="http://schemas.microsoft.com/office/powerpoint/2015/09/main" Requires="p159">
+      <p:transition spd="slow">
+        <p159:morph option="byObject"/>
+      </p:transition>
+    </mc:Choice>
+    <mc:Fallback>
+      <p:transition spd="slow">
+        <p:fade/>
+      </p:transition>
+    </mc:Fallback>
+  </mc:AlternateContent>
+</p:sld>
+</file>
+
+<file path=ppt/slides/slide24.xml><?xml version="1.0" encoding="utf-8"?>
+<p:sld xmlns:a="http://schemas.openxmlformats.org/drawingml/2006/main" xmlns:r="http://schemas.openxmlformats.org/officeDocument/2006/relationships" xmlns:p="http://schemas.openxmlformats.org/presentationml/2006/main">
+  <p:cSld>
+    <p:spTree>
+      <p:nvGrpSpPr>
+        <p:cNvPr id="1" name="">
+          <a:extLst>
+            <a:ext uri="{FF2B5EF4-FFF2-40B4-BE49-F238E27FC236}">
+              <a16:creationId xmlns:a16="http://schemas.microsoft.com/office/drawing/2014/main" id="{5AB3042D-D3D9-5DEF-38A6-B00E91CA2465}"/>
+            </a:ext>
+          </a:extLst>
+        </p:cNvPr>
+        <p:cNvGrpSpPr/>
+        <p:nvPr/>
+      </p:nvGrpSpPr>
+      <p:grpSpPr>
+        <a:xfrm>
+          <a:off x="0" y="0"/>
+          <a:ext cx="0" cy="0"/>
+          <a:chOff x="0" y="0"/>
+          <a:chExt cx="0" cy="0"/>
+        </a:xfrm>
+      </p:grpSpPr>
+      <p:sp>
+        <p:nvSpPr>
+          <p:cNvPr id="2" name="Title 1">
+            <a:extLst>
+              <a:ext uri="{FF2B5EF4-FFF2-40B4-BE49-F238E27FC236}">
+                <a16:creationId xmlns:a16="http://schemas.microsoft.com/office/drawing/2014/main" id="{44A33491-3A91-8B21-7571-BB960C02E229}"/>
+              </a:ext>
+            </a:extLst>
+          </p:cNvPr>
+          <p:cNvSpPr>
+            <a:spLocks noGrp="1"/>
+          </p:cNvSpPr>
+          <p:nvPr>
+            <p:ph type="title"/>
+          </p:nvPr>
+        </p:nvSpPr>
+        <p:spPr>
+          <a:xfrm>
+            <a:off x="90194" y="53240"/>
+            <a:ext cx="10802395" cy="1325563"/>
+          </a:xfrm>
+        </p:spPr>
+        <p:txBody>
+          <a:bodyPr>
+            <a:normAutofit/>
+          </a:bodyPr>
+          <a:lstStyle/>
+          <a:p>
+            <a:r>
+              <a:rPr lang="en-US" sz="4400" dirty="0">
+                <a:solidFill>
+                  <a:srgbClr val="283C95"/>
+                </a:solidFill>
+                <a:latin typeface="Aptos ExtraBold" panose="020B0004020202020204" pitchFamily="34" charset="0"/>
+              </a:rPr>
+              <a:t>05 Modeling : </a:t>
+            </a:r>
+            <a:r>
+              <a:rPr lang="en-US" dirty="0">
+                <a:solidFill>
+                  <a:srgbClr val="283C95"/>
+                </a:solidFill>
+                <a:latin typeface="Aptos ExtraBold" panose="020B0004020202020204" pitchFamily="34" charset="0"/>
+              </a:rPr>
+              <a:t>Random Forest</a:t>
+            </a:r>
+          </a:p>
+        </p:txBody>
+      </p:sp>
+      <p:sp>
+        <p:nvSpPr>
+          <p:cNvPr id="3" name="Title 1">
+            <a:extLst>
+              <a:ext uri="{FF2B5EF4-FFF2-40B4-BE49-F238E27FC236}">
+                <a16:creationId xmlns:a16="http://schemas.microsoft.com/office/drawing/2014/main" id="{5BEFE46B-B3E9-FC95-B6DF-37973AF88E8B}"/>
+              </a:ext>
+            </a:extLst>
+          </p:cNvPr>
+          <p:cNvSpPr txBox="1">
+            <a:spLocks/>
+          </p:cNvSpPr>
+          <p:nvPr/>
+        </p:nvSpPr>
+        <p:spPr>
+          <a:xfrm>
+            <a:off x="838200" y="344853"/>
+            <a:ext cx="10515600" cy="1325563"/>
+          </a:xfrm>
+          <a:prstGeom prst="rect">
+            <a:avLst/>
+          </a:prstGeom>
+        </p:spPr>
+        <p:txBody>
+          <a:bodyPr vert="horz" lIns="91440" tIns="45720" rIns="91440" bIns="45720" rtlCol="0" anchor="ctr">
+            <a:normAutofit/>
+          </a:bodyPr>
+          <a:lstStyle>
+            <a:lvl1pPr algn="l" defTabSz="914400" rtl="0" eaLnBrk="1" latinLnBrk="0" hangingPunct="1">
+              <a:lnSpc>
+                <a:spcPct val="90000"/>
+              </a:lnSpc>
+              <a:spcBef>
+                <a:spcPct val="0"/>
+              </a:spcBef>
+              <a:buNone/>
+              <a:defRPr sz="4400" kern="1200">
+                <a:solidFill>
+                  <a:schemeClr val="tx1"/>
+                </a:solidFill>
+                <a:latin typeface="+mj-lt"/>
+                <a:ea typeface="+mj-ea"/>
+                <a:cs typeface="+mj-cs"/>
+              </a:defRPr>
+            </a:lvl1pPr>
+          </a:lstStyle>
+          <a:p>
+            <a:endParaRPr lang="en-US" dirty="0">
+              <a:solidFill>
+                <a:srgbClr val="283C95"/>
+              </a:solidFill>
+              <a:latin typeface="Aptos ExtraBold" panose="020B0004020202020204" pitchFamily="34" charset="0"/>
+            </a:endParaRPr>
+          </a:p>
+        </p:txBody>
+      </p:sp>
+      <p:grpSp>
+        <p:nvGrpSpPr>
+          <p:cNvPr id="8" name="Group 7">
+            <a:extLst>
+              <a:ext uri="{FF2B5EF4-FFF2-40B4-BE49-F238E27FC236}">
+                <a16:creationId xmlns:a16="http://schemas.microsoft.com/office/drawing/2014/main" id="{230D888D-F20C-0EDB-21D5-AACABD798FB8}"/>
+              </a:ext>
+            </a:extLst>
+          </p:cNvPr>
+          <p:cNvGrpSpPr/>
+          <p:nvPr/>
+        </p:nvGrpSpPr>
+        <p:grpSpPr>
+          <a:xfrm>
+            <a:off x="428776" y="1651539"/>
+            <a:ext cx="7463940" cy="4161249"/>
+            <a:chOff x="4404946" y="3026182"/>
+            <a:chExt cx="7787054" cy="4161249"/>
+          </a:xfrm>
+        </p:grpSpPr>
+        <p:sp>
+          <p:nvSpPr>
+            <p:cNvPr id="6" name="TextBox 5">
+              <a:extLst>
+                <a:ext uri="{FF2B5EF4-FFF2-40B4-BE49-F238E27FC236}">
+                  <a16:creationId xmlns:a16="http://schemas.microsoft.com/office/drawing/2014/main" id="{A3384167-1707-469D-A6BB-0128B30A36AF}"/>
+                </a:ext>
+              </a:extLst>
+            </p:cNvPr>
+            <p:cNvSpPr txBox="1"/>
+            <p:nvPr/>
+          </p:nvSpPr>
+          <p:spPr>
+            <a:xfrm>
+              <a:off x="4404946" y="5433105"/>
+              <a:ext cx="6805275" cy="1754326"/>
+            </a:xfrm>
+            <a:prstGeom prst="rect">
+              <a:avLst/>
+            </a:prstGeom>
+            <a:noFill/>
+          </p:spPr>
+          <p:txBody>
+            <a:bodyPr wrap="square" rtlCol="0">
+              <a:spAutoFit/>
+            </a:bodyPr>
+            <a:lstStyle/>
+            <a:p>
+              <a:r>
+                <a:rPr lang="en-US" sz="2800" b="1" i="0" dirty="0">
+                  <a:solidFill>
+                    <a:srgbClr val="283C95"/>
+                  </a:solidFill>
+                  <a:effectLst/>
+                  <a:latin typeface="+mj-lt"/>
+                </a:rPr>
+                <a:t>Conclusion</a:t>
+              </a:r>
+            </a:p>
+            <a:p>
+              <a:r>
+                <a:rPr lang="en-US" sz="2000" b="1" dirty="0"/>
+                <a:t>Random Forest offers the most consistent performance across all metrics. It handles complexity better than a single Decision Tree and reduces overfitting while capturing non-linear patterns.</a:t>
+              </a:r>
+            </a:p>
+          </p:txBody>
+        </p:sp>
+        <p:sp>
+          <p:nvSpPr>
+            <p:cNvPr id="7" name="TextBox 6">
+              <a:extLst>
+                <a:ext uri="{FF2B5EF4-FFF2-40B4-BE49-F238E27FC236}">
+                  <a16:creationId xmlns:a16="http://schemas.microsoft.com/office/drawing/2014/main" id="{D9208DD5-EB10-BF52-3373-15D5CD63F361}"/>
+                </a:ext>
+              </a:extLst>
+            </p:cNvPr>
+            <p:cNvSpPr txBox="1"/>
+            <p:nvPr/>
+          </p:nvSpPr>
+          <p:spPr>
+            <a:xfrm>
+              <a:off x="4404946" y="3026182"/>
+              <a:ext cx="7787054" cy="2369880"/>
+            </a:xfrm>
+            <a:prstGeom prst="rect">
+              <a:avLst/>
+            </a:prstGeom>
+            <a:noFill/>
+          </p:spPr>
+          <p:txBody>
+            <a:bodyPr wrap="square" rtlCol="0">
+              <a:spAutoFit/>
+            </a:bodyPr>
+            <a:lstStyle/>
+            <a:p>
+              <a:r>
+                <a:rPr lang="en-US" sz="2800" b="1" dirty="0">
+                  <a:solidFill>
+                    <a:srgbClr val="283C95"/>
+                  </a:solidFill>
+                  <a:latin typeface="+mj-lt"/>
+                </a:rPr>
+                <a:t>Interpretation</a:t>
+              </a:r>
+              <a:r>
+                <a:rPr lang="en-US" sz="2400" b="0" i="0" dirty="0">
+                  <a:solidFill>
+                    <a:srgbClr val="F8FAFF"/>
+                  </a:solidFill>
+                  <a:effectLst/>
+                  <a:latin typeface="Inter"/>
+                </a:rPr>
+                <a:t>:</a:t>
+              </a:r>
+            </a:p>
+            <a:p>
+              <a:pPr marL="342900" indent="-342900" algn="l">
+                <a:buFont typeface="Arial" panose="020B0604020202020204" pitchFamily="34" charset="0"/>
+                <a:buChar char="•"/>
+              </a:pPr>
+              <a:r>
+                <a:rPr lang="en-US" sz="2000" b="1" dirty="0"/>
+                <a:t>Best RMSLE of all models (1.52), suggesting it's better at predicting both low and high sales values.</a:t>
+              </a:r>
+              <a:endParaRPr lang="ar-EG" sz="2000" b="1" dirty="0"/>
+            </a:p>
+            <a:p>
+              <a:pPr marL="342900" indent="-342900" algn="l">
+                <a:buFont typeface="Arial" panose="020B0604020202020204" pitchFamily="34" charset="0"/>
+                <a:buChar char="•"/>
+              </a:pPr>
+              <a:r>
+                <a:rPr lang="en-US" sz="2000" b="1" dirty="0"/>
+                <a:t>Lower RMSE and MSE than Decision Tree → better generalization.</a:t>
+              </a:r>
+              <a:endParaRPr lang="ar-EG" sz="2000" b="1" dirty="0"/>
+            </a:p>
+            <a:p>
+              <a:pPr marL="342900" indent="-342900" algn="l">
+                <a:buFont typeface="Arial" panose="020B0604020202020204" pitchFamily="34" charset="0"/>
+                <a:buChar char="•"/>
+              </a:pPr>
+              <a:r>
+                <a:rPr lang="en-US" sz="2000" b="1" dirty="0"/>
+                <a:t>Slightly higher MAE than Linear Regression, but overall more balanced performance.</a:t>
+              </a:r>
+            </a:p>
+          </p:txBody>
+        </p:sp>
+      </p:grpSp>
+      <p:graphicFrame>
+        <p:nvGraphicFramePr>
+          <p:cNvPr id="4" name="Table 3">
+            <a:extLst>
+              <a:ext uri="{FF2B5EF4-FFF2-40B4-BE49-F238E27FC236}">
+                <a16:creationId xmlns:a16="http://schemas.microsoft.com/office/drawing/2014/main" id="{221C9801-5E38-4E41-2C1E-D9EB1D4DB312}"/>
+              </a:ext>
+            </a:extLst>
+          </p:cNvPr>
+          <p:cNvGraphicFramePr>
+            <a:graphicFrameLocks noGrp="1"/>
+          </p:cNvGraphicFramePr>
+          <p:nvPr>
+            <p:extLst>
+              <p:ext uri="{D42A27DB-BD31-4B8C-83A1-F6EECF244321}">
+                <p14:modId xmlns:p14="http://schemas.microsoft.com/office/powerpoint/2010/main" val="584756842"/>
+              </p:ext>
+            </p:extLst>
+          </p:nvPr>
+        </p:nvGraphicFramePr>
+        <p:xfrm>
+          <a:off x="7889600" y="2101517"/>
+          <a:ext cx="3881486" cy="3104945"/>
+        </p:xfrm>
+        <a:graphic>
+          <a:graphicData uri="http://schemas.openxmlformats.org/drawingml/2006/table">
+            <a:tbl>
+              <a:tblPr firstRow="1" bandRow="1">
+                <a:tableStyleId>{5C22544A-7EE6-4342-B048-85BDC9FD1C3A}</a:tableStyleId>
+              </a:tblPr>
+              <a:tblGrid>
+                <a:gridCol w="1940743">
+                  <a:extLst>
+                    <a:ext uri="{9D8B030D-6E8A-4147-A177-3AD203B41FA5}">
+                      <a16:colId xmlns:a16="http://schemas.microsoft.com/office/drawing/2014/main" val="4078473568"/>
+                    </a:ext>
+                  </a:extLst>
+                </a:gridCol>
+                <a:gridCol w="1940743">
+                  <a:extLst>
+                    <a:ext uri="{9D8B030D-6E8A-4147-A177-3AD203B41FA5}">
+                      <a16:colId xmlns:a16="http://schemas.microsoft.com/office/drawing/2014/main" val="4078701055"/>
+                    </a:ext>
+                  </a:extLst>
+                </a:gridCol>
+              </a:tblGrid>
+              <a:tr h="620989">
+                <a:tc gridSpan="2">
+                  <a:txBody>
+                    <a:bodyPr/>
+                    <a:lstStyle/>
+                    <a:p>
+                      <a:pPr algn="ctr"/>
+                      <a:r>
+                        <a:rPr lang="en-US" sz="2500" dirty="0"/>
+                        <a:t>Performance Metrics</a:t>
+                      </a:r>
+                    </a:p>
+                  </a:txBody>
+                  <a:tcPr anchor="ctr"/>
+                </a:tc>
+                <a:tc hMerge="1">
+                  <a:txBody>
+                    <a:bodyPr/>
+                    <a:lstStyle/>
+                    <a:p>
+                      <a:endParaRPr lang="en-US" dirty="0"/>
+                    </a:p>
+                  </a:txBody>
+                  <a:tcPr/>
+                </a:tc>
+                <a:extLst>
+                  <a:ext uri="{0D108BD9-81ED-4DB2-BD59-A6C34878D82A}">
+                    <a16:rowId xmlns:a16="http://schemas.microsoft.com/office/drawing/2014/main" val="2919094624"/>
+                  </a:ext>
+                </a:extLst>
+              </a:tr>
+              <a:tr h="620989">
+                <a:tc>
+                  <a:txBody>
+                    <a:bodyPr/>
+                    <a:lstStyle/>
+                    <a:p>
+                      <a:pPr algn="ctr"/>
+                      <a:r>
+                        <a:rPr lang="en-US" b="1" dirty="0"/>
+                        <a:t>RMSLE</a:t>
+                      </a:r>
+                    </a:p>
+                  </a:txBody>
+                  <a:tcPr anchor="ctr"/>
+                </a:tc>
+                <a:tc>
+                  <a:txBody>
+                    <a:bodyPr/>
+                    <a:lstStyle/>
+                    <a:p>
+                      <a:pPr algn="ctr"/>
+                      <a:r>
+                        <a:rPr lang="ar-EG" b="1" dirty="0"/>
+                        <a:t>1.52</a:t>
+                      </a:r>
+                      <a:endParaRPr lang="en-US" b="1" dirty="0"/>
+                    </a:p>
+                  </a:txBody>
+                  <a:tcPr anchor="ctr"/>
+                </a:tc>
+                <a:extLst>
+                  <a:ext uri="{0D108BD9-81ED-4DB2-BD59-A6C34878D82A}">
+                    <a16:rowId xmlns:a16="http://schemas.microsoft.com/office/drawing/2014/main" val="23947187"/>
+                  </a:ext>
+                </a:extLst>
+              </a:tr>
+              <a:tr h="620989">
+                <a:tc>
+                  <a:txBody>
+                    <a:bodyPr/>
+                    <a:lstStyle/>
+                    <a:p>
+                      <a:pPr algn="ctr"/>
+                      <a:r>
+                        <a:rPr lang="en-US" b="1" dirty="0"/>
+                        <a:t>RMSE</a:t>
+                      </a:r>
+                    </a:p>
+                  </a:txBody>
+                  <a:tcPr anchor="ctr"/>
+                </a:tc>
+                <a:tc>
+                  <a:txBody>
+                    <a:bodyPr/>
+                    <a:lstStyle/>
+                    <a:p>
+                      <a:pPr algn="ctr"/>
+                      <a:r>
+                        <a:rPr lang="ar-EG" b="1" dirty="0"/>
+                        <a:t>783.14</a:t>
+                      </a:r>
+                      <a:endParaRPr lang="en-US" b="1" dirty="0"/>
+                    </a:p>
+                  </a:txBody>
+                  <a:tcPr anchor="ctr"/>
+                </a:tc>
+                <a:extLst>
+                  <a:ext uri="{0D108BD9-81ED-4DB2-BD59-A6C34878D82A}">
+                    <a16:rowId xmlns:a16="http://schemas.microsoft.com/office/drawing/2014/main" val="2137564356"/>
+                  </a:ext>
+                </a:extLst>
+              </a:tr>
+              <a:tr h="620989">
+                <a:tc>
+                  <a:txBody>
+                    <a:bodyPr/>
+                    <a:lstStyle/>
+                    <a:p>
+                      <a:pPr algn="ctr"/>
+                      <a:r>
+                        <a:rPr lang="en-US" b="1" dirty="0"/>
+                        <a:t>MSE</a:t>
+                      </a:r>
+                    </a:p>
+                  </a:txBody>
+                  <a:tcPr anchor="ctr"/>
+                </a:tc>
+                <a:tc>
+                  <a:txBody>
+                    <a:bodyPr/>
+                    <a:lstStyle/>
+                    <a:p>
+                      <a:pPr algn="ctr"/>
+                      <a:r>
+                        <a:rPr lang="ar-EG" b="1" dirty="0"/>
+                        <a:t>613309.2</a:t>
+                      </a:r>
+                      <a:endParaRPr lang="en-US" b="1" dirty="0"/>
+                    </a:p>
+                  </a:txBody>
+                  <a:tcPr anchor="ctr"/>
+                </a:tc>
+                <a:extLst>
+                  <a:ext uri="{0D108BD9-81ED-4DB2-BD59-A6C34878D82A}">
+                    <a16:rowId xmlns:a16="http://schemas.microsoft.com/office/drawing/2014/main" val="1878555358"/>
+                  </a:ext>
+                </a:extLst>
+              </a:tr>
+              <a:tr h="620989">
+                <a:tc>
+                  <a:txBody>
+                    <a:bodyPr/>
+                    <a:lstStyle/>
+                    <a:p>
+                      <a:pPr algn="ctr"/>
+                      <a:r>
+                        <a:rPr lang="en-US" b="1" dirty="0"/>
+                        <a:t>MAE</a:t>
+                      </a:r>
+                    </a:p>
+                  </a:txBody>
+                  <a:tcPr anchor="ctr"/>
+                </a:tc>
+                <a:tc>
+                  <a:txBody>
+                    <a:bodyPr/>
+                    <a:lstStyle/>
+                    <a:p>
+                      <a:pPr algn="ctr"/>
+                      <a:r>
+                        <a:rPr lang="ar-EG" b="1" dirty="0"/>
+                        <a:t>265.67</a:t>
+                      </a:r>
+                      <a:endParaRPr lang="en-US" b="1" dirty="0"/>
+                    </a:p>
+                  </a:txBody>
+                  <a:tcPr anchor="ctr"/>
+                </a:tc>
+                <a:extLst>
+                  <a:ext uri="{0D108BD9-81ED-4DB2-BD59-A6C34878D82A}">
+                    <a16:rowId xmlns:a16="http://schemas.microsoft.com/office/drawing/2014/main" val="3709831111"/>
+                  </a:ext>
+                </a:extLst>
+              </a:tr>
+            </a:tbl>
+          </a:graphicData>
+        </a:graphic>
+      </p:graphicFrame>
+      <p:sp>
+        <p:nvSpPr>
+          <p:cNvPr id="5" name="Rectangle 4">
+            <a:extLst>
+              <a:ext uri="{FF2B5EF4-FFF2-40B4-BE49-F238E27FC236}">
+                <a16:creationId xmlns:a16="http://schemas.microsoft.com/office/drawing/2014/main" id="{DF39FC77-CD70-E12D-84B5-DE00D9C7535F}"/>
+              </a:ext>
+            </a:extLst>
+          </p:cNvPr>
+          <p:cNvSpPr/>
+          <p:nvPr/>
+        </p:nvSpPr>
+        <p:spPr>
+          <a:xfrm rot="20111035">
+            <a:off x="7892328" y="-5006704"/>
+            <a:ext cx="5097767" cy="5189901"/>
+          </a:xfrm>
+          <a:prstGeom prst="rect">
+            <a:avLst/>
+          </a:prstGeom>
+          <a:noFill/>
+          <a:ln>
+            <a:solidFill>
+              <a:srgbClr val="283C95"/>
+            </a:solidFill>
+          </a:ln>
+        </p:spPr>
+        <p:style>
+          <a:lnRef idx="2">
+            <a:schemeClr val="accent1">
+              <a:shade val="15000"/>
+            </a:schemeClr>
+          </a:lnRef>
+          <a:fillRef idx="1">
+            <a:schemeClr val="accent1"/>
+          </a:fillRef>
+          <a:effectRef idx="0">
+            <a:schemeClr val="accent1"/>
+          </a:effectRef>
+          <a:fontRef idx="minor">
+            <a:schemeClr val="lt1"/>
+          </a:fontRef>
+        </p:style>
+        <p:txBody>
+          <a:bodyPr rtlCol="0" anchor="ctr"/>
+          <a:lstStyle/>
+          <a:p>
+            <a:pPr algn="ctr"/>
+            <a:endParaRPr lang="en-US"/>
+          </a:p>
+        </p:txBody>
+      </p:sp>
+      <p:sp>
+        <p:nvSpPr>
+          <p:cNvPr id="9" name="Rectangle 8">
+            <a:extLst>
+              <a:ext uri="{FF2B5EF4-FFF2-40B4-BE49-F238E27FC236}">
+                <a16:creationId xmlns:a16="http://schemas.microsoft.com/office/drawing/2014/main" id="{A958004E-EDB0-FD1D-4C24-5C2C689E712B}"/>
+              </a:ext>
+            </a:extLst>
+          </p:cNvPr>
+          <p:cNvSpPr/>
+          <p:nvPr/>
+        </p:nvSpPr>
+        <p:spPr>
+          <a:xfrm rot="20111035">
+            <a:off x="8474283" y="-5006704"/>
+            <a:ext cx="5097767" cy="5189901"/>
+          </a:xfrm>
+          <a:prstGeom prst="rect">
+            <a:avLst/>
+          </a:prstGeom>
+          <a:noFill/>
+          <a:ln>
+            <a:solidFill>
+              <a:srgbClr val="283C95"/>
+            </a:solidFill>
+          </a:ln>
+        </p:spPr>
+        <p:style>
+          <a:lnRef idx="2">
+            <a:schemeClr val="accent1">
+              <a:shade val="15000"/>
+            </a:schemeClr>
+          </a:lnRef>
+          <a:fillRef idx="1">
+            <a:schemeClr val="accent1"/>
+          </a:fillRef>
+          <a:effectRef idx="0">
+            <a:schemeClr val="accent1"/>
+          </a:effectRef>
+          <a:fontRef idx="minor">
+            <a:schemeClr val="lt1"/>
+          </a:fontRef>
+        </p:style>
+        <p:txBody>
+          <a:bodyPr rtlCol="0" anchor="ctr"/>
+          <a:lstStyle/>
+          <a:p>
+            <a:pPr algn="ctr"/>
+            <a:endParaRPr lang="en-US" dirty="0"/>
+          </a:p>
+        </p:txBody>
+      </p:sp>
+      <p:sp>
+        <p:nvSpPr>
+          <p:cNvPr id="10" name="Rectangle 9">
+            <a:extLst>
+              <a:ext uri="{FF2B5EF4-FFF2-40B4-BE49-F238E27FC236}">
+                <a16:creationId xmlns:a16="http://schemas.microsoft.com/office/drawing/2014/main" id="{FF16623E-35F7-2057-4901-550C88B7F9D0}"/>
+              </a:ext>
+            </a:extLst>
+          </p:cNvPr>
+          <p:cNvSpPr/>
+          <p:nvPr/>
+        </p:nvSpPr>
+        <p:spPr>
+          <a:xfrm rot="20111035">
+            <a:off x="9056238" y="-5006704"/>
+            <a:ext cx="5097767" cy="5189901"/>
+          </a:xfrm>
+          <a:prstGeom prst="rect">
+            <a:avLst/>
+          </a:prstGeom>
+          <a:noFill/>
+          <a:ln>
+            <a:solidFill>
+              <a:srgbClr val="283C95"/>
+            </a:solidFill>
+          </a:ln>
+        </p:spPr>
+        <p:style>
+          <a:lnRef idx="2">
+            <a:schemeClr val="accent1">
+              <a:shade val="15000"/>
+            </a:schemeClr>
+          </a:lnRef>
+          <a:fillRef idx="1">
+            <a:schemeClr val="accent1"/>
+          </a:fillRef>
+          <a:effectRef idx="0">
+            <a:schemeClr val="accent1"/>
+          </a:effectRef>
+          <a:fontRef idx="minor">
+            <a:schemeClr val="lt1"/>
+          </a:fontRef>
+        </p:style>
+        <p:txBody>
+          <a:bodyPr rtlCol="0" anchor="ctr"/>
+          <a:lstStyle/>
+          <a:p>
+            <a:pPr algn="ctr"/>
+            <a:endParaRPr lang="en-US" dirty="0"/>
+          </a:p>
+        </p:txBody>
+      </p:sp>
+      <p:sp>
+        <p:nvSpPr>
+          <p:cNvPr id="11" name="Rectangle 10">
+            <a:extLst>
+              <a:ext uri="{FF2B5EF4-FFF2-40B4-BE49-F238E27FC236}">
+                <a16:creationId xmlns:a16="http://schemas.microsoft.com/office/drawing/2014/main" id="{A911EA02-EF5B-CC38-0DD6-C9E27FBCEB62}"/>
+              </a:ext>
+            </a:extLst>
+          </p:cNvPr>
+          <p:cNvSpPr/>
+          <p:nvPr/>
+        </p:nvSpPr>
+        <p:spPr>
+          <a:xfrm rot="20111035">
+            <a:off x="6590704" y="6913206"/>
+            <a:ext cx="5097767" cy="5189901"/>
+          </a:xfrm>
+          <a:prstGeom prst="rect">
+            <a:avLst/>
+          </a:prstGeom>
+          <a:noFill/>
+          <a:ln>
+            <a:solidFill>
+              <a:srgbClr val="283C95"/>
+            </a:solidFill>
+          </a:ln>
+        </p:spPr>
+        <p:style>
+          <a:lnRef idx="2">
+            <a:schemeClr val="accent1">
+              <a:shade val="15000"/>
+            </a:schemeClr>
+          </a:lnRef>
+          <a:fillRef idx="1">
+            <a:schemeClr val="accent1"/>
+          </a:fillRef>
+          <a:effectRef idx="0">
+            <a:schemeClr val="accent1"/>
+          </a:effectRef>
+          <a:fontRef idx="minor">
+            <a:schemeClr val="lt1"/>
+          </a:fontRef>
+        </p:style>
+        <p:txBody>
+          <a:bodyPr rtlCol="0" anchor="ctr"/>
+          <a:lstStyle/>
+          <a:p>
+            <a:pPr algn="ctr"/>
+            <a:endParaRPr lang="en-US"/>
+          </a:p>
+        </p:txBody>
+      </p:sp>
+      <p:sp>
+        <p:nvSpPr>
+          <p:cNvPr id="12" name="Rectangle 11">
+            <a:extLst>
+              <a:ext uri="{FF2B5EF4-FFF2-40B4-BE49-F238E27FC236}">
+                <a16:creationId xmlns:a16="http://schemas.microsoft.com/office/drawing/2014/main" id="{0B4A2731-9930-29C1-B72F-3CE273B3CF49}"/>
+              </a:ext>
+            </a:extLst>
+          </p:cNvPr>
+          <p:cNvSpPr/>
+          <p:nvPr/>
+        </p:nvSpPr>
+        <p:spPr>
+          <a:xfrm rot="20111035">
+            <a:off x="7172659" y="6913206"/>
+            <a:ext cx="5097767" cy="5189901"/>
+          </a:xfrm>
+          <a:prstGeom prst="rect">
+            <a:avLst/>
+          </a:prstGeom>
+          <a:noFill/>
+          <a:ln>
+            <a:solidFill>
+              <a:srgbClr val="283C95"/>
+            </a:solidFill>
+          </a:ln>
+        </p:spPr>
+        <p:style>
+          <a:lnRef idx="2">
+            <a:schemeClr val="accent1">
+              <a:shade val="15000"/>
+            </a:schemeClr>
+          </a:lnRef>
+          <a:fillRef idx="1">
+            <a:schemeClr val="accent1"/>
+          </a:fillRef>
+          <a:effectRef idx="0">
+            <a:schemeClr val="accent1"/>
+          </a:effectRef>
+          <a:fontRef idx="minor">
+            <a:schemeClr val="lt1"/>
+          </a:fontRef>
+        </p:style>
+        <p:txBody>
+          <a:bodyPr rtlCol="0" anchor="ctr"/>
+          <a:lstStyle/>
+          <a:p>
+            <a:pPr algn="ctr"/>
+            <a:endParaRPr lang="en-US" dirty="0"/>
+          </a:p>
+        </p:txBody>
+      </p:sp>
+      <p:sp>
+        <p:nvSpPr>
+          <p:cNvPr id="13" name="Rectangle 12">
+            <a:extLst>
+              <a:ext uri="{FF2B5EF4-FFF2-40B4-BE49-F238E27FC236}">
+                <a16:creationId xmlns:a16="http://schemas.microsoft.com/office/drawing/2014/main" id="{395C5AD9-7F75-AF8F-9585-9278BA08C9B5}"/>
+              </a:ext>
+            </a:extLst>
+          </p:cNvPr>
+          <p:cNvSpPr/>
+          <p:nvPr/>
+        </p:nvSpPr>
+        <p:spPr>
+          <a:xfrm rot="20111035">
+            <a:off x="7754614" y="6913206"/>
+            <a:ext cx="5097767" cy="5189901"/>
+          </a:xfrm>
+          <a:prstGeom prst="rect">
+            <a:avLst/>
+          </a:prstGeom>
+          <a:noFill/>
+          <a:ln>
+            <a:solidFill>
+              <a:srgbClr val="283C95"/>
+            </a:solidFill>
+          </a:ln>
+        </p:spPr>
+        <p:style>
+          <a:lnRef idx="2">
+            <a:schemeClr val="accent1">
+              <a:shade val="15000"/>
+            </a:schemeClr>
+          </a:lnRef>
+          <a:fillRef idx="1">
+            <a:schemeClr val="accent1"/>
+          </a:fillRef>
+          <a:effectRef idx="0">
+            <a:schemeClr val="accent1"/>
+          </a:effectRef>
+          <a:fontRef idx="minor">
+            <a:schemeClr val="lt1"/>
+          </a:fontRef>
+        </p:style>
+        <p:txBody>
+          <a:bodyPr rtlCol="0" anchor="ctr"/>
+          <a:lstStyle/>
+          <a:p>
+            <a:pPr algn="ctr"/>
+            <a:endParaRPr lang="en-US" dirty="0"/>
+          </a:p>
+        </p:txBody>
+      </p:sp>
+    </p:spTree>
+    <p:extLst>
+      <p:ext uri="{BB962C8B-B14F-4D97-AF65-F5344CB8AC3E}">
+        <p14:creationId xmlns:p14="http://schemas.microsoft.com/office/powerpoint/2010/main" val="1767219182"/>
+      </p:ext>
+    </p:extLst>
+  </p:cSld>
+  <p:clrMapOvr>
+    <a:masterClrMapping/>
+  </p:clrMapOvr>
+  <mc:AlternateContent xmlns:mc="http://schemas.openxmlformats.org/markup-compatibility/2006">
+    <mc:Choice xmlns:p159="http://schemas.microsoft.com/office/powerpoint/2015/09/main" Requires="p159">
+      <p:transition spd="slow">
+        <p159:morph option="byObject"/>
+      </p:transition>
+    </mc:Choice>
+    <mc:Fallback>
+      <p:transition spd="slow">
+        <p:fade/>
+      </p:transition>
+    </mc:Fallback>
+  </mc:AlternateContent>
+</p:sld>
+</file>
+
+<file path=ppt/slides/slide25.xml><?xml version="1.0" encoding="utf-8"?>
+<p:sld xmlns:a="http://schemas.openxmlformats.org/drawingml/2006/main" xmlns:r="http://schemas.openxmlformats.org/officeDocument/2006/relationships" xmlns:p="http://schemas.openxmlformats.org/presentationml/2006/main">
+  <p:cSld>
+    <p:spTree>
+      <p:nvGrpSpPr>
+        <p:cNvPr id="1" name="">
+          <a:extLst>
+            <a:ext uri="{FF2B5EF4-FFF2-40B4-BE49-F238E27FC236}">
+              <a16:creationId xmlns:a16="http://schemas.microsoft.com/office/drawing/2014/main" id="{8BFE32C5-EB5D-C610-CB63-3FB13AC60E16}"/>
+            </a:ext>
+          </a:extLst>
+        </p:cNvPr>
+        <p:cNvGrpSpPr/>
+        <p:nvPr/>
+      </p:nvGrpSpPr>
+      <p:grpSpPr>
+        <a:xfrm>
+          <a:off x="0" y="0"/>
+          <a:ext cx="0" cy="0"/>
+          <a:chOff x="0" y="0"/>
+          <a:chExt cx="0" cy="0"/>
+        </a:xfrm>
+      </p:grpSpPr>
+      <p:sp>
+        <p:nvSpPr>
+          <p:cNvPr id="2" name="Title 1">
+            <a:extLst>
+              <a:ext uri="{FF2B5EF4-FFF2-40B4-BE49-F238E27FC236}">
+                <a16:creationId xmlns:a16="http://schemas.microsoft.com/office/drawing/2014/main" id="{C0A926D5-06DC-CB19-8F02-937E2AD369BE}"/>
+              </a:ext>
+            </a:extLst>
+          </p:cNvPr>
+          <p:cNvSpPr>
+            <a:spLocks noGrp="1"/>
+          </p:cNvSpPr>
+          <p:nvPr>
+            <p:ph type="title"/>
+          </p:nvPr>
+        </p:nvSpPr>
+        <p:spPr>
+          <a:xfrm>
+            <a:off x="90194" y="53240"/>
+            <a:ext cx="10802395" cy="1325563"/>
+          </a:xfrm>
+        </p:spPr>
+        <p:txBody>
+          <a:bodyPr>
+            <a:normAutofit/>
+          </a:bodyPr>
+          <a:lstStyle/>
+          <a:p>
+            <a:r>
+              <a:rPr lang="en-US" sz="4400" dirty="0">
+                <a:solidFill>
+                  <a:srgbClr val="283C95"/>
+                </a:solidFill>
+                <a:latin typeface="Aptos ExtraBold" panose="020B0004020202020204" pitchFamily="34" charset="0"/>
+              </a:rPr>
+              <a:t>05 Modeling : </a:t>
+            </a:r>
+            <a:r>
+              <a:rPr lang="ar-EG" dirty="0">
+                <a:solidFill>
+                  <a:srgbClr val="283C95"/>
+                </a:solidFill>
+                <a:latin typeface="Aptos ExtraBold" panose="020B0004020202020204" pitchFamily="34" charset="0"/>
+              </a:rPr>
+              <a:t>	</a:t>
+            </a:r>
+            <a:r>
+              <a:rPr lang="en-US" dirty="0">
+                <a:solidFill>
+                  <a:srgbClr val="283C95"/>
+                </a:solidFill>
+                <a:latin typeface="Aptos ExtraBold" panose="020B0004020202020204" pitchFamily="34" charset="0"/>
+              </a:rPr>
+              <a:t>Cross-Validation</a:t>
+            </a:r>
+          </a:p>
+        </p:txBody>
+      </p:sp>
+      <p:sp>
+        <p:nvSpPr>
+          <p:cNvPr id="3" name="Title 1">
+            <a:extLst>
+              <a:ext uri="{FF2B5EF4-FFF2-40B4-BE49-F238E27FC236}">
+                <a16:creationId xmlns:a16="http://schemas.microsoft.com/office/drawing/2014/main" id="{7B73EA9C-8B14-6F24-43F4-474A58780B34}"/>
+              </a:ext>
+            </a:extLst>
+          </p:cNvPr>
+          <p:cNvSpPr txBox="1">
+            <a:spLocks/>
+          </p:cNvSpPr>
+          <p:nvPr/>
+        </p:nvSpPr>
+        <p:spPr>
+          <a:xfrm>
+            <a:off x="838200" y="344853"/>
+            <a:ext cx="10515600" cy="1325563"/>
+          </a:xfrm>
+          <a:prstGeom prst="rect">
+            <a:avLst/>
+          </a:prstGeom>
+        </p:spPr>
+        <p:txBody>
+          <a:bodyPr vert="horz" lIns="91440" tIns="45720" rIns="91440" bIns="45720" rtlCol="0" anchor="ctr">
+            <a:normAutofit/>
+          </a:bodyPr>
+          <a:lstStyle>
+            <a:lvl1pPr algn="l" defTabSz="914400" rtl="0" eaLnBrk="1" latinLnBrk="0" hangingPunct="1">
+              <a:lnSpc>
+                <a:spcPct val="90000"/>
+              </a:lnSpc>
+              <a:spcBef>
+                <a:spcPct val="0"/>
+              </a:spcBef>
+              <a:buNone/>
+              <a:defRPr sz="4400" kern="1200">
+                <a:solidFill>
+                  <a:schemeClr val="tx1"/>
+                </a:solidFill>
+                <a:latin typeface="+mj-lt"/>
+                <a:ea typeface="+mj-ea"/>
+                <a:cs typeface="+mj-cs"/>
+              </a:defRPr>
+            </a:lvl1pPr>
+          </a:lstStyle>
+          <a:p>
+            <a:endParaRPr lang="en-US" dirty="0">
+              <a:solidFill>
+                <a:srgbClr val="283C95"/>
+              </a:solidFill>
+              <a:latin typeface="Aptos ExtraBold" panose="020B0004020202020204" pitchFamily="34" charset="0"/>
+            </a:endParaRPr>
+          </a:p>
+        </p:txBody>
+      </p:sp>
+      <p:graphicFrame>
+        <p:nvGraphicFramePr>
+          <p:cNvPr id="4" name="Table 3">
+            <a:extLst>
+              <a:ext uri="{FF2B5EF4-FFF2-40B4-BE49-F238E27FC236}">
+                <a16:creationId xmlns:a16="http://schemas.microsoft.com/office/drawing/2014/main" id="{8F780BD3-F6DD-AEA2-77F9-76011242A91D}"/>
+              </a:ext>
+            </a:extLst>
+          </p:cNvPr>
+          <p:cNvGraphicFramePr>
+            <a:graphicFrameLocks noGrp="1"/>
+          </p:cNvGraphicFramePr>
+          <p:nvPr>
+            <p:extLst>
+              <p:ext uri="{D42A27DB-BD31-4B8C-83A1-F6EECF244321}">
+                <p14:modId xmlns:p14="http://schemas.microsoft.com/office/powerpoint/2010/main" val="263293637"/>
+              </p:ext>
+            </p:extLst>
+          </p:nvPr>
+        </p:nvGraphicFramePr>
+        <p:xfrm>
+          <a:off x="5499058" y="2158385"/>
+          <a:ext cx="6323705" cy="2541229"/>
+        </p:xfrm>
+        <a:graphic>
+          <a:graphicData uri="http://schemas.openxmlformats.org/drawingml/2006/table">
+            <a:tbl>
+              <a:tblPr firstRow="1" bandRow="1">
+                <a:tableStyleId>{5C22544A-7EE6-4342-B048-85BDC9FD1C3A}</a:tableStyleId>
+              </a:tblPr>
+              <a:tblGrid>
+                <a:gridCol w="1350654">
+                  <a:extLst>
+                    <a:ext uri="{9D8B030D-6E8A-4147-A177-3AD203B41FA5}">
+                      <a16:colId xmlns:a16="http://schemas.microsoft.com/office/drawing/2014/main" val="2131199604"/>
+                    </a:ext>
+                  </a:extLst>
+                </a:gridCol>
+                <a:gridCol w="1251284">
+                  <a:extLst>
+                    <a:ext uri="{9D8B030D-6E8A-4147-A177-3AD203B41FA5}">
+                      <a16:colId xmlns:a16="http://schemas.microsoft.com/office/drawing/2014/main" val="4078473568"/>
+                    </a:ext>
+                  </a:extLst>
+                </a:gridCol>
+                <a:gridCol w="1283368">
+                  <a:extLst>
+                    <a:ext uri="{9D8B030D-6E8A-4147-A177-3AD203B41FA5}">
+                      <a16:colId xmlns:a16="http://schemas.microsoft.com/office/drawing/2014/main" val="4078701055"/>
+                    </a:ext>
+                  </a:extLst>
+                </a:gridCol>
+                <a:gridCol w="1475874">
+                  <a:extLst>
+                    <a:ext uri="{9D8B030D-6E8A-4147-A177-3AD203B41FA5}">
+                      <a16:colId xmlns:a16="http://schemas.microsoft.com/office/drawing/2014/main" val="2646876911"/>
+                    </a:ext>
+                  </a:extLst>
+                </a:gridCol>
+                <a:gridCol w="962525">
+                  <a:extLst>
+                    <a:ext uri="{9D8B030D-6E8A-4147-A177-3AD203B41FA5}">
+                      <a16:colId xmlns:a16="http://schemas.microsoft.com/office/drawing/2014/main" val="3670492668"/>
+                    </a:ext>
+                  </a:extLst>
+                </a:gridCol>
+              </a:tblGrid>
+              <a:tr h="620989">
+                <a:tc>
+                  <a:txBody>
+                    <a:bodyPr/>
+                    <a:lstStyle/>
+                    <a:p>
+                      <a:pPr algn="ctr"/>
+                      <a:r>
+                        <a:rPr lang="en-US" sz="2500" dirty="0"/>
+                        <a:t>Model</a:t>
+                      </a:r>
+                    </a:p>
+                  </a:txBody>
+                  <a:tcPr anchor="ctr">
+                    <a:solidFill>
+                      <a:schemeClr val="accent1"/>
+                    </a:solidFill>
+                  </a:tcPr>
+                </a:tc>
+                <a:tc>
+                  <a:txBody>
+                    <a:bodyPr/>
+                    <a:lstStyle/>
+                    <a:p>
+                      <a:pPr algn="ctr"/>
+                      <a:r>
+                        <a:rPr lang="en-US" sz="2500" dirty="0"/>
+                        <a:t>RMSLE</a:t>
+                      </a:r>
+                    </a:p>
+                  </a:txBody>
+                  <a:tcPr anchor="ctr"/>
+                </a:tc>
+                <a:tc>
+                  <a:txBody>
+                    <a:bodyPr/>
+                    <a:lstStyle/>
+                    <a:p>
+                      <a:pPr algn="ctr"/>
+                      <a:r>
+                        <a:rPr lang="en-US" sz="2500" dirty="0"/>
+                        <a:t>RMSE</a:t>
+                      </a:r>
+                    </a:p>
+                  </a:txBody>
+                  <a:tcPr anchor="ctr"/>
+                </a:tc>
+                <a:tc>
+                  <a:txBody>
+                    <a:bodyPr/>
+                    <a:lstStyle/>
+                    <a:p>
+                      <a:pPr algn="ctr"/>
+                      <a:r>
+                        <a:rPr lang="en-US" sz="2500" dirty="0"/>
+                        <a:t>MSE</a:t>
+                      </a:r>
+                    </a:p>
+                  </a:txBody>
+                  <a:tcPr anchor="ctr"/>
+                </a:tc>
+                <a:tc>
+                  <a:txBody>
+                    <a:bodyPr/>
+                    <a:lstStyle/>
+                    <a:p>
+                      <a:pPr algn="ctr"/>
+                      <a:r>
+                        <a:rPr lang="en-US" sz="2500" dirty="0"/>
+                        <a:t>MAE</a:t>
+                      </a:r>
+                    </a:p>
+                  </a:txBody>
+                  <a:tcPr anchor="ctr"/>
+                </a:tc>
+                <a:extLst>
+                  <a:ext uri="{0D108BD9-81ED-4DB2-BD59-A6C34878D82A}">
+                    <a16:rowId xmlns:a16="http://schemas.microsoft.com/office/drawing/2014/main" val="2919094624"/>
+                  </a:ext>
+                </a:extLst>
+              </a:tr>
+              <a:tr h="620989">
+                <a:tc>
+                  <a:txBody>
+                    <a:bodyPr/>
+                    <a:lstStyle/>
+                    <a:p>
+                      <a:pPr algn="ctr"/>
+                      <a:r>
+                        <a:rPr lang="en-US" b="1" dirty="0">
+                          <a:solidFill>
+                            <a:schemeClr val="bg1"/>
+                          </a:solidFill>
+                        </a:rPr>
+                        <a:t>Linear Regression</a:t>
+                      </a:r>
+                    </a:p>
+                  </a:txBody>
+                  <a:tcPr anchor="ctr">
+                    <a:solidFill>
+                      <a:schemeClr val="accent1"/>
+                    </a:solidFill>
+                  </a:tcPr>
+                </a:tc>
+                <a:tc>
+                  <a:txBody>
+                    <a:bodyPr/>
+                    <a:lstStyle/>
+                    <a:p>
+                      <a:pPr algn="ctr"/>
+                      <a:r>
+                        <a:rPr lang="en-US" b="1" dirty="0"/>
+                        <a:t>1.552</a:t>
+                      </a:r>
+                    </a:p>
+                  </a:txBody>
+                  <a:tcPr anchor="ctr"/>
+                </a:tc>
+                <a:tc>
+                  <a:txBody>
+                    <a:bodyPr/>
+                    <a:lstStyle/>
+                    <a:p>
+                      <a:pPr algn="ctr"/>
+                      <a:r>
+                        <a:rPr lang="en-US" b="1" dirty="0"/>
+                        <a:t>569.81</a:t>
+                      </a:r>
+                    </a:p>
+                  </a:txBody>
+                  <a:tcPr anchor="ctr"/>
+                </a:tc>
+                <a:tc>
+                  <a:txBody>
+                    <a:bodyPr/>
+                    <a:lstStyle/>
+                    <a:p>
+                      <a:pPr algn="ctr"/>
+                      <a:r>
+                        <a:rPr lang="en-US" b="1" dirty="0"/>
+                        <a:t>324685.17</a:t>
+                      </a:r>
+                    </a:p>
+                  </a:txBody>
+                  <a:tcPr anchor="ctr"/>
+                </a:tc>
+                <a:tc>
+                  <a:txBody>
+                    <a:bodyPr/>
+                    <a:lstStyle/>
+                    <a:p>
+                      <a:pPr algn="ctr"/>
+                      <a:r>
+                        <a:rPr lang="en-US" b="1" dirty="0"/>
+                        <a:t>213.69</a:t>
+                      </a:r>
+                    </a:p>
+                  </a:txBody>
+                  <a:tcPr anchor="ctr"/>
+                </a:tc>
+                <a:extLst>
+                  <a:ext uri="{0D108BD9-81ED-4DB2-BD59-A6C34878D82A}">
+                    <a16:rowId xmlns:a16="http://schemas.microsoft.com/office/drawing/2014/main" val="23947187"/>
+                  </a:ext>
+                </a:extLst>
+              </a:tr>
+              <a:tr h="620989">
+                <a:tc>
+                  <a:txBody>
+                    <a:bodyPr/>
+                    <a:lstStyle/>
+                    <a:p>
+                      <a:pPr algn="ctr"/>
+                      <a:r>
+                        <a:rPr lang="en-US" b="1" dirty="0">
+                          <a:solidFill>
+                            <a:schemeClr val="bg1"/>
+                          </a:solidFill>
+                        </a:rPr>
+                        <a:t>Decision Tree</a:t>
+                      </a:r>
+                    </a:p>
+                  </a:txBody>
+                  <a:tcPr anchor="ctr">
+                    <a:solidFill>
+                      <a:schemeClr val="accent1"/>
+                    </a:solidFill>
+                  </a:tcPr>
+                </a:tc>
+                <a:tc>
+                  <a:txBody>
+                    <a:bodyPr/>
+                    <a:lstStyle/>
+                    <a:p>
+                      <a:pPr algn="ctr"/>
+                      <a:r>
+                        <a:rPr lang="en-US" b="1" dirty="0"/>
+                        <a:t>1.682</a:t>
+                      </a:r>
+                    </a:p>
+                  </a:txBody>
+                  <a:tcPr anchor="ctr"/>
+                </a:tc>
+                <a:tc>
+                  <a:txBody>
+                    <a:bodyPr/>
+                    <a:lstStyle/>
+                    <a:p>
+                      <a:pPr algn="ctr"/>
+                      <a:r>
+                        <a:rPr lang="en-US" b="1" dirty="0"/>
+                        <a:t>832.26</a:t>
+                      </a:r>
+                    </a:p>
+                  </a:txBody>
+                  <a:tcPr anchor="ctr"/>
+                </a:tc>
+                <a:tc>
+                  <a:txBody>
+                    <a:bodyPr/>
+                    <a:lstStyle/>
+                    <a:p>
+                      <a:pPr algn="ctr"/>
+                      <a:r>
+                        <a:rPr lang="en-US" b="1" dirty="0"/>
+                        <a:t>692660.93</a:t>
+                      </a:r>
+                    </a:p>
+                  </a:txBody>
+                  <a:tcPr anchor="ctr"/>
+                </a:tc>
+                <a:tc>
+                  <a:txBody>
+                    <a:bodyPr/>
+                    <a:lstStyle/>
+                    <a:p>
+                      <a:pPr algn="ctr"/>
+                      <a:r>
+                        <a:rPr lang="en-US" b="1" dirty="0"/>
+                        <a:t>289.28</a:t>
+                      </a:r>
+                    </a:p>
+                  </a:txBody>
+                  <a:tcPr anchor="ctr"/>
+                </a:tc>
+                <a:extLst>
+                  <a:ext uri="{0D108BD9-81ED-4DB2-BD59-A6C34878D82A}">
+                    <a16:rowId xmlns:a16="http://schemas.microsoft.com/office/drawing/2014/main" val="2137564356"/>
+                  </a:ext>
+                </a:extLst>
+              </a:tr>
+              <a:tr h="620989">
+                <a:tc>
+                  <a:txBody>
+                    <a:bodyPr/>
+                    <a:lstStyle/>
+                    <a:p>
+                      <a:pPr algn="ctr"/>
+                      <a:r>
+                        <a:rPr lang="en-US" b="1" dirty="0">
+                          <a:solidFill>
+                            <a:schemeClr val="bg1"/>
+                          </a:solidFill>
+                        </a:rPr>
+                        <a:t>Random Forest</a:t>
+                      </a:r>
+                    </a:p>
+                  </a:txBody>
+                  <a:tcPr anchor="ctr">
+                    <a:solidFill>
+                      <a:schemeClr val="accent1"/>
+                    </a:solidFill>
+                  </a:tcPr>
+                </a:tc>
+                <a:tc>
+                  <a:txBody>
+                    <a:bodyPr/>
+                    <a:lstStyle/>
+                    <a:p>
+                      <a:pPr algn="ctr"/>
+                      <a:r>
+                        <a:rPr lang="en-US" b="1" dirty="0"/>
+                        <a:t>1.554</a:t>
+                      </a:r>
+                    </a:p>
+                  </a:txBody>
+                  <a:tcPr anchor="ctr"/>
+                </a:tc>
+                <a:tc>
+                  <a:txBody>
+                    <a:bodyPr/>
+                    <a:lstStyle/>
+                    <a:p>
+                      <a:pPr algn="ctr"/>
+                      <a:r>
+                        <a:rPr lang="en-US" b="1" dirty="0"/>
+                        <a:t>668.04</a:t>
+                      </a:r>
+                    </a:p>
+                  </a:txBody>
+                  <a:tcPr anchor="ctr"/>
+                </a:tc>
+                <a:tc>
+                  <a:txBody>
+                    <a:bodyPr/>
+                    <a:lstStyle/>
+                    <a:p>
+                      <a:pPr algn="ctr"/>
+                      <a:r>
+                        <a:rPr lang="en-US" b="1" dirty="0"/>
+                        <a:t>4446271.71</a:t>
+                      </a:r>
+                    </a:p>
+                  </a:txBody>
+                  <a:tcPr anchor="ctr"/>
+                </a:tc>
+                <a:tc>
+                  <a:txBody>
+                    <a:bodyPr/>
+                    <a:lstStyle/>
+                    <a:p>
+                      <a:pPr algn="ctr"/>
+                      <a:r>
+                        <a:rPr lang="en-US" b="1" dirty="0"/>
+                        <a:t>248.64</a:t>
+                      </a:r>
+                    </a:p>
+                  </a:txBody>
+                  <a:tcPr anchor="ctr"/>
+                </a:tc>
+                <a:extLst>
+                  <a:ext uri="{0D108BD9-81ED-4DB2-BD59-A6C34878D82A}">
+                    <a16:rowId xmlns:a16="http://schemas.microsoft.com/office/drawing/2014/main" val="1878555358"/>
+                  </a:ext>
+                </a:extLst>
+              </a:tr>
+            </a:tbl>
+          </a:graphicData>
+        </a:graphic>
+      </p:graphicFrame>
+      <p:grpSp>
+        <p:nvGrpSpPr>
+          <p:cNvPr id="5" name="Group 4">
+            <a:extLst>
+              <a:ext uri="{FF2B5EF4-FFF2-40B4-BE49-F238E27FC236}">
+                <a16:creationId xmlns:a16="http://schemas.microsoft.com/office/drawing/2014/main" id="{FE9814EA-5E35-AD1C-3F4E-F7C54CB2DA6B}"/>
+              </a:ext>
+            </a:extLst>
+          </p:cNvPr>
+          <p:cNvGrpSpPr/>
+          <p:nvPr/>
+        </p:nvGrpSpPr>
+        <p:grpSpPr>
+          <a:xfrm>
+            <a:off x="369237" y="1378803"/>
+            <a:ext cx="7359316" cy="4873595"/>
+            <a:chOff x="4404946" y="3026182"/>
+            <a:chExt cx="11598853" cy="4171509"/>
+          </a:xfrm>
+        </p:grpSpPr>
+        <p:sp>
+          <p:nvSpPr>
+            <p:cNvPr id="9" name="TextBox 8">
+              <a:extLst>
+                <a:ext uri="{FF2B5EF4-FFF2-40B4-BE49-F238E27FC236}">
+                  <a16:creationId xmlns:a16="http://schemas.microsoft.com/office/drawing/2014/main" id="{34646F92-271B-9274-5265-0A5CB14EC712}"/>
+                </a:ext>
+              </a:extLst>
+            </p:cNvPr>
+            <p:cNvSpPr txBox="1"/>
+            <p:nvPr/>
+          </p:nvSpPr>
+          <p:spPr>
+            <a:xfrm>
+              <a:off x="4404946" y="5959530"/>
+              <a:ext cx="11598853" cy="1238161"/>
+            </a:xfrm>
+            <a:prstGeom prst="rect">
+              <a:avLst/>
+            </a:prstGeom>
+            <a:noFill/>
+          </p:spPr>
+          <p:txBody>
+            <a:bodyPr wrap="square" rtlCol="0">
+              <a:spAutoFit/>
+            </a:bodyPr>
+            <a:lstStyle/>
+            <a:p>
+              <a:r>
+                <a:rPr lang="en-US" sz="2800" b="1" i="0" dirty="0">
+                  <a:solidFill>
+                    <a:srgbClr val="283C95"/>
+                  </a:solidFill>
+                  <a:effectLst/>
+                  <a:latin typeface="+mj-lt"/>
+                </a:rPr>
+                <a:t>Conclusion</a:t>
+              </a:r>
+            </a:p>
+            <a:p>
+              <a:r>
+                <a:rPr lang="en-US" sz="2000" b="1" dirty="0"/>
+                <a:t>Cross-validation confirms that Random Forest is the most robust overall, while Linear Regression is still surprisingly strong as a baseline.</a:t>
+              </a:r>
+            </a:p>
+          </p:txBody>
+        </p:sp>
+        <p:sp>
+          <p:nvSpPr>
+            <p:cNvPr id="10" name="TextBox 9">
+              <a:extLst>
+                <a:ext uri="{FF2B5EF4-FFF2-40B4-BE49-F238E27FC236}">
+                  <a16:creationId xmlns:a16="http://schemas.microsoft.com/office/drawing/2014/main" id="{662474E2-95D3-6C33-DD52-69A00A351228}"/>
+                </a:ext>
+              </a:extLst>
+            </p:cNvPr>
+            <p:cNvSpPr txBox="1"/>
+            <p:nvPr/>
+          </p:nvSpPr>
+          <p:spPr>
+            <a:xfrm>
+              <a:off x="4404946" y="3026182"/>
+              <a:ext cx="7787054" cy="2818792"/>
+            </a:xfrm>
+            <a:prstGeom prst="rect">
+              <a:avLst/>
+            </a:prstGeom>
+            <a:noFill/>
+          </p:spPr>
+          <p:txBody>
+            <a:bodyPr wrap="square" rtlCol="0">
+              <a:spAutoFit/>
+            </a:bodyPr>
+            <a:lstStyle/>
+            <a:p>
+              <a:r>
+                <a:rPr lang="en-US" sz="2800" b="1" dirty="0">
+                  <a:solidFill>
+                    <a:srgbClr val="283C95"/>
+                  </a:solidFill>
+                  <a:latin typeface="+mj-lt"/>
+                </a:rPr>
+                <a:t>Interpretation</a:t>
+              </a:r>
+              <a:r>
+                <a:rPr lang="en-US" sz="2400" b="0" i="0" dirty="0">
+                  <a:solidFill>
+                    <a:srgbClr val="F8FAFF"/>
+                  </a:solidFill>
+                  <a:effectLst/>
+                  <a:latin typeface="Inter"/>
+                </a:rPr>
+                <a:t>:</a:t>
+              </a:r>
+            </a:p>
+            <a:p>
+              <a:pPr marL="342900" indent="-342900" algn="l">
+                <a:buFont typeface="Arial" panose="020B0604020202020204" pitchFamily="34" charset="0"/>
+                <a:buChar char="•"/>
+              </a:pPr>
+              <a:r>
+                <a:rPr lang="en-US" sz="2000" b="1" dirty="0"/>
+                <a:t>Linear Regression</a:t>
+              </a:r>
+              <a:r>
+                <a:rPr lang="en-US" sz="2000" dirty="0"/>
+                <a:t> has the lowest average MAE, indicating the most consistent performance across folds.</a:t>
+              </a:r>
+            </a:p>
+            <a:p>
+              <a:pPr marL="342900" indent="-342900" algn="l">
+                <a:buFont typeface="Arial" panose="020B0604020202020204" pitchFamily="34" charset="0"/>
+                <a:buChar char="•"/>
+              </a:pPr>
+              <a:r>
+                <a:rPr lang="en-US" sz="2000" b="1" dirty="0"/>
+                <a:t>Random Forest</a:t>
+              </a:r>
+              <a:r>
+                <a:rPr lang="en-US" sz="2000" dirty="0"/>
+                <a:t> provides a good tradeoff: lower RMSLE and RMSE than Decision Tree while keeping MAE close to Linear Regression.</a:t>
+              </a:r>
+            </a:p>
+            <a:p>
+              <a:pPr marL="342900" indent="-342900" algn="l">
+                <a:buFont typeface="Arial" panose="020B0604020202020204" pitchFamily="34" charset="0"/>
+                <a:buChar char="•"/>
+              </a:pPr>
+              <a:r>
+                <a:rPr lang="en-US" sz="2000" b="1" dirty="0"/>
+                <a:t>Decision Tree</a:t>
+              </a:r>
+              <a:r>
+                <a:rPr lang="en-US" sz="2000" dirty="0"/>
+                <a:t> performs the worst, confirming its tendency to overfit.</a:t>
+              </a:r>
+              <a:endParaRPr lang="en-US" sz="2000" b="1" dirty="0"/>
+            </a:p>
+          </p:txBody>
+        </p:sp>
+      </p:grpSp>
+      <p:sp>
+        <p:nvSpPr>
+          <p:cNvPr id="11" name="Rectangle 10">
+            <a:extLst>
+              <a:ext uri="{FF2B5EF4-FFF2-40B4-BE49-F238E27FC236}">
+                <a16:creationId xmlns:a16="http://schemas.microsoft.com/office/drawing/2014/main" id="{F93E461F-0917-1443-CBFB-591D68DA2F62}"/>
+              </a:ext>
+            </a:extLst>
+          </p:cNvPr>
+          <p:cNvSpPr/>
+          <p:nvPr/>
+        </p:nvSpPr>
+        <p:spPr>
+          <a:xfrm rot="20111035">
+            <a:off x="7892328" y="-5055192"/>
+            <a:ext cx="5097767" cy="5189901"/>
+          </a:xfrm>
+          <a:prstGeom prst="rect">
+            <a:avLst/>
+          </a:prstGeom>
+          <a:noFill/>
+          <a:ln>
+            <a:solidFill>
+              <a:srgbClr val="283C95"/>
+            </a:solidFill>
+          </a:ln>
+        </p:spPr>
+        <p:style>
+          <a:lnRef idx="2">
+            <a:schemeClr val="accent1">
+              <a:shade val="15000"/>
+            </a:schemeClr>
+          </a:lnRef>
+          <a:fillRef idx="1">
+            <a:schemeClr val="accent1"/>
+          </a:fillRef>
+          <a:effectRef idx="0">
+            <a:schemeClr val="accent1"/>
+          </a:effectRef>
+          <a:fontRef idx="minor">
+            <a:schemeClr val="lt1"/>
+          </a:fontRef>
+        </p:style>
+        <p:txBody>
+          <a:bodyPr rtlCol="0" anchor="ctr"/>
+          <a:lstStyle/>
+          <a:p>
+            <a:pPr algn="ctr"/>
+            <a:endParaRPr lang="en-US"/>
+          </a:p>
+        </p:txBody>
+      </p:sp>
+      <p:sp>
+        <p:nvSpPr>
+          <p:cNvPr id="12" name="Rectangle 11">
+            <a:extLst>
+              <a:ext uri="{FF2B5EF4-FFF2-40B4-BE49-F238E27FC236}">
+                <a16:creationId xmlns:a16="http://schemas.microsoft.com/office/drawing/2014/main" id="{F6BC80EA-7928-0AE8-83D6-2E63404202F8}"/>
+              </a:ext>
+            </a:extLst>
+          </p:cNvPr>
+          <p:cNvSpPr/>
+          <p:nvPr/>
+        </p:nvSpPr>
+        <p:spPr>
+          <a:xfrm rot="20111035">
+            <a:off x="8474283" y="-5055192"/>
+            <a:ext cx="5097767" cy="5189901"/>
+          </a:xfrm>
+          <a:prstGeom prst="rect">
+            <a:avLst/>
+          </a:prstGeom>
+          <a:noFill/>
+          <a:ln>
+            <a:solidFill>
+              <a:srgbClr val="283C95"/>
+            </a:solidFill>
+          </a:ln>
+        </p:spPr>
+        <p:style>
+          <a:lnRef idx="2">
+            <a:schemeClr val="accent1">
+              <a:shade val="15000"/>
+            </a:schemeClr>
+          </a:lnRef>
+          <a:fillRef idx="1">
+            <a:schemeClr val="accent1"/>
+          </a:fillRef>
+          <a:effectRef idx="0">
+            <a:schemeClr val="accent1"/>
+          </a:effectRef>
+          <a:fontRef idx="minor">
+            <a:schemeClr val="lt1"/>
+          </a:fontRef>
+        </p:style>
+        <p:txBody>
+          <a:bodyPr rtlCol="0" anchor="ctr"/>
+          <a:lstStyle/>
+          <a:p>
+            <a:pPr algn="ctr"/>
+            <a:endParaRPr lang="en-US" dirty="0"/>
+          </a:p>
+        </p:txBody>
+      </p:sp>
+      <p:sp>
+        <p:nvSpPr>
+          <p:cNvPr id="13" name="Rectangle 12">
+            <a:extLst>
+              <a:ext uri="{FF2B5EF4-FFF2-40B4-BE49-F238E27FC236}">
+                <a16:creationId xmlns:a16="http://schemas.microsoft.com/office/drawing/2014/main" id="{7D11ED55-E885-9BAE-C02C-1D09CA190143}"/>
+              </a:ext>
+            </a:extLst>
+          </p:cNvPr>
+          <p:cNvSpPr/>
+          <p:nvPr/>
+        </p:nvSpPr>
+        <p:spPr>
+          <a:xfrm rot="20111035">
+            <a:off x="9056238" y="-5055192"/>
+            <a:ext cx="5097767" cy="5189901"/>
+          </a:xfrm>
+          <a:prstGeom prst="rect">
+            <a:avLst/>
+          </a:prstGeom>
+          <a:noFill/>
+          <a:ln>
+            <a:solidFill>
+              <a:srgbClr val="283C95"/>
+            </a:solidFill>
+          </a:ln>
+        </p:spPr>
+        <p:style>
+          <a:lnRef idx="2">
+            <a:schemeClr val="accent1">
+              <a:shade val="15000"/>
+            </a:schemeClr>
+          </a:lnRef>
+          <a:fillRef idx="1">
+            <a:schemeClr val="accent1"/>
+          </a:fillRef>
+          <a:effectRef idx="0">
+            <a:schemeClr val="accent1"/>
+          </a:effectRef>
+          <a:fontRef idx="minor">
+            <a:schemeClr val="lt1"/>
+          </a:fontRef>
+        </p:style>
+        <p:txBody>
+          <a:bodyPr rtlCol="0" anchor="ctr"/>
+          <a:lstStyle/>
+          <a:p>
+            <a:pPr algn="ctr"/>
+            <a:endParaRPr lang="en-US" dirty="0"/>
+          </a:p>
+        </p:txBody>
+      </p:sp>
+      <p:sp>
+        <p:nvSpPr>
+          <p:cNvPr id="14" name="Rectangle 13">
+            <a:extLst>
+              <a:ext uri="{FF2B5EF4-FFF2-40B4-BE49-F238E27FC236}">
+                <a16:creationId xmlns:a16="http://schemas.microsoft.com/office/drawing/2014/main" id="{8EF83524-8B88-2198-018B-147B3725B0F4}"/>
+              </a:ext>
+            </a:extLst>
+          </p:cNvPr>
+          <p:cNvSpPr/>
+          <p:nvPr/>
+        </p:nvSpPr>
+        <p:spPr>
+          <a:xfrm rot="20111035">
+            <a:off x="6590703" y="6792879"/>
+            <a:ext cx="5097767" cy="5189901"/>
+          </a:xfrm>
+          <a:prstGeom prst="rect">
+            <a:avLst/>
+          </a:prstGeom>
+          <a:noFill/>
+          <a:ln>
+            <a:solidFill>
+              <a:srgbClr val="283C95"/>
+            </a:solidFill>
+          </a:ln>
+        </p:spPr>
+        <p:style>
+          <a:lnRef idx="2">
+            <a:schemeClr val="accent1">
+              <a:shade val="15000"/>
+            </a:schemeClr>
+          </a:lnRef>
+          <a:fillRef idx="1">
+            <a:schemeClr val="accent1"/>
+          </a:fillRef>
+          <a:effectRef idx="0">
+            <a:schemeClr val="accent1"/>
+          </a:effectRef>
+          <a:fontRef idx="minor">
+            <a:schemeClr val="lt1"/>
+          </a:fontRef>
+        </p:style>
+        <p:txBody>
+          <a:bodyPr rtlCol="0" anchor="ctr"/>
+          <a:lstStyle/>
+          <a:p>
+            <a:pPr algn="ctr"/>
+            <a:endParaRPr lang="en-US"/>
+          </a:p>
+        </p:txBody>
+      </p:sp>
+      <p:sp>
+        <p:nvSpPr>
+          <p:cNvPr id="15" name="Rectangle 14">
+            <a:extLst>
+              <a:ext uri="{FF2B5EF4-FFF2-40B4-BE49-F238E27FC236}">
+                <a16:creationId xmlns:a16="http://schemas.microsoft.com/office/drawing/2014/main" id="{1A2339D0-71CA-D39D-0D6B-1E3F119EF5B4}"/>
+              </a:ext>
+            </a:extLst>
+          </p:cNvPr>
+          <p:cNvSpPr/>
+          <p:nvPr/>
+        </p:nvSpPr>
+        <p:spPr>
+          <a:xfrm rot="20111035">
+            <a:off x="7172658" y="6792879"/>
+            <a:ext cx="5097767" cy="5189901"/>
+          </a:xfrm>
+          <a:prstGeom prst="rect">
+            <a:avLst/>
+          </a:prstGeom>
+          <a:noFill/>
+          <a:ln>
+            <a:solidFill>
+              <a:srgbClr val="283C95"/>
+            </a:solidFill>
+          </a:ln>
+        </p:spPr>
+        <p:style>
+          <a:lnRef idx="2">
+            <a:schemeClr val="accent1">
+              <a:shade val="15000"/>
+            </a:schemeClr>
+          </a:lnRef>
+          <a:fillRef idx="1">
+            <a:schemeClr val="accent1"/>
+          </a:fillRef>
+          <a:effectRef idx="0">
+            <a:schemeClr val="accent1"/>
+          </a:effectRef>
+          <a:fontRef idx="minor">
+            <a:schemeClr val="lt1"/>
+          </a:fontRef>
+        </p:style>
+        <p:txBody>
+          <a:bodyPr rtlCol="0" anchor="ctr"/>
+          <a:lstStyle/>
+          <a:p>
+            <a:pPr algn="ctr"/>
+            <a:endParaRPr lang="en-US" dirty="0"/>
+          </a:p>
+        </p:txBody>
+      </p:sp>
+      <p:sp>
+        <p:nvSpPr>
+          <p:cNvPr id="16" name="Rectangle 15">
+            <a:extLst>
+              <a:ext uri="{FF2B5EF4-FFF2-40B4-BE49-F238E27FC236}">
+                <a16:creationId xmlns:a16="http://schemas.microsoft.com/office/drawing/2014/main" id="{D15B4C97-393C-D56A-8D0E-71AEB98E1DBF}"/>
+              </a:ext>
+            </a:extLst>
+          </p:cNvPr>
+          <p:cNvSpPr/>
+          <p:nvPr/>
+        </p:nvSpPr>
+        <p:spPr>
+          <a:xfrm rot="20111035">
+            <a:off x="7754613" y="6792879"/>
+            <a:ext cx="5097767" cy="5189901"/>
+          </a:xfrm>
+          <a:prstGeom prst="rect">
+            <a:avLst/>
+          </a:prstGeom>
+          <a:noFill/>
+          <a:ln>
+            <a:solidFill>
+              <a:srgbClr val="283C95"/>
+            </a:solidFill>
+          </a:ln>
+        </p:spPr>
+        <p:style>
+          <a:lnRef idx="2">
+            <a:schemeClr val="accent1">
+              <a:shade val="15000"/>
+            </a:schemeClr>
+          </a:lnRef>
+          <a:fillRef idx="1">
+            <a:schemeClr val="accent1"/>
+          </a:fillRef>
+          <a:effectRef idx="0">
+            <a:schemeClr val="accent1"/>
+          </a:effectRef>
+          <a:fontRef idx="minor">
+            <a:schemeClr val="lt1"/>
+          </a:fontRef>
+        </p:style>
+        <p:txBody>
+          <a:bodyPr rtlCol="0" anchor="ctr"/>
+          <a:lstStyle/>
+          <a:p>
+            <a:pPr algn="ctr"/>
+            <a:endParaRPr lang="en-US" dirty="0"/>
+          </a:p>
+        </p:txBody>
+      </p:sp>
+    </p:spTree>
+    <p:extLst>
+      <p:ext uri="{BB962C8B-B14F-4D97-AF65-F5344CB8AC3E}">
+        <p14:creationId xmlns:p14="http://schemas.microsoft.com/office/powerpoint/2010/main" val="1096316572"/>
+      </p:ext>
+    </p:extLst>
+  </p:cSld>
+  <p:clrMapOvr>
+    <a:masterClrMapping/>
+  </p:clrMapOvr>
+  <mc:AlternateContent xmlns:mc="http://schemas.openxmlformats.org/markup-compatibility/2006">
+    <mc:Choice xmlns:p159="http://schemas.microsoft.com/office/powerpoint/2015/09/main" Requires="p159">
+      <p:transition spd="slow">
+        <p159:morph option="byObject"/>
+      </p:transition>
+    </mc:Choice>
+    <mc:Fallback>
+      <p:transition spd="slow">
+        <p:fade/>
+      </p:transition>
+    </mc:Fallback>
+  </mc:AlternateContent>
+</p:sld>
+</file>
+
+<file path=ppt/slides/slide26.xml><?xml version="1.0" encoding="utf-8"?>
 <p:sld xmlns:a="http://schemas.openxmlformats.org/drawingml/2006/main" xmlns:r="http://schemas.openxmlformats.org/officeDocument/2006/relationships" xmlns:p="http://schemas.openxmlformats.org/presentationml/2006/main">
   <p:cSld>
     <p:spTree>
@@ -6596,10 +12595,22 @@
   <p:clrMapOvr>
     <a:masterClrMapping/>
   </p:clrMapOvr>
+  <mc:AlternateContent xmlns:mc="http://schemas.openxmlformats.org/markup-compatibility/2006">
+    <mc:Choice xmlns:p159="http://schemas.microsoft.com/office/powerpoint/2015/09/main" Requires="p159">
+      <p:transition spd="slow">
+        <p159:morph option="byObject"/>
+      </p:transition>
+    </mc:Choice>
+    <mc:Fallback>
+      <p:transition spd="slow">
+        <p:fade/>
+      </p:transition>
+    </mc:Fallback>
+  </mc:AlternateContent>
 </p:sld>
 </file>
 
-<file path=ppt/slides/slide19.xml><?xml version="1.0" encoding="utf-8"?>
+<file path=ppt/slides/slide27.xml><?xml version="1.0" encoding="utf-8"?>
 <p:sld xmlns:a="http://schemas.openxmlformats.org/drawingml/2006/main" xmlns:r="http://schemas.openxmlformats.org/officeDocument/2006/relationships" xmlns:p="http://schemas.openxmlformats.org/presentationml/2006/main">
   <p:cSld>
     <p:spTree>
@@ -6720,9 +12731,9 @@
         <p:grpSpPr>
           <a:xfrm>
             <a:off x="574428" y="2729093"/>
-            <a:ext cx="8768861" cy="1184482"/>
+            <a:ext cx="8768861" cy="1148276"/>
             <a:chOff x="574431" y="2714582"/>
-            <a:chExt cx="8768861" cy="1184482"/>
+            <a:chExt cx="8768861" cy="1148276"/>
           </a:xfrm>
         </p:grpSpPr>
         <p:sp>
@@ -6809,7 +12820,7 @@
           </p:nvSpPr>
           <p:spPr>
             <a:xfrm>
-              <a:off x="3739660" y="3437399"/>
+              <a:off x="3739660" y="3397643"/>
               <a:ext cx="2192217" cy="461665"/>
             </a:xfrm>
             <a:prstGeom prst="rect">
@@ -6825,7 +12836,7 @@
             <a:p>
               <a:r>
                 <a:rPr lang="en-US" sz="2400" b="1" dirty="0"/>
-                <a:t>Michel Emad</a:t>
+                <a:t>Micheal Emad</a:t>
               </a:r>
             </a:p>
           </p:txBody>
@@ -7116,413 +13127,13 @@
   <p:clrMapOvr>
     <a:masterClrMapping/>
   </p:clrMapOvr>
-</p:sld>
-</file>
-
-<file path=ppt/slides/slide2.xml><?xml version="1.0" encoding="utf-8"?>
-<p:sld xmlns:a="http://schemas.openxmlformats.org/drawingml/2006/main" xmlns:r="http://schemas.openxmlformats.org/officeDocument/2006/relationships" xmlns:p="http://schemas.openxmlformats.org/presentationml/2006/main">
-  <p:cSld>
-    <p:spTree>
-      <p:nvGrpSpPr>
-        <p:cNvPr id="1" name=""/>
-        <p:cNvGrpSpPr/>
-        <p:nvPr/>
-      </p:nvGrpSpPr>
-      <p:grpSpPr>
-        <a:xfrm>
-          <a:off x="0" y="0"/>
-          <a:ext cx="0" cy="0"/>
-          <a:chOff x="0" y="0"/>
-          <a:chExt cx="0" cy="0"/>
-        </a:xfrm>
-      </p:grpSpPr>
-      <p:sp>
-        <p:nvSpPr>
-          <p:cNvPr id="2" name="Title 1">
-            <a:extLst>
-              <a:ext uri="{FF2B5EF4-FFF2-40B4-BE49-F238E27FC236}">
-                <a16:creationId xmlns:a16="http://schemas.microsoft.com/office/drawing/2014/main" id="{B3A4D9AD-6F2F-26C9-7774-2EEBCA3D6945}"/>
-              </a:ext>
-            </a:extLst>
-          </p:cNvPr>
-          <p:cNvSpPr>
-            <a:spLocks noGrp="1"/>
-          </p:cNvSpPr>
-          <p:nvPr>
-            <p:ph type="title"/>
-          </p:nvPr>
-        </p:nvSpPr>
-        <p:spPr/>
-        <p:txBody>
-          <a:bodyPr/>
-          <a:lstStyle/>
-          <a:p>
-            <a:r>
-              <a:rPr lang="en-US" dirty="0">
-                <a:solidFill>
-                  <a:srgbClr val="283C95"/>
-                </a:solidFill>
-                <a:latin typeface="Aptos ExtraBold" panose="020B0004020202020204" pitchFamily="34" charset="0"/>
-              </a:rPr>
-              <a:t>CONTENT</a:t>
-            </a:r>
-          </a:p>
-        </p:txBody>
-      </p:sp>
-      <p:sp>
-        <p:nvSpPr>
-          <p:cNvPr id="8" name="Rectangle 7">
-            <a:extLst>
-              <a:ext uri="{FF2B5EF4-FFF2-40B4-BE49-F238E27FC236}">
-                <a16:creationId xmlns:a16="http://schemas.microsoft.com/office/drawing/2014/main" id="{21E05427-1858-586C-8989-14B624E4E6BD}"/>
-              </a:ext>
-            </a:extLst>
-          </p:cNvPr>
-          <p:cNvSpPr/>
-          <p:nvPr/>
-        </p:nvSpPr>
-        <p:spPr>
-          <a:xfrm rot="20111035">
-            <a:off x="9061161" y="633756"/>
-            <a:ext cx="5097767" cy="5189901"/>
-          </a:xfrm>
-          <a:prstGeom prst="rect">
-            <a:avLst/>
-          </a:prstGeom>
-          <a:noFill/>
-          <a:ln>
-            <a:solidFill>
-              <a:srgbClr val="283C95"/>
-            </a:solidFill>
-          </a:ln>
-        </p:spPr>
-        <p:style>
-          <a:lnRef idx="2">
-            <a:schemeClr val="accent1">
-              <a:shade val="15000"/>
-            </a:schemeClr>
-          </a:lnRef>
-          <a:fillRef idx="1">
-            <a:schemeClr val="accent1"/>
-          </a:fillRef>
-          <a:effectRef idx="0">
-            <a:schemeClr val="accent1"/>
-          </a:effectRef>
-          <a:fontRef idx="minor">
-            <a:schemeClr val="lt1"/>
-          </a:fontRef>
-        </p:style>
-        <p:txBody>
-          <a:bodyPr rtlCol="0" anchor="ctr"/>
-          <a:lstStyle/>
-          <a:p>
-            <a:pPr algn="ctr"/>
-            <a:endParaRPr lang="en-US"/>
-          </a:p>
-        </p:txBody>
-      </p:sp>
-      <p:sp>
-        <p:nvSpPr>
-          <p:cNvPr id="9" name="Rectangle 8">
-            <a:extLst>
-              <a:ext uri="{FF2B5EF4-FFF2-40B4-BE49-F238E27FC236}">
-                <a16:creationId xmlns:a16="http://schemas.microsoft.com/office/drawing/2014/main" id="{AAB8DB72-8F49-7F69-E574-006AEC5E2540}"/>
-              </a:ext>
-            </a:extLst>
-          </p:cNvPr>
-          <p:cNvSpPr/>
-          <p:nvPr/>
-        </p:nvSpPr>
-        <p:spPr>
-          <a:xfrm rot="20111035">
-            <a:off x="9643116" y="633756"/>
-            <a:ext cx="5097767" cy="5189901"/>
-          </a:xfrm>
-          <a:prstGeom prst="rect">
-            <a:avLst/>
-          </a:prstGeom>
-          <a:noFill/>
-          <a:ln>
-            <a:solidFill>
-              <a:srgbClr val="283C95"/>
-            </a:solidFill>
-          </a:ln>
-        </p:spPr>
-        <p:style>
-          <a:lnRef idx="2">
-            <a:schemeClr val="accent1">
-              <a:shade val="15000"/>
-            </a:schemeClr>
-          </a:lnRef>
-          <a:fillRef idx="1">
-            <a:schemeClr val="accent1"/>
-          </a:fillRef>
-          <a:effectRef idx="0">
-            <a:schemeClr val="accent1"/>
-          </a:effectRef>
-          <a:fontRef idx="minor">
-            <a:schemeClr val="lt1"/>
-          </a:fontRef>
-        </p:style>
-        <p:txBody>
-          <a:bodyPr rtlCol="0" anchor="ctr"/>
-          <a:lstStyle/>
-          <a:p>
-            <a:pPr algn="ctr"/>
-            <a:endParaRPr lang="en-US" dirty="0"/>
-          </a:p>
-        </p:txBody>
-      </p:sp>
-      <p:sp>
-        <p:nvSpPr>
-          <p:cNvPr id="10" name="Rectangle 9">
-            <a:extLst>
-              <a:ext uri="{FF2B5EF4-FFF2-40B4-BE49-F238E27FC236}">
-                <a16:creationId xmlns:a16="http://schemas.microsoft.com/office/drawing/2014/main" id="{D992B7BB-C55B-15A3-2B9A-AED9C58A7566}"/>
-              </a:ext>
-            </a:extLst>
-          </p:cNvPr>
-          <p:cNvSpPr/>
-          <p:nvPr/>
-        </p:nvSpPr>
-        <p:spPr>
-          <a:xfrm rot="20111035">
-            <a:off x="10225071" y="633756"/>
-            <a:ext cx="5097767" cy="5189901"/>
-          </a:xfrm>
-          <a:prstGeom prst="rect">
-            <a:avLst/>
-          </a:prstGeom>
-          <a:noFill/>
-          <a:ln>
-            <a:solidFill>
-              <a:srgbClr val="283C95"/>
-            </a:solidFill>
-          </a:ln>
-        </p:spPr>
-        <p:style>
-          <a:lnRef idx="2">
-            <a:schemeClr val="accent1">
-              <a:shade val="15000"/>
-            </a:schemeClr>
-          </a:lnRef>
-          <a:fillRef idx="1">
-            <a:schemeClr val="accent1"/>
-          </a:fillRef>
-          <a:effectRef idx="0">
-            <a:schemeClr val="accent1"/>
-          </a:effectRef>
-          <a:fontRef idx="minor">
-            <a:schemeClr val="lt1"/>
-          </a:fontRef>
-        </p:style>
-        <p:txBody>
-          <a:bodyPr rtlCol="0" anchor="ctr"/>
-          <a:lstStyle/>
-          <a:p>
-            <a:pPr algn="ctr"/>
-            <a:endParaRPr lang="en-US" dirty="0"/>
-          </a:p>
-        </p:txBody>
-      </p:sp>
-      <p:grpSp>
-        <p:nvGrpSpPr>
-          <p:cNvPr id="17" name="Group 16">
-            <a:extLst>
-              <a:ext uri="{FF2B5EF4-FFF2-40B4-BE49-F238E27FC236}">
-                <a16:creationId xmlns:a16="http://schemas.microsoft.com/office/drawing/2014/main" id="{A214EB59-30A1-3232-96B2-B5A54BF9D706}"/>
-              </a:ext>
-            </a:extLst>
-          </p:cNvPr>
-          <p:cNvGrpSpPr/>
-          <p:nvPr/>
-        </p:nvGrpSpPr>
-        <p:grpSpPr>
-          <a:xfrm>
-            <a:off x="838200" y="2317166"/>
-            <a:ext cx="5827776" cy="2223668"/>
-            <a:chOff x="838200" y="1823231"/>
-            <a:chExt cx="5827776" cy="2223668"/>
-          </a:xfrm>
-        </p:grpSpPr>
-        <p:sp>
-          <p:nvSpPr>
-            <p:cNvPr id="11" name="TextBox 10">
-              <a:extLst>
-                <a:ext uri="{FF2B5EF4-FFF2-40B4-BE49-F238E27FC236}">
-                  <a16:creationId xmlns:a16="http://schemas.microsoft.com/office/drawing/2014/main" id="{8D63E177-2AF5-6E8F-9032-39D23A9C0063}"/>
-                </a:ext>
-              </a:extLst>
-            </p:cNvPr>
-            <p:cNvSpPr txBox="1"/>
-            <p:nvPr/>
-          </p:nvSpPr>
-          <p:spPr>
-            <a:xfrm>
-              <a:off x="838200" y="1823231"/>
-              <a:ext cx="5827776" cy="461665"/>
-            </a:xfrm>
-            <a:prstGeom prst="rect">
-              <a:avLst/>
-            </a:prstGeom>
-            <a:noFill/>
-          </p:spPr>
-          <p:txBody>
-            <a:bodyPr wrap="square" rtlCol="0">
-              <a:spAutoFit/>
-            </a:bodyPr>
-            <a:lstStyle/>
-            <a:p>
-              <a:r>
-                <a:rPr lang="en-US" sz="2400" dirty="0">
-                  <a:solidFill>
-                    <a:srgbClr val="283C95"/>
-                  </a:solidFill>
-                  <a:latin typeface="Aptos ExtraBold" panose="020B0004020202020204" pitchFamily="34" charset="0"/>
-                </a:rPr>
-                <a:t>01 Introduction</a:t>
-              </a:r>
-            </a:p>
-          </p:txBody>
-        </p:sp>
-        <p:sp>
-          <p:nvSpPr>
-            <p:cNvPr id="12" name="TextBox 11">
-              <a:extLst>
-                <a:ext uri="{FF2B5EF4-FFF2-40B4-BE49-F238E27FC236}">
-                  <a16:creationId xmlns:a16="http://schemas.microsoft.com/office/drawing/2014/main" id="{61D39F05-96A8-B56E-3C53-03CDFD864544}"/>
-                </a:ext>
-              </a:extLst>
-            </p:cNvPr>
-            <p:cNvSpPr txBox="1"/>
-            <p:nvPr/>
-          </p:nvSpPr>
-          <p:spPr>
-            <a:xfrm>
-              <a:off x="838200" y="2399469"/>
-              <a:ext cx="5827776" cy="461665"/>
-            </a:xfrm>
-            <a:prstGeom prst="rect">
-              <a:avLst/>
-            </a:prstGeom>
-            <a:noFill/>
-          </p:spPr>
-          <p:txBody>
-            <a:bodyPr wrap="square" rtlCol="0">
-              <a:spAutoFit/>
-            </a:bodyPr>
-            <a:lstStyle/>
-            <a:p>
-              <a:r>
-                <a:rPr lang="en-US" sz="2400" dirty="0">
-                  <a:solidFill>
-                    <a:srgbClr val="283C95"/>
-                  </a:solidFill>
-                  <a:latin typeface="Aptos ExtraBold" panose="020B0004020202020204" pitchFamily="34" charset="0"/>
-                </a:rPr>
-                <a:t>02 Dataset Overview</a:t>
-              </a:r>
-            </a:p>
-          </p:txBody>
-        </p:sp>
-        <p:sp>
-          <p:nvSpPr>
-            <p:cNvPr id="13" name="TextBox 12">
-              <a:extLst>
-                <a:ext uri="{FF2B5EF4-FFF2-40B4-BE49-F238E27FC236}">
-                  <a16:creationId xmlns:a16="http://schemas.microsoft.com/office/drawing/2014/main" id="{E381D678-F5CA-B6A2-5615-AA5E1A23EA41}"/>
-                </a:ext>
-              </a:extLst>
-            </p:cNvPr>
-            <p:cNvSpPr txBox="1"/>
-            <p:nvPr/>
-          </p:nvSpPr>
-          <p:spPr>
-            <a:xfrm>
-              <a:off x="838200" y="2991026"/>
-              <a:ext cx="5827776" cy="461665"/>
-            </a:xfrm>
-            <a:prstGeom prst="rect">
-              <a:avLst/>
-            </a:prstGeom>
-            <a:noFill/>
-          </p:spPr>
-          <p:txBody>
-            <a:bodyPr wrap="square" rtlCol="0">
-              <a:spAutoFit/>
-            </a:bodyPr>
-            <a:lstStyle/>
-            <a:p>
-              <a:r>
-                <a:rPr lang="en-US" sz="2400" dirty="0">
-                  <a:solidFill>
-                    <a:srgbClr val="283C95"/>
-                  </a:solidFill>
-                  <a:latin typeface="Aptos ExtraBold" panose="020B0004020202020204" pitchFamily="34" charset="0"/>
-                </a:rPr>
-                <a:t>03 Data Cleaning and Preprocessing</a:t>
-              </a:r>
-            </a:p>
-          </p:txBody>
-        </p:sp>
-        <p:sp>
-          <p:nvSpPr>
-            <p:cNvPr id="14" name="TextBox 13">
-              <a:extLst>
-                <a:ext uri="{FF2B5EF4-FFF2-40B4-BE49-F238E27FC236}">
-                  <a16:creationId xmlns:a16="http://schemas.microsoft.com/office/drawing/2014/main" id="{46F6D6D9-5932-893F-6476-3EDCF780C962}"/>
-                </a:ext>
-              </a:extLst>
-            </p:cNvPr>
-            <p:cNvSpPr txBox="1"/>
-            <p:nvPr/>
-          </p:nvSpPr>
-          <p:spPr>
-            <a:xfrm>
-              <a:off x="838200" y="3585234"/>
-              <a:ext cx="5827776" cy="461665"/>
-            </a:xfrm>
-            <a:prstGeom prst="rect">
-              <a:avLst/>
-            </a:prstGeom>
-            <a:noFill/>
-          </p:spPr>
-          <p:txBody>
-            <a:bodyPr wrap="square" rtlCol="0">
-              <a:spAutoFit/>
-            </a:bodyPr>
-            <a:lstStyle/>
-            <a:p>
-              <a:r>
-                <a:rPr lang="en-US" sz="2400" dirty="0">
-                  <a:solidFill>
-                    <a:srgbClr val="283C95"/>
-                  </a:solidFill>
-                  <a:latin typeface="Aptos ExtraBold" panose="020B0004020202020204" pitchFamily="34" charset="0"/>
-                </a:rPr>
-                <a:t>04 EDA Insights</a:t>
-              </a:r>
-            </a:p>
-          </p:txBody>
-        </p:sp>
-      </p:grpSp>
-    </p:spTree>
-    <p:extLst>
-      <p:ext uri="{BB962C8B-B14F-4D97-AF65-F5344CB8AC3E}">
-        <p14:creationId xmlns:p14="http://schemas.microsoft.com/office/powerpoint/2010/main" val="2253367093"/>
-      </p:ext>
-    </p:extLst>
-  </p:cSld>
-  <p:clrMapOvr>
-    <a:masterClrMapping/>
-  </p:clrMapOvr>
-  <mc:AlternateContent xmlns:mc="http://schemas.openxmlformats.org/markup-compatibility/2006" xmlns:p159="http://schemas.microsoft.com/office/powerpoint/2015/09/main">
-    <mc:Choice Requires="p159">
-      <p:transition xmlns:p14="http://schemas.microsoft.com/office/powerpoint/2010/main" spd="slow" p14:dur="2000">
+  <mc:AlternateContent xmlns:mc="http://schemas.openxmlformats.org/markup-compatibility/2006">
+    <mc:Choice xmlns:p159="http://schemas.microsoft.com/office/powerpoint/2015/09/main" Requires="p159">
+      <p:transition spd="slow">
         <p159:morph option="byObject"/>
       </p:transition>
     </mc:Choice>
-    <mc:Fallback xmlns="">
+    <mc:Fallback>
       <p:transition spd="slow">
         <p:fade/>
       </p:transition>
@@ -8141,13 +13752,13 @@
   <p:clrMapOvr>
     <a:masterClrMapping/>
   </p:clrMapOvr>
-  <mc:AlternateContent xmlns:mc="http://schemas.openxmlformats.org/markup-compatibility/2006" xmlns:p159="http://schemas.microsoft.com/office/powerpoint/2015/09/main">
-    <mc:Choice Requires="p159">
-      <p:transition xmlns:p14="http://schemas.microsoft.com/office/powerpoint/2010/main" spd="slow" p14:dur="2000">
+  <mc:AlternateContent xmlns:mc="http://schemas.openxmlformats.org/markup-compatibility/2006">
+    <mc:Choice xmlns:p159="http://schemas.microsoft.com/office/powerpoint/2015/09/main" Requires="p159">
+      <p:transition spd="slow">
         <p159:morph option="byObject"/>
       </p:transition>
     </mc:Choice>
-    <mc:Fallback xmlns="">
+    <mc:Fallback>
       <p:transition spd="slow">
         <p:fade/>
       </p:transition>
@@ -8157,6 +13768,1369 @@
 </file>
 
 <file path=ppt/slides/slide4.xml><?xml version="1.0" encoding="utf-8"?>
+<p:sld xmlns:a="http://schemas.openxmlformats.org/drawingml/2006/main" xmlns:r="http://schemas.openxmlformats.org/officeDocument/2006/relationships" xmlns:p="http://schemas.openxmlformats.org/presentationml/2006/main">
+  <p:cSld>
+    <p:spTree>
+      <p:nvGrpSpPr>
+        <p:cNvPr id="1" name="">
+          <a:extLst>
+            <a:ext uri="{FF2B5EF4-FFF2-40B4-BE49-F238E27FC236}">
+              <a16:creationId xmlns:a16="http://schemas.microsoft.com/office/drawing/2014/main" id="{AB7D135D-8BF7-E821-39B9-A29780BCB5B3}"/>
+            </a:ext>
+          </a:extLst>
+        </p:cNvPr>
+        <p:cNvGrpSpPr/>
+        <p:nvPr/>
+      </p:nvGrpSpPr>
+      <p:grpSpPr>
+        <a:xfrm>
+          <a:off x="0" y="0"/>
+          <a:ext cx="0" cy="0"/>
+          <a:chOff x="0" y="0"/>
+          <a:chExt cx="0" cy="0"/>
+        </a:xfrm>
+      </p:grpSpPr>
+      <p:sp>
+        <p:nvSpPr>
+          <p:cNvPr id="2" name="Title 1">
+            <a:extLst>
+              <a:ext uri="{FF2B5EF4-FFF2-40B4-BE49-F238E27FC236}">
+                <a16:creationId xmlns:a16="http://schemas.microsoft.com/office/drawing/2014/main" id="{82186DE0-9EDC-F3C3-D391-E9134EDB7117}"/>
+              </a:ext>
+            </a:extLst>
+          </p:cNvPr>
+          <p:cNvSpPr>
+            <a:spLocks noGrp="1"/>
+          </p:cNvSpPr>
+          <p:nvPr>
+            <p:ph type="title"/>
+          </p:nvPr>
+        </p:nvSpPr>
+        <p:spPr>
+          <a:xfrm>
+            <a:off x="606318" y="214540"/>
+            <a:ext cx="5952744" cy="1325563"/>
+          </a:xfrm>
+        </p:spPr>
+        <p:txBody>
+          <a:bodyPr/>
+          <a:lstStyle/>
+          <a:p>
+            <a:r>
+              <a:rPr lang="en-US" dirty="0">
+                <a:solidFill>
+                  <a:srgbClr val="283C95"/>
+                </a:solidFill>
+                <a:latin typeface="Aptos ExtraBold" panose="020B0004020202020204" pitchFamily="34" charset="0"/>
+              </a:rPr>
+              <a:t>Project Statement</a:t>
+            </a:r>
+          </a:p>
+        </p:txBody>
+      </p:sp>
+      <p:sp>
+        <p:nvSpPr>
+          <p:cNvPr id="3" name="Title 1">
+            <a:extLst>
+              <a:ext uri="{FF2B5EF4-FFF2-40B4-BE49-F238E27FC236}">
+                <a16:creationId xmlns:a16="http://schemas.microsoft.com/office/drawing/2014/main" id="{28A74486-DD81-734D-1A97-DA605BD6F829}"/>
+              </a:ext>
+            </a:extLst>
+          </p:cNvPr>
+          <p:cNvSpPr txBox="1">
+            <a:spLocks/>
+          </p:cNvSpPr>
+          <p:nvPr/>
+        </p:nvSpPr>
+        <p:spPr>
+          <a:xfrm>
+            <a:off x="838200" y="344853"/>
+            <a:ext cx="10515600" cy="1325563"/>
+          </a:xfrm>
+          <a:prstGeom prst="rect">
+            <a:avLst/>
+          </a:prstGeom>
+        </p:spPr>
+        <p:txBody>
+          <a:bodyPr vert="horz" lIns="91440" tIns="45720" rIns="91440" bIns="45720" rtlCol="0" anchor="ctr">
+            <a:normAutofit/>
+          </a:bodyPr>
+          <a:lstStyle>
+            <a:lvl1pPr algn="l" defTabSz="914400" rtl="0" eaLnBrk="1" latinLnBrk="0" hangingPunct="1">
+              <a:lnSpc>
+                <a:spcPct val="90000"/>
+              </a:lnSpc>
+              <a:spcBef>
+                <a:spcPct val="0"/>
+              </a:spcBef>
+              <a:buNone/>
+              <a:defRPr sz="4400" kern="1200">
+                <a:solidFill>
+                  <a:schemeClr val="tx1"/>
+                </a:solidFill>
+                <a:latin typeface="+mj-lt"/>
+                <a:ea typeface="+mj-ea"/>
+                <a:cs typeface="+mj-cs"/>
+              </a:defRPr>
+            </a:lvl1pPr>
+          </a:lstStyle>
+          <a:p>
+            <a:endParaRPr lang="en-US" dirty="0">
+              <a:solidFill>
+                <a:srgbClr val="283C95"/>
+              </a:solidFill>
+              <a:latin typeface="Aptos ExtraBold" panose="020B0004020202020204" pitchFamily="34" charset="0"/>
+            </a:endParaRPr>
+          </a:p>
+        </p:txBody>
+      </p:sp>
+      <p:sp>
+        <p:nvSpPr>
+          <p:cNvPr id="6" name="TextBox 5">
+            <a:extLst>
+              <a:ext uri="{FF2B5EF4-FFF2-40B4-BE49-F238E27FC236}">
+                <a16:creationId xmlns:a16="http://schemas.microsoft.com/office/drawing/2014/main" id="{7141BD4A-F4E1-070F-DB8B-E4412F0E505C}"/>
+              </a:ext>
+            </a:extLst>
+          </p:cNvPr>
+          <p:cNvSpPr txBox="1"/>
+          <p:nvPr/>
+        </p:nvSpPr>
+        <p:spPr>
+          <a:xfrm>
+            <a:off x="606317" y="1540103"/>
+            <a:ext cx="8895491" cy="3416320"/>
+          </a:xfrm>
+          <a:prstGeom prst="rect">
+            <a:avLst/>
+          </a:prstGeom>
+          <a:noFill/>
+        </p:spPr>
+        <p:txBody>
+          <a:bodyPr wrap="square" rtlCol="0">
+            <a:spAutoFit/>
+          </a:bodyPr>
+          <a:lstStyle/>
+          <a:p>
+            <a:r>
+              <a:rPr lang="en-US" sz="2400" b="1" i="0" dirty="0">
+                <a:effectLst/>
+                <a:latin typeface="+mj-lt"/>
+              </a:rPr>
+              <a:t>This project aims to develop a machine learning-based forecasting system to predict future sales and product demand using historical data and external factors such as promotions, holidays, and weather. Through data collection, analysis, model development, deployment, and monitoring, the goal is to enable businesses to make data-driven decisions that optimize inventory management, enhance demand planning, and improve overall operational efficiency. The final solution will include an interactive dashboard and a deployed predictive model ready for real-world use.</a:t>
+            </a:r>
+            <a:endParaRPr lang="en-US" sz="2400" b="1" dirty="0">
+              <a:latin typeface="+mj-lt"/>
+            </a:endParaRPr>
+          </a:p>
+        </p:txBody>
+      </p:sp>
+      <p:cxnSp>
+        <p:nvCxnSpPr>
+          <p:cNvPr id="41" name="Straight Connector 40">
+            <a:extLst>
+              <a:ext uri="{FF2B5EF4-FFF2-40B4-BE49-F238E27FC236}">
+                <a16:creationId xmlns:a16="http://schemas.microsoft.com/office/drawing/2014/main" id="{7A301607-F9A2-1E30-051D-3C18BFA56B91}"/>
+              </a:ext>
+            </a:extLst>
+          </p:cNvPr>
+          <p:cNvCxnSpPr/>
+          <p:nvPr/>
+        </p:nvCxnSpPr>
+        <p:spPr>
+          <a:xfrm flipV="1">
+            <a:off x="9601200" y="4032738"/>
+            <a:ext cx="3083169" cy="2930770"/>
+          </a:xfrm>
+          <a:prstGeom prst="line">
+            <a:avLst/>
+          </a:prstGeom>
+        </p:spPr>
+        <p:style>
+          <a:lnRef idx="2">
+            <a:schemeClr val="accent1"/>
+          </a:lnRef>
+          <a:fillRef idx="0">
+            <a:schemeClr val="accent1"/>
+          </a:fillRef>
+          <a:effectRef idx="1">
+            <a:schemeClr val="accent1"/>
+          </a:effectRef>
+          <a:fontRef idx="minor">
+            <a:schemeClr val="tx1"/>
+          </a:fontRef>
+        </p:style>
+      </p:cxnSp>
+      <p:cxnSp>
+        <p:nvCxnSpPr>
+          <p:cNvPr id="43" name="Straight Connector 42">
+            <a:extLst>
+              <a:ext uri="{FF2B5EF4-FFF2-40B4-BE49-F238E27FC236}">
+                <a16:creationId xmlns:a16="http://schemas.microsoft.com/office/drawing/2014/main" id="{2FD4B9B7-5852-C64F-C51F-E22D5FD24EEB}"/>
+              </a:ext>
+            </a:extLst>
+          </p:cNvPr>
+          <p:cNvCxnSpPr/>
+          <p:nvPr/>
+        </p:nvCxnSpPr>
+        <p:spPr>
+          <a:xfrm flipH="1" flipV="1">
+            <a:off x="9976338" y="-339969"/>
+            <a:ext cx="2708031" cy="2010385"/>
+          </a:xfrm>
+          <a:prstGeom prst="line">
+            <a:avLst/>
+          </a:prstGeom>
+        </p:spPr>
+        <p:style>
+          <a:lnRef idx="2">
+            <a:schemeClr val="accent1"/>
+          </a:lnRef>
+          <a:fillRef idx="0">
+            <a:schemeClr val="accent1"/>
+          </a:fillRef>
+          <a:effectRef idx="1">
+            <a:schemeClr val="accent1"/>
+          </a:effectRef>
+          <a:fontRef idx="minor">
+            <a:schemeClr val="tx1"/>
+          </a:fontRef>
+        </p:style>
+      </p:cxnSp>
+      <p:cxnSp>
+        <p:nvCxnSpPr>
+          <p:cNvPr id="4" name="Straight Connector 3">
+            <a:extLst>
+              <a:ext uri="{FF2B5EF4-FFF2-40B4-BE49-F238E27FC236}">
+                <a16:creationId xmlns:a16="http://schemas.microsoft.com/office/drawing/2014/main" id="{9A0BB877-F82C-E60C-4BA5-EECDE7A1517D}"/>
+              </a:ext>
+            </a:extLst>
+          </p:cNvPr>
+          <p:cNvCxnSpPr/>
+          <p:nvPr/>
+        </p:nvCxnSpPr>
+        <p:spPr>
+          <a:xfrm flipH="1" flipV="1">
+            <a:off x="9757678" y="-28538"/>
+            <a:ext cx="2708031" cy="2010385"/>
+          </a:xfrm>
+          <a:prstGeom prst="line">
+            <a:avLst/>
+          </a:prstGeom>
+        </p:spPr>
+        <p:style>
+          <a:lnRef idx="2">
+            <a:schemeClr val="accent1"/>
+          </a:lnRef>
+          <a:fillRef idx="0">
+            <a:schemeClr val="accent1"/>
+          </a:fillRef>
+          <a:effectRef idx="1">
+            <a:schemeClr val="accent1"/>
+          </a:effectRef>
+          <a:fontRef idx="minor">
+            <a:schemeClr val="tx1"/>
+          </a:fontRef>
+        </p:style>
+      </p:cxnSp>
+      <p:cxnSp>
+        <p:nvCxnSpPr>
+          <p:cNvPr id="5" name="Straight Connector 4">
+            <a:extLst>
+              <a:ext uri="{FF2B5EF4-FFF2-40B4-BE49-F238E27FC236}">
+                <a16:creationId xmlns:a16="http://schemas.microsoft.com/office/drawing/2014/main" id="{79F42A71-B84D-860B-6D65-A7AC3DA85962}"/>
+              </a:ext>
+            </a:extLst>
+          </p:cNvPr>
+          <p:cNvCxnSpPr>
+            <a:cxnSpLocks/>
+          </p:cNvCxnSpPr>
+          <p:nvPr/>
+        </p:nvCxnSpPr>
+        <p:spPr>
+          <a:xfrm flipV="1">
+            <a:off x="11330353" y="5498123"/>
+            <a:ext cx="1354016" cy="1359877"/>
+          </a:xfrm>
+          <a:prstGeom prst="line">
+            <a:avLst/>
+          </a:prstGeom>
+        </p:spPr>
+        <p:style>
+          <a:lnRef idx="2">
+            <a:schemeClr val="accent1"/>
+          </a:lnRef>
+          <a:fillRef idx="0">
+            <a:schemeClr val="accent1"/>
+          </a:fillRef>
+          <a:effectRef idx="1">
+            <a:schemeClr val="accent1"/>
+          </a:effectRef>
+          <a:fontRef idx="minor">
+            <a:schemeClr val="tx1"/>
+          </a:fontRef>
+        </p:style>
+      </p:cxnSp>
+    </p:spTree>
+    <p:extLst>
+      <p:ext uri="{BB962C8B-B14F-4D97-AF65-F5344CB8AC3E}">
+        <p14:creationId xmlns:p14="http://schemas.microsoft.com/office/powerpoint/2010/main" val="2189941388"/>
+      </p:ext>
+    </p:extLst>
+  </p:cSld>
+  <p:clrMapOvr>
+    <a:masterClrMapping/>
+  </p:clrMapOvr>
+  <mc:AlternateContent xmlns:mc="http://schemas.openxmlformats.org/markup-compatibility/2006">
+    <mc:Choice xmlns:p159="http://schemas.microsoft.com/office/powerpoint/2015/09/main" Requires="p159">
+      <p:transition spd="slow">
+        <p159:morph option="byObject"/>
+      </p:transition>
+    </mc:Choice>
+    <mc:Fallback>
+      <p:transition spd="slow">
+        <p:fade/>
+      </p:transition>
+    </mc:Fallback>
+  </mc:AlternateContent>
+</p:sld>
+</file>
+
+<file path=ppt/slides/slide5.xml><?xml version="1.0" encoding="utf-8"?>
+<p:sld xmlns:a="http://schemas.openxmlformats.org/drawingml/2006/main" xmlns:r="http://schemas.openxmlformats.org/officeDocument/2006/relationships" xmlns:p="http://schemas.openxmlformats.org/presentationml/2006/main">
+  <p:cSld>
+    <p:spTree>
+      <p:nvGrpSpPr>
+        <p:cNvPr id="1" name="">
+          <a:extLst>
+            <a:ext uri="{FF2B5EF4-FFF2-40B4-BE49-F238E27FC236}">
+              <a16:creationId xmlns:a16="http://schemas.microsoft.com/office/drawing/2014/main" id="{AC7A7777-9B0E-35C5-C622-3B4BF31B424E}"/>
+            </a:ext>
+          </a:extLst>
+        </p:cNvPr>
+        <p:cNvGrpSpPr/>
+        <p:nvPr/>
+      </p:nvGrpSpPr>
+      <p:grpSpPr>
+        <a:xfrm>
+          <a:off x="0" y="0"/>
+          <a:ext cx="0" cy="0"/>
+          <a:chOff x="0" y="0"/>
+          <a:chExt cx="0" cy="0"/>
+        </a:xfrm>
+      </p:grpSpPr>
+      <p:sp>
+        <p:nvSpPr>
+          <p:cNvPr id="2" name="Title 1">
+            <a:extLst>
+              <a:ext uri="{FF2B5EF4-FFF2-40B4-BE49-F238E27FC236}">
+                <a16:creationId xmlns:a16="http://schemas.microsoft.com/office/drawing/2014/main" id="{1E4733B7-A4B9-F8FC-FFF4-49ED02B78E5C}"/>
+              </a:ext>
+            </a:extLst>
+          </p:cNvPr>
+          <p:cNvSpPr>
+            <a:spLocks noGrp="1"/>
+          </p:cNvSpPr>
+          <p:nvPr>
+            <p:ph type="title"/>
+          </p:nvPr>
+        </p:nvSpPr>
+        <p:spPr>
+          <a:xfrm>
+            <a:off x="606318" y="214540"/>
+            <a:ext cx="5952744" cy="1325563"/>
+          </a:xfrm>
+        </p:spPr>
+        <p:txBody>
+          <a:bodyPr/>
+          <a:lstStyle/>
+          <a:p>
+            <a:r>
+              <a:rPr lang="en-US" dirty="0">
+                <a:solidFill>
+                  <a:srgbClr val="283C95"/>
+                </a:solidFill>
+                <a:latin typeface="Aptos ExtraBold" panose="020B0004020202020204" pitchFamily="34" charset="0"/>
+              </a:rPr>
+              <a:t>Stakeholders</a:t>
+            </a:r>
+          </a:p>
+        </p:txBody>
+      </p:sp>
+      <p:sp>
+        <p:nvSpPr>
+          <p:cNvPr id="3" name="Title 1">
+            <a:extLst>
+              <a:ext uri="{FF2B5EF4-FFF2-40B4-BE49-F238E27FC236}">
+                <a16:creationId xmlns:a16="http://schemas.microsoft.com/office/drawing/2014/main" id="{98589C67-3421-DB56-6264-8A76E802DA71}"/>
+              </a:ext>
+            </a:extLst>
+          </p:cNvPr>
+          <p:cNvSpPr txBox="1">
+            <a:spLocks/>
+          </p:cNvSpPr>
+          <p:nvPr/>
+        </p:nvSpPr>
+        <p:spPr>
+          <a:xfrm>
+            <a:off x="838200" y="344853"/>
+            <a:ext cx="10515600" cy="1325563"/>
+          </a:xfrm>
+          <a:prstGeom prst="rect">
+            <a:avLst/>
+          </a:prstGeom>
+        </p:spPr>
+        <p:txBody>
+          <a:bodyPr vert="horz" lIns="91440" tIns="45720" rIns="91440" bIns="45720" rtlCol="0" anchor="ctr">
+            <a:normAutofit/>
+          </a:bodyPr>
+          <a:lstStyle>
+            <a:lvl1pPr algn="l" defTabSz="914400" rtl="0" eaLnBrk="1" latinLnBrk="0" hangingPunct="1">
+              <a:lnSpc>
+                <a:spcPct val="90000"/>
+              </a:lnSpc>
+              <a:spcBef>
+                <a:spcPct val="0"/>
+              </a:spcBef>
+              <a:buNone/>
+              <a:defRPr sz="4400" kern="1200">
+                <a:solidFill>
+                  <a:schemeClr val="tx1"/>
+                </a:solidFill>
+                <a:latin typeface="+mj-lt"/>
+                <a:ea typeface="+mj-ea"/>
+                <a:cs typeface="+mj-cs"/>
+              </a:defRPr>
+            </a:lvl1pPr>
+          </a:lstStyle>
+          <a:p>
+            <a:endParaRPr lang="en-US" dirty="0">
+              <a:solidFill>
+                <a:srgbClr val="283C95"/>
+              </a:solidFill>
+              <a:latin typeface="Aptos ExtraBold" panose="020B0004020202020204" pitchFamily="34" charset="0"/>
+            </a:endParaRPr>
+          </a:p>
+        </p:txBody>
+      </p:sp>
+      <p:cxnSp>
+        <p:nvCxnSpPr>
+          <p:cNvPr id="41" name="Straight Connector 40">
+            <a:extLst>
+              <a:ext uri="{FF2B5EF4-FFF2-40B4-BE49-F238E27FC236}">
+                <a16:creationId xmlns:a16="http://schemas.microsoft.com/office/drawing/2014/main" id="{C197EA5C-AF62-08D6-5891-D26023523078}"/>
+              </a:ext>
+            </a:extLst>
+          </p:cNvPr>
+          <p:cNvCxnSpPr/>
+          <p:nvPr/>
+        </p:nvCxnSpPr>
+        <p:spPr>
+          <a:xfrm flipV="1">
+            <a:off x="10209781" y="4509816"/>
+            <a:ext cx="3083169" cy="2930770"/>
+          </a:xfrm>
+          <a:prstGeom prst="line">
+            <a:avLst/>
+          </a:prstGeom>
+        </p:spPr>
+        <p:style>
+          <a:lnRef idx="2">
+            <a:schemeClr val="accent1"/>
+          </a:lnRef>
+          <a:fillRef idx="0">
+            <a:schemeClr val="accent1"/>
+          </a:fillRef>
+          <a:effectRef idx="1">
+            <a:schemeClr val="accent1"/>
+          </a:effectRef>
+          <a:fontRef idx="minor">
+            <a:schemeClr val="tx1"/>
+          </a:fontRef>
+        </p:style>
+      </p:cxnSp>
+      <p:cxnSp>
+        <p:nvCxnSpPr>
+          <p:cNvPr id="43" name="Straight Connector 42">
+            <a:extLst>
+              <a:ext uri="{FF2B5EF4-FFF2-40B4-BE49-F238E27FC236}">
+                <a16:creationId xmlns:a16="http://schemas.microsoft.com/office/drawing/2014/main" id="{1228063B-E75C-989D-F850-B2185C6A5D38}"/>
+              </a:ext>
+            </a:extLst>
+          </p:cNvPr>
+          <p:cNvCxnSpPr/>
+          <p:nvPr/>
+        </p:nvCxnSpPr>
+        <p:spPr>
+          <a:xfrm flipH="1" flipV="1">
+            <a:off x="9976338" y="-339969"/>
+            <a:ext cx="2708031" cy="2010385"/>
+          </a:xfrm>
+          <a:prstGeom prst="line">
+            <a:avLst/>
+          </a:prstGeom>
+        </p:spPr>
+        <p:style>
+          <a:lnRef idx="2">
+            <a:schemeClr val="accent1"/>
+          </a:lnRef>
+          <a:fillRef idx="0">
+            <a:schemeClr val="accent1"/>
+          </a:fillRef>
+          <a:effectRef idx="1">
+            <a:schemeClr val="accent1"/>
+          </a:effectRef>
+          <a:fontRef idx="minor">
+            <a:schemeClr val="tx1"/>
+          </a:fontRef>
+        </p:style>
+      </p:cxnSp>
+      <p:cxnSp>
+        <p:nvCxnSpPr>
+          <p:cNvPr id="4" name="Straight Connector 3">
+            <a:extLst>
+              <a:ext uri="{FF2B5EF4-FFF2-40B4-BE49-F238E27FC236}">
+                <a16:creationId xmlns:a16="http://schemas.microsoft.com/office/drawing/2014/main" id="{03A9821A-76FE-2E6F-94B9-66E8B20528FE}"/>
+              </a:ext>
+            </a:extLst>
+          </p:cNvPr>
+          <p:cNvCxnSpPr/>
+          <p:nvPr/>
+        </p:nvCxnSpPr>
+        <p:spPr>
+          <a:xfrm flipH="1" flipV="1">
+            <a:off x="9757678" y="-28538"/>
+            <a:ext cx="2708031" cy="2010385"/>
+          </a:xfrm>
+          <a:prstGeom prst="line">
+            <a:avLst/>
+          </a:prstGeom>
+        </p:spPr>
+        <p:style>
+          <a:lnRef idx="2">
+            <a:schemeClr val="accent1"/>
+          </a:lnRef>
+          <a:fillRef idx="0">
+            <a:schemeClr val="accent1"/>
+          </a:fillRef>
+          <a:effectRef idx="1">
+            <a:schemeClr val="accent1"/>
+          </a:effectRef>
+          <a:fontRef idx="minor">
+            <a:schemeClr val="tx1"/>
+          </a:fontRef>
+        </p:style>
+      </p:cxnSp>
+      <p:cxnSp>
+        <p:nvCxnSpPr>
+          <p:cNvPr id="5" name="Straight Connector 4">
+            <a:extLst>
+              <a:ext uri="{FF2B5EF4-FFF2-40B4-BE49-F238E27FC236}">
+                <a16:creationId xmlns:a16="http://schemas.microsoft.com/office/drawing/2014/main" id="{EEE18E68-27C0-9E70-AB89-07A7E7972DAB}"/>
+              </a:ext>
+            </a:extLst>
+          </p:cNvPr>
+          <p:cNvCxnSpPr>
+            <a:cxnSpLocks/>
+          </p:cNvCxnSpPr>
+          <p:nvPr/>
+        </p:nvCxnSpPr>
+        <p:spPr>
+          <a:xfrm flipV="1">
+            <a:off x="11330353" y="5498123"/>
+            <a:ext cx="1354016" cy="1359877"/>
+          </a:xfrm>
+          <a:prstGeom prst="line">
+            <a:avLst/>
+          </a:prstGeom>
+        </p:spPr>
+        <p:style>
+          <a:lnRef idx="2">
+            <a:schemeClr val="accent1"/>
+          </a:lnRef>
+          <a:fillRef idx="0">
+            <a:schemeClr val="accent1"/>
+          </a:fillRef>
+          <a:effectRef idx="1">
+            <a:schemeClr val="accent1"/>
+          </a:effectRef>
+          <a:fontRef idx="minor">
+            <a:schemeClr val="tx1"/>
+          </a:fontRef>
+        </p:style>
+      </p:cxnSp>
+      <p:graphicFrame>
+        <p:nvGraphicFramePr>
+          <p:cNvPr id="7" name="Table 6">
+            <a:extLst>
+              <a:ext uri="{FF2B5EF4-FFF2-40B4-BE49-F238E27FC236}">
+                <a16:creationId xmlns:a16="http://schemas.microsoft.com/office/drawing/2014/main" id="{BC6015C4-AF32-CD14-E7CE-80C337BBD78F}"/>
+              </a:ext>
+            </a:extLst>
+          </p:cNvPr>
+          <p:cNvGraphicFramePr>
+            <a:graphicFrameLocks noGrp="1"/>
+          </p:cNvGraphicFramePr>
+          <p:nvPr>
+            <p:extLst>
+              <p:ext uri="{D42A27DB-BD31-4B8C-83A1-F6EECF244321}">
+                <p14:modId xmlns:p14="http://schemas.microsoft.com/office/powerpoint/2010/main" val="1456840953"/>
+              </p:ext>
+            </p:extLst>
+          </p:nvPr>
+        </p:nvGraphicFramePr>
+        <p:xfrm>
+          <a:off x="440634" y="1853634"/>
+          <a:ext cx="10373140" cy="3474720"/>
+        </p:xfrm>
+        <a:graphic>
+          <a:graphicData uri="http://schemas.openxmlformats.org/drawingml/2006/table">
+            <a:tbl>
+              <a:tblPr firstRow="1" bandRow="1">
+                <a:tableStyleId>{5C22544A-7EE6-4342-B048-85BDC9FD1C3A}</a:tableStyleId>
+              </a:tblPr>
+              <a:tblGrid>
+                <a:gridCol w="2845905">
+                  <a:extLst>
+                    <a:ext uri="{9D8B030D-6E8A-4147-A177-3AD203B41FA5}">
+                      <a16:colId xmlns:a16="http://schemas.microsoft.com/office/drawing/2014/main" val="498231312"/>
+                    </a:ext>
+                  </a:extLst>
+                </a:gridCol>
+                <a:gridCol w="7527235">
+                  <a:extLst>
+                    <a:ext uri="{9D8B030D-6E8A-4147-A177-3AD203B41FA5}">
+                      <a16:colId xmlns:a16="http://schemas.microsoft.com/office/drawing/2014/main" val="3339238031"/>
+                    </a:ext>
+                  </a:extLst>
+                </a:gridCol>
+              </a:tblGrid>
+              <a:tr h="370840">
+                <a:tc>
+                  <a:txBody>
+                    <a:bodyPr/>
+                    <a:lstStyle/>
+                    <a:p>
+                      <a:pPr algn="ctr"/>
+                      <a:r>
+                        <a:rPr lang="en-US" sz="2400" b="1" dirty="0"/>
+                        <a:t>Stakeholder</a:t>
+                      </a:r>
+                      <a:endParaRPr lang="en-US" sz="2400" dirty="0"/>
+                    </a:p>
+                  </a:txBody>
+                  <a:tcPr anchor="ctr"/>
+                </a:tc>
+                <a:tc>
+                  <a:txBody>
+                    <a:bodyPr/>
+                    <a:lstStyle/>
+                    <a:p>
+                      <a:pPr algn="ctr"/>
+                      <a:r>
+                        <a:rPr lang="en-US" sz="2400" dirty="0"/>
+                        <a:t>How They Benefit</a:t>
+                      </a:r>
+                    </a:p>
+                  </a:txBody>
+                  <a:tcPr/>
+                </a:tc>
+                <a:extLst>
+                  <a:ext uri="{0D108BD9-81ED-4DB2-BD59-A6C34878D82A}">
+                    <a16:rowId xmlns:a16="http://schemas.microsoft.com/office/drawing/2014/main" val="2443295043"/>
+                  </a:ext>
+                </a:extLst>
+              </a:tr>
+              <a:tr h="370840">
+                <a:tc>
+                  <a:txBody>
+                    <a:bodyPr/>
+                    <a:lstStyle/>
+                    <a:p>
+                      <a:r>
+                        <a:rPr lang="en-US" sz="2400" dirty="0"/>
+                        <a:t>Inventory Managers</a:t>
+                      </a:r>
+                    </a:p>
+                  </a:txBody>
+                  <a:tcPr/>
+                </a:tc>
+                <a:tc>
+                  <a:txBody>
+                    <a:bodyPr/>
+                    <a:lstStyle/>
+                    <a:p>
+                      <a:r>
+                        <a:rPr lang="en-US" sz="2400" dirty="0"/>
+                        <a:t>Maintain optimal stock levels; avoid shortages &amp; surpluses</a:t>
+                      </a:r>
+                    </a:p>
+                  </a:txBody>
+                  <a:tcPr/>
+                </a:tc>
+                <a:extLst>
+                  <a:ext uri="{0D108BD9-81ED-4DB2-BD59-A6C34878D82A}">
+                    <a16:rowId xmlns:a16="http://schemas.microsoft.com/office/drawing/2014/main" val="1191679282"/>
+                  </a:ext>
+                </a:extLst>
+              </a:tr>
+              <a:tr h="370840">
+                <a:tc>
+                  <a:txBody>
+                    <a:bodyPr/>
+                    <a:lstStyle/>
+                    <a:p>
+                      <a:r>
+                        <a:rPr lang="en-US" sz="2400" dirty="0"/>
+                        <a:t>Marketing Teams</a:t>
+                      </a:r>
+                    </a:p>
+                  </a:txBody>
+                  <a:tcPr/>
+                </a:tc>
+                <a:tc>
+                  <a:txBody>
+                    <a:bodyPr/>
+                    <a:lstStyle/>
+                    <a:p>
+                      <a:r>
+                        <a:rPr lang="en-US" sz="2400" dirty="0"/>
+                        <a:t>Plan promotions aligned with predicted demand</a:t>
+                      </a:r>
+                    </a:p>
+                  </a:txBody>
+                  <a:tcPr/>
+                </a:tc>
+                <a:extLst>
+                  <a:ext uri="{0D108BD9-81ED-4DB2-BD59-A6C34878D82A}">
+                    <a16:rowId xmlns:a16="http://schemas.microsoft.com/office/drawing/2014/main" val="373790336"/>
+                  </a:ext>
+                </a:extLst>
+              </a:tr>
+              <a:tr h="370840">
+                <a:tc>
+                  <a:txBody>
+                    <a:bodyPr/>
+                    <a:lstStyle/>
+                    <a:p>
+                      <a:r>
+                        <a:rPr lang="en-US" sz="2400" dirty="0"/>
+                        <a:t>Sales Teams</a:t>
+                      </a:r>
+                    </a:p>
+                  </a:txBody>
+                  <a:tcPr/>
+                </a:tc>
+                <a:tc>
+                  <a:txBody>
+                    <a:bodyPr/>
+                    <a:lstStyle/>
+                    <a:p>
+                      <a:r>
+                        <a:rPr lang="en-US" sz="2400" dirty="0"/>
+                        <a:t>Focus efforts on high-demand periods/products</a:t>
+                      </a:r>
+                    </a:p>
+                  </a:txBody>
+                  <a:tcPr/>
+                </a:tc>
+                <a:extLst>
+                  <a:ext uri="{0D108BD9-81ED-4DB2-BD59-A6C34878D82A}">
+                    <a16:rowId xmlns:a16="http://schemas.microsoft.com/office/drawing/2014/main" val="35784205"/>
+                  </a:ext>
+                </a:extLst>
+              </a:tr>
+              <a:tr h="370840">
+                <a:tc>
+                  <a:txBody>
+                    <a:bodyPr/>
+                    <a:lstStyle/>
+                    <a:p>
+                      <a:r>
+                        <a:rPr lang="en-US" sz="2400" dirty="0"/>
+                        <a:t>Finance Department</a:t>
+                      </a:r>
+                    </a:p>
+                  </a:txBody>
+                  <a:tcPr/>
+                </a:tc>
+                <a:tc>
+                  <a:txBody>
+                    <a:bodyPr/>
+                    <a:lstStyle/>
+                    <a:p>
+                      <a:r>
+                        <a:rPr lang="en-US" sz="2400" dirty="0"/>
+                        <a:t>Improve revenue forecasting and budget planning</a:t>
+                      </a:r>
+                    </a:p>
+                  </a:txBody>
+                  <a:tcPr/>
+                </a:tc>
+                <a:extLst>
+                  <a:ext uri="{0D108BD9-81ED-4DB2-BD59-A6C34878D82A}">
+                    <a16:rowId xmlns:a16="http://schemas.microsoft.com/office/drawing/2014/main" val="105709226"/>
+                  </a:ext>
+                </a:extLst>
+              </a:tr>
+              <a:tr h="370840">
+                <a:tc>
+                  <a:txBody>
+                    <a:bodyPr/>
+                    <a:lstStyle/>
+                    <a:p>
+                      <a:r>
+                        <a:rPr lang="en-US" sz="2400" dirty="0"/>
+                        <a:t>Operations Teams</a:t>
+                      </a:r>
+                    </a:p>
+                  </a:txBody>
+                  <a:tcPr/>
+                </a:tc>
+                <a:tc>
+                  <a:txBody>
+                    <a:bodyPr/>
+                    <a:lstStyle/>
+                    <a:p>
+                      <a:r>
+                        <a:rPr lang="en-US" sz="2400" dirty="0"/>
+                        <a:t>Align staffing and logistics with forecasted demand</a:t>
+                      </a:r>
+                    </a:p>
+                  </a:txBody>
+                  <a:tcPr/>
+                </a:tc>
+                <a:extLst>
+                  <a:ext uri="{0D108BD9-81ED-4DB2-BD59-A6C34878D82A}">
+                    <a16:rowId xmlns:a16="http://schemas.microsoft.com/office/drawing/2014/main" val="3135281358"/>
+                  </a:ext>
+                </a:extLst>
+              </a:tr>
+            </a:tbl>
+          </a:graphicData>
+        </a:graphic>
+      </p:graphicFrame>
+    </p:spTree>
+    <p:extLst>
+      <p:ext uri="{BB962C8B-B14F-4D97-AF65-F5344CB8AC3E}">
+        <p14:creationId xmlns:p14="http://schemas.microsoft.com/office/powerpoint/2010/main" val="2824506603"/>
+      </p:ext>
+    </p:extLst>
+  </p:cSld>
+  <p:clrMapOvr>
+    <a:masterClrMapping/>
+  </p:clrMapOvr>
+  <mc:AlternateContent xmlns:mc="http://schemas.openxmlformats.org/markup-compatibility/2006">
+    <mc:Choice xmlns:p159="http://schemas.microsoft.com/office/powerpoint/2015/09/main" Requires="p159">
+      <p:transition spd="slow">
+        <p159:morph option="byObject"/>
+      </p:transition>
+    </mc:Choice>
+    <mc:Fallback>
+      <p:transition spd="slow">
+        <p:fade/>
+      </p:transition>
+    </mc:Fallback>
+  </mc:AlternateContent>
+</p:sld>
+</file>
+
+<file path=ppt/slides/slide6.xml><?xml version="1.0" encoding="utf-8"?>
+<p:sld xmlns:a="http://schemas.openxmlformats.org/drawingml/2006/main" xmlns:r="http://schemas.openxmlformats.org/officeDocument/2006/relationships" xmlns:p="http://schemas.openxmlformats.org/presentationml/2006/main">
+  <p:cSld>
+    <p:spTree>
+      <p:nvGrpSpPr>
+        <p:cNvPr id="1" name="">
+          <a:extLst>
+            <a:ext uri="{FF2B5EF4-FFF2-40B4-BE49-F238E27FC236}">
+              <a16:creationId xmlns:a16="http://schemas.microsoft.com/office/drawing/2014/main" id="{DC8B47B6-D98B-7A7E-F87F-617D63555C4A}"/>
+            </a:ext>
+          </a:extLst>
+        </p:cNvPr>
+        <p:cNvGrpSpPr/>
+        <p:nvPr/>
+      </p:nvGrpSpPr>
+      <p:grpSpPr>
+        <a:xfrm>
+          <a:off x="0" y="0"/>
+          <a:ext cx="0" cy="0"/>
+          <a:chOff x="0" y="0"/>
+          <a:chExt cx="0" cy="0"/>
+        </a:xfrm>
+      </p:grpSpPr>
+      <p:sp>
+        <p:nvSpPr>
+          <p:cNvPr id="2" name="Title 1">
+            <a:extLst>
+              <a:ext uri="{FF2B5EF4-FFF2-40B4-BE49-F238E27FC236}">
+                <a16:creationId xmlns:a16="http://schemas.microsoft.com/office/drawing/2014/main" id="{B19235FA-A557-668D-2975-84B366587BB6}"/>
+              </a:ext>
+            </a:extLst>
+          </p:cNvPr>
+          <p:cNvSpPr>
+            <a:spLocks noGrp="1"/>
+          </p:cNvSpPr>
+          <p:nvPr>
+            <p:ph type="title"/>
+          </p:nvPr>
+        </p:nvSpPr>
+        <p:spPr>
+          <a:xfrm>
+            <a:off x="606318" y="214540"/>
+            <a:ext cx="5952744" cy="1325563"/>
+          </a:xfrm>
+        </p:spPr>
+        <p:txBody>
+          <a:bodyPr/>
+          <a:lstStyle/>
+          <a:p>
+            <a:r>
+              <a:rPr lang="en-US" dirty="0">
+                <a:solidFill>
+                  <a:srgbClr val="283C95"/>
+                </a:solidFill>
+                <a:latin typeface="Aptos ExtraBold" panose="020B0004020202020204" pitchFamily="34" charset="0"/>
+              </a:rPr>
+              <a:t>Related Projects</a:t>
+            </a:r>
+          </a:p>
+        </p:txBody>
+      </p:sp>
+      <p:sp>
+        <p:nvSpPr>
+          <p:cNvPr id="3" name="Title 1">
+            <a:extLst>
+              <a:ext uri="{FF2B5EF4-FFF2-40B4-BE49-F238E27FC236}">
+                <a16:creationId xmlns:a16="http://schemas.microsoft.com/office/drawing/2014/main" id="{F308DBFB-337A-4885-9021-29425C9A4AE0}"/>
+              </a:ext>
+            </a:extLst>
+          </p:cNvPr>
+          <p:cNvSpPr txBox="1">
+            <a:spLocks/>
+          </p:cNvSpPr>
+          <p:nvPr/>
+        </p:nvSpPr>
+        <p:spPr>
+          <a:xfrm>
+            <a:off x="838200" y="344853"/>
+            <a:ext cx="10515600" cy="1325563"/>
+          </a:xfrm>
+          <a:prstGeom prst="rect">
+            <a:avLst/>
+          </a:prstGeom>
+        </p:spPr>
+        <p:txBody>
+          <a:bodyPr vert="horz" lIns="91440" tIns="45720" rIns="91440" bIns="45720" rtlCol="0" anchor="ctr">
+            <a:normAutofit/>
+          </a:bodyPr>
+          <a:lstStyle>
+            <a:lvl1pPr algn="l" defTabSz="914400" rtl="0" eaLnBrk="1" latinLnBrk="0" hangingPunct="1">
+              <a:lnSpc>
+                <a:spcPct val="90000"/>
+              </a:lnSpc>
+              <a:spcBef>
+                <a:spcPct val="0"/>
+              </a:spcBef>
+              <a:buNone/>
+              <a:defRPr sz="4400" kern="1200">
+                <a:solidFill>
+                  <a:schemeClr val="tx1"/>
+                </a:solidFill>
+                <a:latin typeface="+mj-lt"/>
+                <a:ea typeface="+mj-ea"/>
+                <a:cs typeface="+mj-cs"/>
+              </a:defRPr>
+            </a:lvl1pPr>
+          </a:lstStyle>
+          <a:p>
+            <a:endParaRPr lang="en-US" dirty="0">
+              <a:solidFill>
+                <a:srgbClr val="283C95"/>
+              </a:solidFill>
+              <a:latin typeface="Aptos ExtraBold" panose="020B0004020202020204" pitchFamily="34" charset="0"/>
+            </a:endParaRPr>
+          </a:p>
+        </p:txBody>
+      </p:sp>
+      <p:cxnSp>
+        <p:nvCxnSpPr>
+          <p:cNvPr id="41" name="Straight Connector 40">
+            <a:extLst>
+              <a:ext uri="{FF2B5EF4-FFF2-40B4-BE49-F238E27FC236}">
+                <a16:creationId xmlns:a16="http://schemas.microsoft.com/office/drawing/2014/main" id="{35352993-300F-9A74-20C7-48D636FA306F}"/>
+              </a:ext>
+            </a:extLst>
+          </p:cNvPr>
+          <p:cNvCxnSpPr/>
+          <p:nvPr/>
+        </p:nvCxnSpPr>
+        <p:spPr>
+          <a:xfrm flipV="1">
+            <a:off x="10209781" y="4509816"/>
+            <a:ext cx="3083169" cy="2930770"/>
+          </a:xfrm>
+          <a:prstGeom prst="line">
+            <a:avLst/>
+          </a:prstGeom>
+        </p:spPr>
+        <p:style>
+          <a:lnRef idx="2">
+            <a:schemeClr val="accent1"/>
+          </a:lnRef>
+          <a:fillRef idx="0">
+            <a:schemeClr val="accent1"/>
+          </a:fillRef>
+          <a:effectRef idx="1">
+            <a:schemeClr val="accent1"/>
+          </a:effectRef>
+          <a:fontRef idx="minor">
+            <a:schemeClr val="tx1"/>
+          </a:fontRef>
+        </p:style>
+      </p:cxnSp>
+      <p:cxnSp>
+        <p:nvCxnSpPr>
+          <p:cNvPr id="43" name="Straight Connector 42">
+            <a:extLst>
+              <a:ext uri="{FF2B5EF4-FFF2-40B4-BE49-F238E27FC236}">
+                <a16:creationId xmlns:a16="http://schemas.microsoft.com/office/drawing/2014/main" id="{4898C08C-98EE-F6E9-59D8-67155F474D0D}"/>
+              </a:ext>
+            </a:extLst>
+          </p:cNvPr>
+          <p:cNvCxnSpPr/>
+          <p:nvPr/>
+        </p:nvCxnSpPr>
+        <p:spPr>
+          <a:xfrm flipH="1" flipV="1">
+            <a:off x="9976338" y="-339969"/>
+            <a:ext cx="2708031" cy="2010385"/>
+          </a:xfrm>
+          <a:prstGeom prst="line">
+            <a:avLst/>
+          </a:prstGeom>
+        </p:spPr>
+        <p:style>
+          <a:lnRef idx="2">
+            <a:schemeClr val="accent1"/>
+          </a:lnRef>
+          <a:fillRef idx="0">
+            <a:schemeClr val="accent1"/>
+          </a:fillRef>
+          <a:effectRef idx="1">
+            <a:schemeClr val="accent1"/>
+          </a:effectRef>
+          <a:fontRef idx="minor">
+            <a:schemeClr val="tx1"/>
+          </a:fontRef>
+        </p:style>
+      </p:cxnSp>
+      <p:cxnSp>
+        <p:nvCxnSpPr>
+          <p:cNvPr id="4" name="Straight Connector 3">
+            <a:extLst>
+              <a:ext uri="{FF2B5EF4-FFF2-40B4-BE49-F238E27FC236}">
+                <a16:creationId xmlns:a16="http://schemas.microsoft.com/office/drawing/2014/main" id="{29D8604E-C111-DA81-1427-B87661E0B0FC}"/>
+              </a:ext>
+            </a:extLst>
+          </p:cNvPr>
+          <p:cNvCxnSpPr/>
+          <p:nvPr/>
+        </p:nvCxnSpPr>
+        <p:spPr>
+          <a:xfrm flipH="1" flipV="1">
+            <a:off x="9757678" y="-28538"/>
+            <a:ext cx="2708031" cy="2010385"/>
+          </a:xfrm>
+          <a:prstGeom prst="line">
+            <a:avLst/>
+          </a:prstGeom>
+        </p:spPr>
+        <p:style>
+          <a:lnRef idx="2">
+            <a:schemeClr val="accent1"/>
+          </a:lnRef>
+          <a:fillRef idx="0">
+            <a:schemeClr val="accent1"/>
+          </a:fillRef>
+          <a:effectRef idx="1">
+            <a:schemeClr val="accent1"/>
+          </a:effectRef>
+          <a:fontRef idx="minor">
+            <a:schemeClr val="tx1"/>
+          </a:fontRef>
+        </p:style>
+      </p:cxnSp>
+      <p:cxnSp>
+        <p:nvCxnSpPr>
+          <p:cNvPr id="5" name="Straight Connector 4">
+            <a:extLst>
+              <a:ext uri="{FF2B5EF4-FFF2-40B4-BE49-F238E27FC236}">
+                <a16:creationId xmlns:a16="http://schemas.microsoft.com/office/drawing/2014/main" id="{4CC0237D-34EA-042D-D832-FEB1A0063271}"/>
+              </a:ext>
+            </a:extLst>
+          </p:cNvPr>
+          <p:cNvCxnSpPr>
+            <a:cxnSpLocks/>
+          </p:cNvCxnSpPr>
+          <p:nvPr/>
+        </p:nvCxnSpPr>
+        <p:spPr>
+          <a:xfrm flipV="1">
+            <a:off x="11330353" y="5498123"/>
+            <a:ext cx="1354016" cy="1359877"/>
+          </a:xfrm>
+          <a:prstGeom prst="line">
+            <a:avLst/>
+          </a:prstGeom>
+        </p:spPr>
+        <p:style>
+          <a:lnRef idx="2">
+            <a:schemeClr val="accent1"/>
+          </a:lnRef>
+          <a:fillRef idx="0">
+            <a:schemeClr val="accent1"/>
+          </a:fillRef>
+          <a:effectRef idx="1">
+            <a:schemeClr val="accent1"/>
+          </a:effectRef>
+          <a:fontRef idx="minor">
+            <a:schemeClr val="tx1"/>
+          </a:fontRef>
+        </p:style>
+      </p:cxnSp>
+      <p:sp>
+        <p:nvSpPr>
+          <p:cNvPr id="6" name="TextBox 5">
+            <a:extLst>
+              <a:ext uri="{FF2B5EF4-FFF2-40B4-BE49-F238E27FC236}">
+                <a16:creationId xmlns:a16="http://schemas.microsoft.com/office/drawing/2014/main" id="{A45B00A2-E9C5-1DF8-E635-C9D8436D2B53}"/>
+              </a:ext>
+            </a:extLst>
+          </p:cNvPr>
+          <p:cNvSpPr txBox="1"/>
+          <p:nvPr/>
+        </p:nvSpPr>
+        <p:spPr>
+          <a:xfrm>
+            <a:off x="606318" y="1540103"/>
+            <a:ext cx="5489682" cy="1754326"/>
+          </a:xfrm>
+          <a:prstGeom prst="rect">
+            <a:avLst/>
+          </a:prstGeom>
+          <a:noFill/>
+        </p:spPr>
+        <p:txBody>
+          <a:bodyPr wrap="square" rtlCol="0">
+            <a:spAutoFit/>
+          </a:bodyPr>
+          <a:lstStyle/>
+          <a:p>
+            <a:r>
+              <a:rPr lang="en-US" sz="2800" b="1" dirty="0">
+                <a:solidFill>
+                  <a:srgbClr val="283C95"/>
+                </a:solidFill>
+                <a:latin typeface="+mj-lt"/>
+              </a:rPr>
+              <a:t>Inventory Optimization System:</a:t>
+            </a:r>
+          </a:p>
+          <a:p>
+            <a:pPr marL="342900" indent="-342900">
+              <a:buFont typeface="Arial" panose="020B0604020202020204" pitchFamily="34" charset="0"/>
+              <a:buChar char="•"/>
+            </a:pPr>
+            <a:r>
+              <a:rPr lang="en-US" sz="2000" b="1" i="0" dirty="0">
+                <a:effectLst/>
+                <a:latin typeface="+mj-lt"/>
+              </a:rPr>
+              <a:t>Uses historical and forecasted demand data to automate restocking</a:t>
+            </a:r>
+          </a:p>
+          <a:p>
+            <a:pPr marL="342900" indent="-342900">
+              <a:buFont typeface="Arial" panose="020B0604020202020204" pitchFamily="34" charset="0"/>
+              <a:buChar char="•"/>
+            </a:pPr>
+            <a:r>
+              <a:rPr lang="en-US" sz="2000" b="1" i="0" dirty="0">
+                <a:effectLst/>
+                <a:latin typeface="+mj-lt"/>
+              </a:rPr>
+              <a:t>Complements the forecasting model by closing the loop on supply decisions</a:t>
+            </a:r>
+            <a:endParaRPr lang="en-US" sz="2000" b="1" dirty="0">
+              <a:latin typeface="+mj-lt"/>
+            </a:endParaRPr>
+          </a:p>
+        </p:txBody>
+      </p:sp>
+      <p:sp>
+        <p:nvSpPr>
+          <p:cNvPr id="8" name="TextBox 7">
+            <a:extLst>
+              <a:ext uri="{FF2B5EF4-FFF2-40B4-BE49-F238E27FC236}">
+                <a16:creationId xmlns:a16="http://schemas.microsoft.com/office/drawing/2014/main" id="{1ACA63BB-86FF-B681-553B-BF7D5F35D865}"/>
+              </a:ext>
+            </a:extLst>
+          </p:cNvPr>
+          <p:cNvSpPr txBox="1"/>
+          <p:nvPr/>
+        </p:nvSpPr>
+        <p:spPr>
+          <a:xfrm>
+            <a:off x="606318" y="3907156"/>
+            <a:ext cx="6323071" cy="1754326"/>
+          </a:xfrm>
+          <a:prstGeom prst="rect">
+            <a:avLst/>
+          </a:prstGeom>
+          <a:noFill/>
+        </p:spPr>
+        <p:txBody>
+          <a:bodyPr wrap="square" rtlCol="0">
+            <a:spAutoFit/>
+          </a:bodyPr>
+          <a:lstStyle/>
+          <a:p>
+            <a:r>
+              <a:rPr lang="en-US" sz="2800" b="1" dirty="0">
+                <a:solidFill>
+                  <a:srgbClr val="283C95"/>
+                </a:solidFill>
+                <a:latin typeface="+mj-lt"/>
+              </a:rPr>
+              <a:t>Customer Purchase Pattern Analysis:</a:t>
+            </a:r>
+          </a:p>
+          <a:p>
+            <a:pPr marL="342900" indent="-342900">
+              <a:buFont typeface="Arial" panose="020B0604020202020204" pitchFamily="34" charset="0"/>
+              <a:buChar char="•"/>
+            </a:pPr>
+            <a:r>
+              <a:rPr lang="en-US" sz="2000" b="1" i="0" dirty="0">
+                <a:effectLst/>
+                <a:latin typeface="+mj-lt"/>
+              </a:rPr>
+              <a:t>Understands buyer behavior to improve product placement and recommendations</a:t>
+            </a:r>
+          </a:p>
+          <a:p>
+            <a:pPr marL="342900" indent="-342900">
+              <a:buFont typeface="Arial" panose="020B0604020202020204" pitchFamily="34" charset="0"/>
+              <a:buChar char="•"/>
+            </a:pPr>
+            <a:r>
+              <a:rPr lang="en-US" sz="2000" b="1" i="0" dirty="0">
+                <a:effectLst/>
+                <a:latin typeface="+mj-lt"/>
+              </a:rPr>
+              <a:t>Data feeds into demand models for more accurate forecasts</a:t>
+            </a:r>
+            <a:endParaRPr lang="en-US" sz="2000" b="1" dirty="0">
+              <a:latin typeface="+mj-lt"/>
+            </a:endParaRPr>
+          </a:p>
+        </p:txBody>
+      </p:sp>
+      <p:sp>
+        <p:nvSpPr>
+          <p:cNvPr id="9" name="TextBox 8">
+            <a:extLst>
+              <a:ext uri="{FF2B5EF4-FFF2-40B4-BE49-F238E27FC236}">
+                <a16:creationId xmlns:a16="http://schemas.microsoft.com/office/drawing/2014/main" id="{27CB62F5-E123-8089-4C3E-0FDE252368B5}"/>
+              </a:ext>
+            </a:extLst>
+          </p:cNvPr>
+          <p:cNvSpPr txBox="1"/>
+          <p:nvPr/>
+        </p:nvSpPr>
+        <p:spPr>
+          <a:xfrm>
+            <a:off x="6096000" y="1533535"/>
+            <a:ext cx="5857461" cy="1754326"/>
+          </a:xfrm>
+          <a:prstGeom prst="rect">
+            <a:avLst/>
+          </a:prstGeom>
+          <a:noFill/>
+        </p:spPr>
+        <p:txBody>
+          <a:bodyPr wrap="square" rtlCol="0">
+            <a:spAutoFit/>
+          </a:bodyPr>
+          <a:lstStyle/>
+          <a:p>
+            <a:r>
+              <a:rPr lang="en-US" sz="2800" b="1" dirty="0">
+                <a:solidFill>
+                  <a:srgbClr val="283C95"/>
+                </a:solidFill>
+                <a:latin typeface="+mj-lt"/>
+              </a:rPr>
+              <a:t>Supply Chain Visibility Dashboard:</a:t>
+            </a:r>
+          </a:p>
+          <a:p>
+            <a:pPr marL="342900" indent="-342900">
+              <a:buFont typeface="Arial" panose="020B0604020202020204" pitchFamily="34" charset="0"/>
+              <a:buChar char="•"/>
+            </a:pPr>
+            <a:r>
+              <a:rPr lang="en-US" sz="2000" b="1" i="0" dirty="0">
+                <a:effectLst/>
+                <a:latin typeface="+mj-lt"/>
+              </a:rPr>
+              <a:t>Real-time tracking of logistics and stock movement</a:t>
+            </a:r>
+          </a:p>
+          <a:p>
+            <a:pPr marL="342900" indent="-342900">
+              <a:buFont typeface="Arial" panose="020B0604020202020204" pitchFamily="34" charset="0"/>
+              <a:buChar char="•"/>
+            </a:pPr>
+            <a:r>
+              <a:rPr lang="en-US" sz="2000" b="1" i="0" dirty="0">
+                <a:effectLst/>
+                <a:latin typeface="+mj-lt"/>
+              </a:rPr>
+              <a:t>Can integrate demand predictions for proactive planning</a:t>
+            </a:r>
+            <a:endParaRPr lang="en-US" sz="2000" b="1" dirty="0">
+              <a:latin typeface="+mj-lt"/>
+            </a:endParaRPr>
+          </a:p>
+        </p:txBody>
+      </p:sp>
+    </p:spTree>
+    <p:extLst>
+      <p:ext uri="{BB962C8B-B14F-4D97-AF65-F5344CB8AC3E}">
+        <p14:creationId xmlns:p14="http://schemas.microsoft.com/office/powerpoint/2010/main" val="2767524853"/>
+      </p:ext>
+    </p:extLst>
+  </p:cSld>
+  <p:clrMapOvr>
+    <a:masterClrMapping/>
+  </p:clrMapOvr>
+  <mc:AlternateContent xmlns:mc="http://schemas.openxmlformats.org/markup-compatibility/2006">
+    <mc:Choice xmlns:p159="http://schemas.microsoft.com/office/powerpoint/2015/09/main" Requires="p159">
+      <p:transition spd="slow">
+        <p159:morph option="byObject"/>
+      </p:transition>
+    </mc:Choice>
+    <mc:Fallback>
+      <p:transition spd="slow">
+        <p:fade/>
+      </p:transition>
+    </mc:Fallback>
+  </mc:AlternateContent>
+</p:sld>
+</file>
+
+<file path=ppt/slides/slide7.xml><?xml version="1.0" encoding="utf-8"?>
 <p:sld xmlns:a="http://schemas.openxmlformats.org/drawingml/2006/main" xmlns:r="http://schemas.openxmlformats.org/officeDocument/2006/relationships" xmlns:p="http://schemas.openxmlformats.org/presentationml/2006/main">
   <p:cSld>
     <p:spTree>
@@ -8929,13 +15903,13 @@
   <p:clrMapOvr>
     <a:masterClrMapping/>
   </p:clrMapOvr>
-  <mc:AlternateContent xmlns:mc="http://schemas.openxmlformats.org/markup-compatibility/2006" xmlns:p159="http://schemas.microsoft.com/office/powerpoint/2015/09/main">
-    <mc:Choice Requires="p159">
-      <p:transition xmlns:p14="http://schemas.microsoft.com/office/powerpoint/2010/main" spd="slow" p14:dur="2000">
+  <mc:AlternateContent xmlns:mc="http://schemas.openxmlformats.org/markup-compatibility/2006">
+    <mc:Choice xmlns:p159="http://schemas.microsoft.com/office/powerpoint/2015/09/main" Requires="p159">
+      <p:transition spd="slow">
         <p159:morph option="byObject"/>
       </p:transition>
     </mc:Choice>
-    <mc:Fallback xmlns="">
+    <mc:Fallback>
       <p:transition spd="slow">
         <p:fade/>
       </p:transition>
@@ -8944,7 +15918,7 @@
 </p:sld>
 </file>
 
-<file path=ppt/slides/slide5.xml><?xml version="1.0" encoding="utf-8"?>
+<file path=ppt/slides/slide8.xml><?xml version="1.0" encoding="utf-8"?>
 <p:sld xmlns:a="http://schemas.openxmlformats.org/drawingml/2006/main" xmlns:r="http://schemas.openxmlformats.org/officeDocument/2006/relationships" xmlns:p="http://schemas.openxmlformats.org/presentationml/2006/main">
   <p:cSld>
     <p:spTree>
@@ -9272,13 +16246,13 @@
   <p:clrMapOvr>
     <a:masterClrMapping/>
   </p:clrMapOvr>
-  <mc:AlternateContent xmlns:mc="http://schemas.openxmlformats.org/markup-compatibility/2006" xmlns:p159="http://schemas.microsoft.com/office/powerpoint/2015/09/main">
-    <mc:Choice Requires="p159">
-      <p:transition xmlns:p14="http://schemas.microsoft.com/office/powerpoint/2010/main" spd="slow" p14:dur="2000">
+  <mc:AlternateContent xmlns:mc="http://schemas.openxmlformats.org/markup-compatibility/2006">
+    <mc:Choice xmlns:p159="http://schemas.microsoft.com/office/powerpoint/2015/09/main" Requires="p159">
+      <p:transition spd="slow">
         <p159:morph option="byObject"/>
       </p:transition>
     </mc:Choice>
-    <mc:Fallback xmlns="">
+    <mc:Fallback>
       <p:transition spd="slow">
         <p:fade/>
       </p:transition>
@@ -9287,7 +16261,7 @@
 </p:sld>
 </file>
 
-<file path=ppt/slides/slide6.xml><?xml version="1.0" encoding="utf-8"?>
+<file path=ppt/slides/slide9.xml><?xml version="1.0" encoding="utf-8"?>
 <p:sld xmlns:a="http://schemas.openxmlformats.org/drawingml/2006/main" xmlns:r="http://schemas.openxmlformats.org/officeDocument/2006/relationships" xmlns:p="http://schemas.openxmlformats.org/presentationml/2006/main">
   <p:cSld>
     <p:spTree>
@@ -9577,956 +16551,13 @@
   <p:clrMapOvr>
     <a:masterClrMapping/>
   </p:clrMapOvr>
-  <mc:AlternateContent xmlns:mc="http://schemas.openxmlformats.org/markup-compatibility/2006" xmlns:p159="http://schemas.microsoft.com/office/powerpoint/2015/09/main">
-    <mc:Choice Requires="p159">
-      <p:transition xmlns:p14="http://schemas.microsoft.com/office/powerpoint/2010/main" spd="slow" p14:dur="2000">
-        <p159:morph option="byObject"/>
-      </p:transition>
-    </mc:Choice>
-    <mc:Fallback xmlns="">
-      <p:transition spd="slow">
-        <p:fade/>
-      </p:transition>
-    </mc:Fallback>
-  </mc:AlternateContent>
-</p:sld>
-</file>
-
-<file path=ppt/slides/slide7.xml><?xml version="1.0" encoding="utf-8"?>
-<p:sld xmlns:a="http://schemas.openxmlformats.org/drawingml/2006/main" xmlns:r="http://schemas.openxmlformats.org/officeDocument/2006/relationships" xmlns:p="http://schemas.openxmlformats.org/presentationml/2006/main">
-  <p:cSld>
-    <p:spTree>
-      <p:nvGrpSpPr>
-        <p:cNvPr id="1" name="">
-          <a:extLst>
-            <a:ext uri="{FF2B5EF4-FFF2-40B4-BE49-F238E27FC236}">
-              <a16:creationId xmlns:a16="http://schemas.microsoft.com/office/drawing/2014/main" id="{81EC5CB5-F09B-75CD-9B78-D00C0D8F760B}"/>
-            </a:ext>
-          </a:extLst>
-        </p:cNvPr>
-        <p:cNvGrpSpPr/>
-        <p:nvPr/>
-      </p:nvGrpSpPr>
-      <p:grpSpPr>
-        <a:xfrm>
-          <a:off x="0" y="0"/>
-          <a:ext cx="0" cy="0"/>
-          <a:chOff x="0" y="0"/>
-          <a:chExt cx="0" cy="0"/>
-        </a:xfrm>
-      </p:grpSpPr>
-      <p:sp>
-        <p:nvSpPr>
-          <p:cNvPr id="2" name="Title 1">
-            <a:extLst>
-              <a:ext uri="{FF2B5EF4-FFF2-40B4-BE49-F238E27FC236}">
-                <a16:creationId xmlns:a16="http://schemas.microsoft.com/office/drawing/2014/main" id="{1FB18C1C-24C9-2617-7644-44003871835B}"/>
-              </a:ext>
-            </a:extLst>
-          </p:cNvPr>
-          <p:cNvSpPr>
-            <a:spLocks noGrp="1"/>
-          </p:cNvSpPr>
-          <p:nvPr>
-            <p:ph type="title"/>
-          </p:nvPr>
-        </p:nvSpPr>
-        <p:spPr>
-          <a:xfrm>
-            <a:off x="606318" y="214540"/>
-            <a:ext cx="10515600" cy="1325563"/>
-          </a:xfrm>
-        </p:spPr>
-        <p:txBody>
-          <a:bodyPr/>
-          <a:lstStyle/>
-          <a:p>
-            <a:r>
-              <a:rPr lang="en-US" sz="4400" dirty="0">
-                <a:solidFill>
-                  <a:srgbClr val="283C95"/>
-                </a:solidFill>
-                <a:latin typeface="Aptos ExtraBold" panose="020B0004020202020204" pitchFamily="34" charset="0"/>
-              </a:rPr>
-              <a:t>03 Data Cleaning and Preprocessing</a:t>
-            </a:r>
-            <a:endParaRPr lang="en-US" dirty="0">
-              <a:solidFill>
-                <a:srgbClr val="283C95"/>
-              </a:solidFill>
-              <a:latin typeface="Aptos ExtraBold" panose="020B0004020202020204" pitchFamily="34" charset="0"/>
-            </a:endParaRPr>
-          </a:p>
-        </p:txBody>
-      </p:sp>
-      <p:sp>
-        <p:nvSpPr>
-          <p:cNvPr id="3" name="Title 1">
-            <a:extLst>
-              <a:ext uri="{FF2B5EF4-FFF2-40B4-BE49-F238E27FC236}">
-                <a16:creationId xmlns:a16="http://schemas.microsoft.com/office/drawing/2014/main" id="{36E8E5A8-A303-EB44-953E-03278CE89478}"/>
-              </a:ext>
-            </a:extLst>
-          </p:cNvPr>
-          <p:cNvSpPr txBox="1">
-            <a:spLocks/>
-          </p:cNvSpPr>
-          <p:nvPr/>
-        </p:nvSpPr>
-        <p:spPr>
-          <a:xfrm>
-            <a:off x="838200" y="344853"/>
-            <a:ext cx="10515600" cy="1325563"/>
-          </a:xfrm>
-          <a:prstGeom prst="rect">
-            <a:avLst/>
-          </a:prstGeom>
-        </p:spPr>
-        <p:txBody>
-          <a:bodyPr vert="horz" lIns="91440" tIns="45720" rIns="91440" bIns="45720" rtlCol="0" anchor="ctr">
-            <a:normAutofit/>
-          </a:bodyPr>
-          <a:lstStyle>
-            <a:lvl1pPr algn="l" defTabSz="914400" rtl="0" eaLnBrk="1" latinLnBrk="0" hangingPunct="1">
-              <a:lnSpc>
-                <a:spcPct val="90000"/>
-              </a:lnSpc>
-              <a:spcBef>
-                <a:spcPct val="0"/>
-              </a:spcBef>
-              <a:buNone/>
-              <a:defRPr sz="4400" kern="1200">
-                <a:solidFill>
-                  <a:schemeClr val="tx1"/>
-                </a:solidFill>
-                <a:latin typeface="+mj-lt"/>
-                <a:ea typeface="+mj-ea"/>
-                <a:cs typeface="+mj-cs"/>
-              </a:defRPr>
-            </a:lvl1pPr>
-          </a:lstStyle>
-          <a:p>
-            <a:endParaRPr lang="en-US" dirty="0">
-              <a:solidFill>
-                <a:srgbClr val="283C95"/>
-              </a:solidFill>
-              <a:latin typeface="Aptos ExtraBold" panose="020B0004020202020204" pitchFamily="34" charset="0"/>
-            </a:endParaRPr>
-          </a:p>
-        </p:txBody>
-      </p:sp>
-      <p:sp>
-        <p:nvSpPr>
-          <p:cNvPr id="4" name="TextBox 3">
-            <a:extLst>
-              <a:ext uri="{FF2B5EF4-FFF2-40B4-BE49-F238E27FC236}">
-                <a16:creationId xmlns:a16="http://schemas.microsoft.com/office/drawing/2014/main" id="{9DC6492E-291F-1323-7C53-0D2C37E388CF}"/>
-              </a:ext>
-            </a:extLst>
-          </p:cNvPr>
-          <p:cNvSpPr txBox="1"/>
-          <p:nvPr/>
-        </p:nvSpPr>
-        <p:spPr>
-          <a:xfrm>
-            <a:off x="606318" y="1343650"/>
-            <a:ext cx="3426420" cy="523220"/>
-          </a:xfrm>
-          <a:prstGeom prst="rect">
-            <a:avLst/>
-          </a:prstGeom>
-          <a:noFill/>
-        </p:spPr>
-        <p:txBody>
-          <a:bodyPr wrap="square" rtlCol="0">
-            <a:spAutoFit/>
-          </a:bodyPr>
-          <a:lstStyle/>
-          <a:p>
-            <a:r>
-              <a:rPr lang="en-US" sz="2800" b="1" dirty="0">
-                <a:solidFill>
-                  <a:schemeClr val="tx1">
-                    <a:lumMod val="75000"/>
-                    <a:lumOff val="25000"/>
-                  </a:schemeClr>
-                </a:solidFill>
-              </a:rPr>
-              <a:t>Feature Engineering</a:t>
-            </a:r>
-          </a:p>
-        </p:txBody>
-      </p:sp>
-      <p:sp>
-        <p:nvSpPr>
-          <p:cNvPr id="11" name="TextBox 10">
-            <a:extLst>
-              <a:ext uri="{FF2B5EF4-FFF2-40B4-BE49-F238E27FC236}">
-                <a16:creationId xmlns:a16="http://schemas.microsoft.com/office/drawing/2014/main" id="{E349E6CD-4AB5-724B-0E48-19EA42D8FECB}"/>
-              </a:ext>
-            </a:extLst>
-          </p:cNvPr>
-          <p:cNvSpPr txBox="1"/>
-          <p:nvPr/>
-        </p:nvSpPr>
-        <p:spPr>
-          <a:xfrm>
-            <a:off x="606318" y="2384027"/>
-            <a:ext cx="9358297" cy="830997"/>
-          </a:xfrm>
-          <a:prstGeom prst="rect">
-            <a:avLst/>
-          </a:prstGeom>
-          <a:noFill/>
-        </p:spPr>
-        <p:txBody>
-          <a:bodyPr wrap="square" rtlCol="0">
-            <a:spAutoFit/>
-          </a:bodyPr>
-          <a:lstStyle/>
-          <a:p>
-            <a:pPr marL="342900" indent="-342900">
-              <a:buFont typeface="Arial" panose="020B0604020202020204" pitchFamily="34" charset="0"/>
-              <a:buChar char="•"/>
-            </a:pPr>
-            <a:r>
-              <a:rPr lang="en-US" sz="2400" b="1" dirty="0"/>
-              <a:t>Encoded Categorical Variables (One-Hot &amp; Label Encoding): Ship Mode, Segment …etc.</a:t>
-            </a:r>
-          </a:p>
-        </p:txBody>
-      </p:sp>
-      <p:sp>
-        <p:nvSpPr>
-          <p:cNvPr id="5" name="TextBox 4">
-            <a:extLst>
-              <a:ext uri="{FF2B5EF4-FFF2-40B4-BE49-F238E27FC236}">
-                <a16:creationId xmlns:a16="http://schemas.microsoft.com/office/drawing/2014/main" id="{277E6449-ACF5-1426-07C3-A4B49EF5332A}"/>
-              </a:ext>
-            </a:extLst>
-          </p:cNvPr>
-          <p:cNvSpPr txBox="1"/>
-          <p:nvPr/>
-        </p:nvSpPr>
-        <p:spPr>
-          <a:xfrm>
-            <a:off x="606317" y="3342891"/>
-            <a:ext cx="9358297" cy="1200329"/>
-          </a:xfrm>
-          <a:prstGeom prst="rect">
-            <a:avLst/>
-          </a:prstGeom>
-          <a:noFill/>
-        </p:spPr>
-        <p:txBody>
-          <a:bodyPr wrap="square" rtlCol="0">
-            <a:spAutoFit/>
-          </a:bodyPr>
-          <a:lstStyle/>
-          <a:p>
-            <a:pPr marL="342900" indent="-342900">
-              <a:buFont typeface="Arial" panose="020B0604020202020204" pitchFamily="34" charset="0"/>
-              <a:buChar char="•"/>
-            </a:pPr>
-            <a:r>
-              <a:rPr lang="en-US" sz="2400" b="1" dirty="0"/>
-              <a:t>Maintained a Unified Date Format across features “</a:t>
-            </a:r>
-            <a:r>
-              <a:rPr lang="en-US" sz="2400" b="0" dirty="0">
-                <a:effectLst/>
-              </a:rPr>
-              <a:t>%d/%m/%Y”.</a:t>
-            </a:r>
-            <a:r>
-              <a:rPr lang="en-US" sz="2400" b="1" dirty="0"/>
-              <a:t> And extracted Temporal features from the date column (</a:t>
-            </a:r>
-            <a:r>
-              <a:rPr lang="en-US" sz="2000" dirty="0"/>
-              <a:t>Day, Month, Year</a:t>
-            </a:r>
-            <a:r>
-              <a:rPr lang="en-US" sz="2400" b="1" dirty="0"/>
-              <a:t>)</a:t>
-            </a:r>
-          </a:p>
-        </p:txBody>
-      </p:sp>
-      <p:sp>
-        <p:nvSpPr>
-          <p:cNvPr id="6" name="TextBox 5">
-            <a:extLst>
-              <a:ext uri="{FF2B5EF4-FFF2-40B4-BE49-F238E27FC236}">
-                <a16:creationId xmlns:a16="http://schemas.microsoft.com/office/drawing/2014/main" id="{1A2DA8D0-6996-0865-0D9B-C9FB1881B850}"/>
-              </a:ext>
-            </a:extLst>
-          </p:cNvPr>
-          <p:cNvSpPr txBox="1"/>
-          <p:nvPr/>
-        </p:nvSpPr>
-        <p:spPr>
-          <a:xfrm>
-            <a:off x="606317" y="4612472"/>
-            <a:ext cx="9358297" cy="461665"/>
-          </a:xfrm>
-          <a:prstGeom prst="rect">
-            <a:avLst/>
-          </a:prstGeom>
-          <a:noFill/>
-        </p:spPr>
-        <p:txBody>
-          <a:bodyPr wrap="square" rtlCol="0">
-            <a:spAutoFit/>
-          </a:bodyPr>
-          <a:lstStyle/>
-          <a:p>
-            <a:pPr marL="342900" indent="-342900">
-              <a:buFont typeface="Arial" panose="020B0604020202020204" pitchFamily="34" charset="0"/>
-              <a:buChar char="•"/>
-            </a:pPr>
-            <a:r>
-              <a:rPr lang="en-US" sz="2400" b="1" dirty="0"/>
-              <a:t>Obtained an Aggregated Sales Performance per Product Feature</a:t>
-            </a:r>
-          </a:p>
-        </p:txBody>
-      </p:sp>
-    </p:spTree>
-    <p:extLst>
-      <p:ext uri="{BB962C8B-B14F-4D97-AF65-F5344CB8AC3E}">
-        <p14:creationId xmlns:p14="http://schemas.microsoft.com/office/powerpoint/2010/main" val="617375050"/>
-      </p:ext>
-    </p:extLst>
-  </p:cSld>
-  <p:clrMapOvr>
-    <a:masterClrMapping/>
-  </p:clrMapOvr>
   <mc:AlternateContent xmlns:mc="http://schemas.openxmlformats.org/markup-compatibility/2006">
     <mc:Choice xmlns:p159="http://schemas.microsoft.com/office/powerpoint/2015/09/main" Requires="p159">
-      <p:transition xmlns:p14="http://schemas.microsoft.com/office/powerpoint/2010/main" spd="slow" p14:dur="2000">
+      <p:transition spd="slow">
         <p159:morph option="byObject"/>
       </p:transition>
     </mc:Choice>
     <mc:Fallback>
-      <p:transition spd="slow">
-        <p:fade/>
-      </p:transition>
-    </mc:Fallback>
-  </mc:AlternateContent>
-</p:sld>
-</file>
-
-<file path=ppt/slides/slide8.xml><?xml version="1.0" encoding="utf-8"?>
-<p:sld xmlns:a="http://schemas.openxmlformats.org/drawingml/2006/main" xmlns:r="http://schemas.openxmlformats.org/officeDocument/2006/relationships" xmlns:p="http://schemas.openxmlformats.org/presentationml/2006/main">
-  <p:cSld>
-    <p:spTree>
-      <p:nvGrpSpPr>
-        <p:cNvPr id="1" name="">
-          <a:extLst>
-            <a:ext uri="{FF2B5EF4-FFF2-40B4-BE49-F238E27FC236}">
-              <a16:creationId xmlns:a16="http://schemas.microsoft.com/office/drawing/2014/main" id="{2A547EFA-24ED-AA96-B71C-385585245D5E}"/>
-            </a:ext>
-          </a:extLst>
-        </p:cNvPr>
-        <p:cNvGrpSpPr/>
-        <p:nvPr/>
-      </p:nvGrpSpPr>
-      <p:grpSpPr>
-        <a:xfrm>
-          <a:off x="0" y="0"/>
-          <a:ext cx="0" cy="0"/>
-          <a:chOff x="0" y="0"/>
-          <a:chExt cx="0" cy="0"/>
-        </a:xfrm>
-      </p:grpSpPr>
-      <p:sp>
-        <p:nvSpPr>
-          <p:cNvPr id="2" name="Title 1">
-            <a:extLst>
-              <a:ext uri="{FF2B5EF4-FFF2-40B4-BE49-F238E27FC236}">
-                <a16:creationId xmlns:a16="http://schemas.microsoft.com/office/drawing/2014/main" id="{0B66F485-11AB-D480-1756-23E4CD846F6A}"/>
-              </a:ext>
-            </a:extLst>
-          </p:cNvPr>
-          <p:cNvSpPr>
-            <a:spLocks noGrp="1"/>
-          </p:cNvSpPr>
-          <p:nvPr>
-            <p:ph type="title"/>
-          </p:nvPr>
-        </p:nvSpPr>
-        <p:spPr>
-          <a:xfrm>
-            <a:off x="606318" y="214540"/>
-            <a:ext cx="10515600" cy="1325563"/>
-          </a:xfrm>
-        </p:spPr>
-        <p:txBody>
-          <a:bodyPr/>
-          <a:lstStyle/>
-          <a:p>
-            <a:r>
-              <a:rPr lang="en-US" sz="4400" dirty="0">
-                <a:solidFill>
-                  <a:srgbClr val="283C95"/>
-                </a:solidFill>
-                <a:latin typeface="Aptos ExtraBold" panose="020B0004020202020204" pitchFamily="34" charset="0"/>
-              </a:rPr>
-              <a:t>04 EDA Insights</a:t>
-            </a:r>
-            <a:endParaRPr lang="en-US" dirty="0">
-              <a:solidFill>
-                <a:srgbClr val="283C95"/>
-              </a:solidFill>
-              <a:latin typeface="Aptos ExtraBold" panose="020B0004020202020204" pitchFamily="34" charset="0"/>
-            </a:endParaRPr>
-          </a:p>
-        </p:txBody>
-      </p:sp>
-      <p:sp>
-        <p:nvSpPr>
-          <p:cNvPr id="3" name="Title 1">
-            <a:extLst>
-              <a:ext uri="{FF2B5EF4-FFF2-40B4-BE49-F238E27FC236}">
-                <a16:creationId xmlns:a16="http://schemas.microsoft.com/office/drawing/2014/main" id="{63DE4D1E-63B9-0FB2-884B-937FD34F2489}"/>
-              </a:ext>
-            </a:extLst>
-          </p:cNvPr>
-          <p:cNvSpPr txBox="1">
-            <a:spLocks/>
-          </p:cNvSpPr>
-          <p:nvPr/>
-        </p:nvSpPr>
-        <p:spPr>
-          <a:xfrm>
-            <a:off x="838200" y="344853"/>
-            <a:ext cx="10515600" cy="1325563"/>
-          </a:xfrm>
-          <a:prstGeom prst="rect">
-            <a:avLst/>
-          </a:prstGeom>
-        </p:spPr>
-        <p:txBody>
-          <a:bodyPr vert="horz" lIns="91440" tIns="45720" rIns="91440" bIns="45720" rtlCol="0" anchor="ctr">
-            <a:normAutofit/>
-          </a:bodyPr>
-          <a:lstStyle>
-            <a:lvl1pPr algn="l" defTabSz="914400" rtl="0" eaLnBrk="1" latinLnBrk="0" hangingPunct="1">
-              <a:lnSpc>
-                <a:spcPct val="90000"/>
-              </a:lnSpc>
-              <a:spcBef>
-                <a:spcPct val="0"/>
-              </a:spcBef>
-              <a:buNone/>
-              <a:defRPr sz="4400" kern="1200">
-                <a:solidFill>
-                  <a:schemeClr val="tx1"/>
-                </a:solidFill>
-                <a:latin typeface="+mj-lt"/>
-                <a:ea typeface="+mj-ea"/>
-                <a:cs typeface="+mj-cs"/>
-              </a:defRPr>
-            </a:lvl1pPr>
-          </a:lstStyle>
-          <a:p>
-            <a:endParaRPr lang="en-US" dirty="0">
-              <a:solidFill>
-                <a:srgbClr val="283C95"/>
-              </a:solidFill>
-              <a:latin typeface="Aptos ExtraBold" panose="020B0004020202020204" pitchFamily="34" charset="0"/>
-            </a:endParaRPr>
-          </a:p>
-        </p:txBody>
-      </p:sp>
-      <p:sp>
-        <p:nvSpPr>
-          <p:cNvPr id="4" name="TextBox 3">
-            <a:extLst>
-              <a:ext uri="{FF2B5EF4-FFF2-40B4-BE49-F238E27FC236}">
-                <a16:creationId xmlns:a16="http://schemas.microsoft.com/office/drawing/2014/main" id="{FBA2C955-E747-08C2-1EA4-8CBBEF95684D}"/>
-              </a:ext>
-            </a:extLst>
-          </p:cNvPr>
-          <p:cNvSpPr txBox="1"/>
-          <p:nvPr/>
-        </p:nvSpPr>
-        <p:spPr>
-          <a:xfrm>
-            <a:off x="606318" y="1343650"/>
-            <a:ext cx="4411159" cy="523220"/>
-          </a:xfrm>
-          <a:prstGeom prst="rect">
-            <a:avLst/>
-          </a:prstGeom>
-          <a:noFill/>
-        </p:spPr>
-        <p:txBody>
-          <a:bodyPr wrap="square" rtlCol="0">
-            <a:spAutoFit/>
-          </a:bodyPr>
-          <a:lstStyle/>
-          <a:p>
-            <a:r>
-              <a:rPr lang="en-US" sz="2800" b="1" dirty="0">
-                <a:solidFill>
-                  <a:schemeClr val="tx1">
-                    <a:lumMod val="75000"/>
-                    <a:lumOff val="25000"/>
-                  </a:schemeClr>
-                </a:solidFill>
-              </a:rPr>
-              <a:t>Product Analysis</a:t>
-            </a:r>
-          </a:p>
-        </p:txBody>
-      </p:sp>
-      <p:sp>
-        <p:nvSpPr>
-          <p:cNvPr id="8" name="TextBox 7">
-            <a:extLst>
-              <a:ext uri="{FF2B5EF4-FFF2-40B4-BE49-F238E27FC236}">
-                <a16:creationId xmlns:a16="http://schemas.microsoft.com/office/drawing/2014/main" id="{42A45353-7918-2A33-00E4-10E0C637F129}"/>
-              </a:ext>
-            </a:extLst>
-          </p:cNvPr>
-          <p:cNvSpPr txBox="1"/>
-          <p:nvPr/>
-        </p:nvSpPr>
-        <p:spPr>
-          <a:xfrm>
-            <a:off x="606317" y="2467362"/>
-            <a:ext cx="6568205" cy="3046988"/>
-          </a:xfrm>
-          <a:prstGeom prst="rect">
-            <a:avLst/>
-          </a:prstGeom>
-          <a:noFill/>
-        </p:spPr>
-        <p:txBody>
-          <a:bodyPr wrap="square" rtlCol="0">
-            <a:spAutoFit/>
-          </a:bodyPr>
-          <a:lstStyle/>
-          <a:p>
-            <a:pPr>
-              <a:buNone/>
-            </a:pPr>
-            <a:r>
-              <a:rPr lang="en-US" sz="2400" b="1" dirty="0">
-                <a:solidFill>
-                  <a:schemeClr val="tx1">
-                    <a:lumMod val="65000"/>
-                    <a:lumOff val="35000"/>
-                  </a:schemeClr>
-                </a:solidFill>
-              </a:rPr>
-              <a:t>The analysis indicates that the </a:t>
-            </a:r>
-            <a:r>
-              <a:rPr lang="en-US" sz="2400" b="1" dirty="0"/>
-              <a:t>Technology product category </a:t>
-            </a:r>
-            <a:r>
-              <a:rPr lang="en-US" sz="2400" b="1" dirty="0">
-                <a:solidFill>
-                  <a:schemeClr val="tx1">
-                    <a:lumMod val="65000"/>
-                    <a:lumOff val="35000"/>
-                  </a:schemeClr>
-                </a:solidFill>
-              </a:rPr>
-              <a:t>generates the </a:t>
-            </a:r>
-            <a:r>
-              <a:rPr lang="en-US" sz="2400" b="1" dirty="0"/>
-              <a:t>highest sales</a:t>
-            </a:r>
-            <a:r>
-              <a:rPr lang="en-US" sz="2400" b="1" dirty="0">
-                <a:solidFill>
-                  <a:schemeClr val="tx1">
-                    <a:lumMod val="65000"/>
-                    <a:lumOff val="35000"/>
-                  </a:schemeClr>
-                </a:solidFill>
-              </a:rPr>
-              <a:t>, despite the majority of offered products belonging</a:t>
-            </a:r>
-            <a:r>
-              <a:rPr lang="en-US" sz="2400" dirty="0"/>
-              <a:t> </a:t>
-            </a:r>
-            <a:r>
-              <a:rPr lang="en-US" sz="2400" b="1" dirty="0">
-                <a:solidFill>
-                  <a:schemeClr val="tx1">
-                    <a:lumMod val="65000"/>
-                    <a:lumOff val="35000"/>
-                  </a:schemeClr>
-                </a:solidFill>
-              </a:rPr>
-              <a:t>to the </a:t>
-            </a:r>
-            <a:r>
-              <a:rPr lang="en-US" sz="2400" b="1" dirty="0"/>
-              <a:t>Office Supplies</a:t>
-            </a:r>
-            <a:r>
-              <a:rPr lang="en-US" sz="2400" dirty="0"/>
-              <a:t> </a:t>
-            </a:r>
-            <a:r>
-              <a:rPr lang="en-US" sz="2400" b="1" dirty="0">
-                <a:solidFill>
-                  <a:schemeClr val="tx1">
-                    <a:lumMod val="65000"/>
-                    <a:lumOff val="35000"/>
-                  </a:schemeClr>
-                </a:solidFill>
-              </a:rPr>
-              <a:t>category.</a:t>
-            </a:r>
-          </a:p>
-          <a:p>
-            <a:pPr>
-              <a:buNone/>
-            </a:pPr>
-            <a:endParaRPr lang="en-US" sz="2400" b="1" dirty="0">
-              <a:solidFill>
-                <a:schemeClr val="tx1">
-                  <a:lumMod val="65000"/>
-                  <a:lumOff val="35000"/>
-                </a:schemeClr>
-              </a:solidFill>
-            </a:endParaRPr>
-          </a:p>
-          <a:p>
-            <a:r>
-              <a:rPr lang="en-US" sz="2400" b="1" dirty="0">
-                <a:solidFill>
-                  <a:schemeClr val="tx1">
-                    <a:lumMod val="65000"/>
-                    <a:lumOff val="35000"/>
-                  </a:schemeClr>
-                </a:solidFill>
-              </a:rPr>
-              <a:t>This suggests that </a:t>
-            </a:r>
-            <a:r>
-              <a:rPr lang="en-US" sz="2400" b="1" dirty="0"/>
-              <a:t>expanding the range of technology-related products</a:t>
-            </a:r>
-            <a:r>
-              <a:rPr lang="en-US" sz="2400" dirty="0"/>
-              <a:t> could lead to </a:t>
-            </a:r>
-            <a:r>
-              <a:rPr lang="en-US" sz="2400" b="1" dirty="0"/>
-              <a:t>higher future sales and revenue growth.</a:t>
-            </a:r>
-            <a:endParaRPr lang="en-US" sz="2400" dirty="0"/>
-          </a:p>
-        </p:txBody>
-      </p:sp>
-      <p:pic>
-        <p:nvPicPr>
-          <p:cNvPr id="12" name="Picture 11">
-            <a:extLst>
-              <a:ext uri="{FF2B5EF4-FFF2-40B4-BE49-F238E27FC236}">
-                <a16:creationId xmlns:a16="http://schemas.microsoft.com/office/drawing/2014/main" id="{C7B659A1-9130-485A-04E8-F9C22B28E088}"/>
-              </a:ext>
-            </a:extLst>
-          </p:cNvPr>
-          <p:cNvPicPr>
-            <a:picLocks noChangeAspect="1"/>
-          </p:cNvPicPr>
-          <p:nvPr/>
-        </p:nvPicPr>
-        <p:blipFill>
-          <a:blip r:embed="rId2"/>
-          <a:stretch>
-            <a:fillRect/>
-          </a:stretch>
-        </p:blipFill>
-        <p:spPr>
-          <a:xfrm>
-            <a:off x="7312619" y="344853"/>
-            <a:ext cx="4668365" cy="3157024"/>
-          </a:xfrm>
-          <a:prstGeom prst="rect">
-            <a:avLst/>
-          </a:prstGeom>
-        </p:spPr>
-      </p:pic>
-      <p:pic>
-        <p:nvPicPr>
-          <p:cNvPr id="14" name="Picture 13">
-            <a:extLst>
-              <a:ext uri="{FF2B5EF4-FFF2-40B4-BE49-F238E27FC236}">
-                <a16:creationId xmlns:a16="http://schemas.microsoft.com/office/drawing/2014/main" id="{F3673FAA-7273-CB57-6ED8-5163BD7355B7}"/>
-              </a:ext>
-            </a:extLst>
-          </p:cNvPr>
-          <p:cNvPicPr>
-            <a:picLocks noChangeAspect="1"/>
-          </p:cNvPicPr>
-          <p:nvPr/>
-        </p:nvPicPr>
-        <p:blipFill>
-          <a:blip r:embed="rId3"/>
-          <a:stretch>
-            <a:fillRect/>
-          </a:stretch>
-        </p:blipFill>
-        <p:spPr>
-          <a:xfrm>
-            <a:off x="7456976" y="3690955"/>
-            <a:ext cx="4641605" cy="2822192"/>
-          </a:xfrm>
-          <a:prstGeom prst="rect">
-            <a:avLst/>
-          </a:prstGeom>
-        </p:spPr>
-      </p:pic>
-    </p:spTree>
-    <p:extLst>
-      <p:ext uri="{BB962C8B-B14F-4D97-AF65-F5344CB8AC3E}">
-        <p14:creationId xmlns:p14="http://schemas.microsoft.com/office/powerpoint/2010/main" val="2751214929"/>
-      </p:ext>
-    </p:extLst>
-  </p:cSld>
-  <p:clrMapOvr>
-    <a:masterClrMapping/>
-  </p:clrMapOvr>
-  <mc:AlternateContent xmlns:mc="http://schemas.openxmlformats.org/markup-compatibility/2006" xmlns:p159="http://schemas.microsoft.com/office/powerpoint/2015/09/main">
-    <mc:Choice Requires="p159">
-      <p:transition xmlns:p14="http://schemas.microsoft.com/office/powerpoint/2010/main" spd="slow" p14:dur="2000">
-        <p159:morph option="byObject"/>
-      </p:transition>
-    </mc:Choice>
-    <mc:Fallback xmlns="">
-      <p:transition spd="slow">
-        <p:fade/>
-      </p:transition>
-    </mc:Fallback>
-  </mc:AlternateContent>
-</p:sld>
-</file>
-
-<file path=ppt/slides/slide9.xml><?xml version="1.0" encoding="utf-8"?>
-<p:sld xmlns:a="http://schemas.openxmlformats.org/drawingml/2006/main" xmlns:r="http://schemas.openxmlformats.org/officeDocument/2006/relationships" xmlns:p="http://schemas.openxmlformats.org/presentationml/2006/main">
-  <p:cSld>
-    <p:spTree>
-      <p:nvGrpSpPr>
-        <p:cNvPr id="1" name="">
-          <a:extLst>
-            <a:ext uri="{FF2B5EF4-FFF2-40B4-BE49-F238E27FC236}">
-              <a16:creationId xmlns:a16="http://schemas.microsoft.com/office/drawing/2014/main" id="{EF6B64B3-B001-3DBD-7D44-7A57EC760D9F}"/>
-            </a:ext>
-          </a:extLst>
-        </p:cNvPr>
-        <p:cNvGrpSpPr/>
-        <p:nvPr/>
-      </p:nvGrpSpPr>
-      <p:grpSpPr>
-        <a:xfrm>
-          <a:off x="0" y="0"/>
-          <a:ext cx="0" cy="0"/>
-          <a:chOff x="0" y="0"/>
-          <a:chExt cx="0" cy="0"/>
-        </a:xfrm>
-      </p:grpSpPr>
-      <p:sp>
-        <p:nvSpPr>
-          <p:cNvPr id="2" name="Title 1">
-            <a:extLst>
-              <a:ext uri="{FF2B5EF4-FFF2-40B4-BE49-F238E27FC236}">
-                <a16:creationId xmlns:a16="http://schemas.microsoft.com/office/drawing/2014/main" id="{2AF5112D-9A51-7B4D-A705-3FF1207791B8}"/>
-              </a:ext>
-            </a:extLst>
-          </p:cNvPr>
-          <p:cNvSpPr>
-            <a:spLocks noGrp="1"/>
-          </p:cNvSpPr>
-          <p:nvPr>
-            <p:ph type="title"/>
-          </p:nvPr>
-        </p:nvSpPr>
-        <p:spPr>
-          <a:xfrm>
-            <a:off x="606318" y="214540"/>
-            <a:ext cx="10515600" cy="1325563"/>
-          </a:xfrm>
-        </p:spPr>
-        <p:txBody>
-          <a:bodyPr/>
-          <a:lstStyle/>
-          <a:p>
-            <a:r>
-              <a:rPr lang="en-US" sz="4400" dirty="0">
-                <a:solidFill>
-                  <a:srgbClr val="283C95"/>
-                </a:solidFill>
-                <a:latin typeface="Aptos ExtraBold" panose="020B0004020202020204" pitchFamily="34" charset="0"/>
-              </a:rPr>
-              <a:t>04 EDA Insights</a:t>
-            </a:r>
-            <a:endParaRPr lang="en-US" dirty="0">
-              <a:solidFill>
-                <a:srgbClr val="283C95"/>
-              </a:solidFill>
-              <a:latin typeface="Aptos ExtraBold" panose="020B0004020202020204" pitchFamily="34" charset="0"/>
-            </a:endParaRPr>
-          </a:p>
-        </p:txBody>
-      </p:sp>
-      <p:sp>
-        <p:nvSpPr>
-          <p:cNvPr id="3" name="Title 1">
-            <a:extLst>
-              <a:ext uri="{FF2B5EF4-FFF2-40B4-BE49-F238E27FC236}">
-                <a16:creationId xmlns:a16="http://schemas.microsoft.com/office/drawing/2014/main" id="{99F7E5FA-EA89-1ACE-0BFF-9EB54C7F9EEC}"/>
-              </a:ext>
-            </a:extLst>
-          </p:cNvPr>
-          <p:cNvSpPr txBox="1">
-            <a:spLocks/>
-          </p:cNvSpPr>
-          <p:nvPr/>
-        </p:nvSpPr>
-        <p:spPr>
-          <a:xfrm>
-            <a:off x="838200" y="344853"/>
-            <a:ext cx="10515600" cy="1325563"/>
-          </a:xfrm>
-          <a:prstGeom prst="rect">
-            <a:avLst/>
-          </a:prstGeom>
-        </p:spPr>
-        <p:txBody>
-          <a:bodyPr vert="horz" lIns="91440" tIns="45720" rIns="91440" bIns="45720" rtlCol="0" anchor="ctr">
-            <a:normAutofit/>
-          </a:bodyPr>
-          <a:lstStyle>
-            <a:lvl1pPr algn="l" defTabSz="914400" rtl="0" eaLnBrk="1" latinLnBrk="0" hangingPunct="1">
-              <a:lnSpc>
-                <a:spcPct val="90000"/>
-              </a:lnSpc>
-              <a:spcBef>
-                <a:spcPct val="0"/>
-              </a:spcBef>
-              <a:buNone/>
-              <a:defRPr sz="4400" kern="1200">
-                <a:solidFill>
-                  <a:schemeClr val="tx1"/>
-                </a:solidFill>
-                <a:latin typeface="+mj-lt"/>
-                <a:ea typeface="+mj-ea"/>
-                <a:cs typeface="+mj-cs"/>
-              </a:defRPr>
-            </a:lvl1pPr>
-          </a:lstStyle>
-          <a:p>
-            <a:endParaRPr lang="en-US" dirty="0">
-              <a:solidFill>
-                <a:srgbClr val="283C95"/>
-              </a:solidFill>
-              <a:latin typeface="Aptos ExtraBold" panose="020B0004020202020204" pitchFamily="34" charset="0"/>
-            </a:endParaRPr>
-          </a:p>
-        </p:txBody>
-      </p:sp>
-      <p:sp>
-        <p:nvSpPr>
-          <p:cNvPr id="4" name="TextBox 3">
-            <a:extLst>
-              <a:ext uri="{FF2B5EF4-FFF2-40B4-BE49-F238E27FC236}">
-                <a16:creationId xmlns:a16="http://schemas.microsoft.com/office/drawing/2014/main" id="{EA5FCF39-A8D2-6FAD-D963-3E2B1C3E936A}"/>
-              </a:ext>
-            </a:extLst>
-          </p:cNvPr>
-          <p:cNvSpPr txBox="1"/>
-          <p:nvPr/>
-        </p:nvSpPr>
-        <p:spPr>
-          <a:xfrm>
-            <a:off x="606318" y="1363469"/>
-            <a:ext cx="4411159" cy="523220"/>
-          </a:xfrm>
-          <a:prstGeom prst="rect">
-            <a:avLst/>
-          </a:prstGeom>
-          <a:noFill/>
-        </p:spPr>
-        <p:txBody>
-          <a:bodyPr wrap="square" rtlCol="0">
-            <a:spAutoFit/>
-          </a:bodyPr>
-          <a:lstStyle/>
-          <a:p>
-            <a:r>
-              <a:rPr lang="en-US" sz="2800" b="1" dirty="0">
-                <a:solidFill>
-                  <a:schemeClr val="tx1">
-                    <a:lumMod val="75000"/>
-                    <a:lumOff val="25000"/>
-                  </a:schemeClr>
-                </a:solidFill>
-              </a:rPr>
-              <a:t>Top 10 Products Sales</a:t>
-            </a:r>
-          </a:p>
-        </p:txBody>
-      </p:sp>
-      <p:pic>
-        <p:nvPicPr>
-          <p:cNvPr id="8" name="Picture 7">
-            <a:extLst>
-              <a:ext uri="{FF2B5EF4-FFF2-40B4-BE49-F238E27FC236}">
-                <a16:creationId xmlns:a16="http://schemas.microsoft.com/office/drawing/2014/main" id="{6E0EEB83-C0AE-1F73-6CBF-850E0DA63C29}"/>
-              </a:ext>
-            </a:extLst>
-          </p:cNvPr>
-          <p:cNvPicPr>
-            <a:picLocks noChangeAspect="1"/>
-          </p:cNvPicPr>
-          <p:nvPr/>
-        </p:nvPicPr>
-        <p:blipFill>
-          <a:blip r:embed="rId2"/>
-          <a:stretch>
-            <a:fillRect/>
-          </a:stretch>
-        </p:blipFill>
-        <p:spPr>
-          <a:xfrm>
-            <a:off x="163944" y="2086708"/>
-            <a:ext cx="11864111" cy="4309209"/>
-          </a:xfrm>
-          <a:prstGeom prst="rect">
-            <a:avLst/>
-          </a:prstGeom>
-        </p:spPr>
-      </p:pic>
-    </p:spTree>
-    <p:extLst>
-      <p:ext uri="{BB962C8B-B14F-4D97-AF65-F5344CB8AC3E}">
-        <p14:creationId xmlns:p14="http://schemas.microsoft.com/office/powerpoint/2010/main" val="3419974981"/>
-      </p:ext>
-    </p:extLst>
-  </p:cSld>
-  <p:clrMapOvr>
-    <a:masterClrMapping/>
-  </p:clrMapOvr>
-  <mc:AlternateContent xmlns:mc="http://schemas.openxmlformats.org/markup-compatibility/2006" xmlns:p159="http://schemas.microsoft.com/office/powerpoint/2015/09/main">
-    <mc:Choice Requires="p159">
-      <p:transition xmlns:p14="http://schemas.microsoft.com/office/powerpoint/2010/main" spd="slow" p14:dur="2000">
-        <p159:morph option="byObject"/>
-      </p:transition>
-    </mc:Choice>
-    <mc:Fallback xmlns="">
       <p:transition spd="slow">
         <p:fade/>
       </p:transition>
